--- a/Model2/MVP.pptx
+++ b/Model2/MVP.pptx
@@ -8,12 +8,15 @@
     <p:sldId id="256" r:id="rId2"/>
     <p:sldId id="260" r:id="rId3"/>
     <p:sldId id="261" r:id="rId4"/>
-    <p:sldId id="262" r:id="rId5"/>
-    <p:sldId id="264" r:id="rId6"/>
-    <p:sldId id="265" r:id="rId7"/>
-    <p:sldId id="267" r:id="rId8"/>
-    <p:sldId id="268" r:id="rId9"/>
-    <p:sldId id="259" r:id="rId10"/>
+    <p:sldId id="269" r:id="rId5"/>
+    <p:sldId id="270" r:id="rId6"/>
+    <p:sldId id="271" r:id="rId7"/>
+    <p:sldId id="262" r:id="rId8"/>
+    <p:sldId id="264" r:id="rId9"/>
+    <p:sldId id="265" r:id="rId10"/>
+    <p:sldId id="267" r:id="rId11"/>
+    <p:sldId id="268" r:id="rId12"/>
+    <p:sldId id="259" r:id="rId13"/>
   </p:sldIdLst>
   <p:sldSz cx="12192000" cy="6858000"/>
   <p:notesSz cx="6858000" cy="9144000"/>
@@ -112,37 +115,15 @@
       </a:defRPr>
     </a:lvl9pPr>
   </p:defaultTextStyle>
+  <p:extLst>
+    <p:ext uri="{EFAFB233-063F-42B5-8137-9DF3F51BA10A}">
+      <p15:sldGuideLst xmlns:p15="http://schemas.microsoft.com/office/powerpoint/2012/main"/>
+    </p:ext>
+  </p:extLst>
 </p:presentation>
 </file>
 
 <file path=ppt/ink/ink1.xml><?xml version="1.0" encoding="utf-8"?>
-<inkml:ink xmlns:inkml="http://www.w3.org/2003/InkML">
-  <inkml:definitions>
-    <inkml:context xml:id="ctx0">
-      <inkml:inkSource xml:id="inkSrc0">
-        <inkml:traceFormat>
-          <inkml:channel name="X" type="integer" min="-2.14748E9" max="2.14748E9" units="cm"/>
-          <inkml:channel name="Y" type="integer" min="-2.14748E9" max="2.14748E9" units="cm"/>
-          <inkml:channel name="F" type="integer" max="32767" units="dev"/>
-        </inkml:traceFormat>
-        <inkml:channelProperties>
-          <inkml:channelProperty channel="X" name="resolution" value="1000" units="1/cm"/>
-          <inkml:channelProperty channel="Y" name="resolution" value="1000" units="1/cm"/>
-          <inkml:channelProperty channel="F" name="resolution" value="0" units="1/dev"/>
-        </inkml:channelProperties>
-      </inkml:inkSource>
-      <inkml:timestamp xml:id="ts0" timeString="2026-04-07T09:07:53.129"/>
-    </inkml:context>
-    <inkml:brush xml:id="br0">
-      <inkml:brushProperty name="width" value="0.035" units="cm"/>
-      <inkml:brushProperty name="height" value="0.035" units="cm"/>
-    </inkml:brush>
-  </inkml:definitions>
-  <inkml:trace contextRef="#ctx0" brushRef="#br0">0 461 24575,'0'-33'0,"2"0"0,1 1 0,11-54 0,-10 72 0,0 0 0,1 0 0,0 1 0,1-1 0,1 1 0,0 0 0,0 1 0,2 0 0,-1 0 0,16-16 0,-16 20 0,1-1 0,-1 2 0,1-1 0,1 1 0,-1 1 0,1 0 0,0 0 0,1 1 0,-1 0 0,1 0 0,0 2 0,17-5 0,18-3 0,0 2 0,1 2 0,60 0 0,-93 6 0,0 1 0,-1 1 0,1 1 0,18 3 0,-26-3 0,0 1 0,0-1 0,-1 1 0,1 0 0,-1 0 0,0 0 0,0 1 0,0 0 0,0 0 0,0 0 0,-1 0 0,4 6 0,6 5 0,-1 0 0,-1 1 0,-1 1 0,0 0 0,-1 0 0,-1 1 0,-1 0 0,0 1 0,-1-1 0,-1 2 0,-1-1 0,-1 1 0,0-1 0,0 30 0,-3-28 0,0 0 0,-2 0 0,0 0 0,-6 27 0,5-41 0,0 0 0,0 0 0,-1 0 0,0 0 0,0-1 0,-1 0 0,1 0 0,-1 0 0,-1 0 0,1 0 0,-1-1 0,0 0 0,0 0 0,0 0 0,-1 0 0,-7 4 0,-214 121 0,220-124 0,0-1 0,0 1 0,0 1 0,1-1 0,0 1 0,0 0 0,0 1 0,1-1 0,0 1 0,1 0 0,-4 9 0,-3 11 0,1 1 0,-6 30 0,1-3 0,14-50 0,-1 0 0,-1 0 0,1 0 0,-1-1 0,0 1 0,0 0 0,-1-1 0,1 0 0,-1 0 0,0 0 0,-1 0 0,1-1 0,-1 1 0,0-1 0,0-1 0,-11 7 0,7-5 0,-1-2 0,0 1 0,0-1 0,0-1 0,0 0 0,-1 0 0,1-1 0,-1 0 0,-12-1 0,48-1 0,2 0 0,0 1 0,0 2 0,44 7 0,-18 1 0,1-3 0,0-2 0,0-2 0,59-6 0,-33 2 0,-58 0 0,1-2 0,0 0 0,22-7 0,-19 4 0,47-5 0,-38 7 53,46-10 0,-50 7-543,0 1-1,36-1 1,-38 7-6336</inkml:trace>
-</inkml:ink>
-</file>
-
-<file path=ppt/ink/ink10.xml><?xml version="1.0" encoding="utf-8"?>
 <inkml:ink xmlns:inkml="http://www.w3.org/2003/InkML">
   <inkml:definitions>
     <inkml:context xml:id="ctx0">
@@ -169,61 +150,7 @@
 </inkml:ink>
 </file>
 
-<file path=ppt/ink/ink11.xml><?xml version="1.0" encoding="utf-8"?>
-<inkml:ink xmlns:inkml="http://www.w3.org/2003/InkML">
-  <inkml:definitions>
-    <inkml:context xml:id="ctx0">
-      <inkml:inkSource xml:id="inkSrc0">
-        <inkml:traceFormat>
-          <inkml:channel name="X" type="integer" min="-2.14748E9" max="2.14748E9" units="cm"/>
-          <inkml:channel name="Y" type="integer" min="-2.14748E9" max="2.14748E9" units="cm"/>
-          <inkml:channel name="F" type="integer" max="32767" units="dev"/>
-        </inkml:traceFormat>
-        <inkml:channelProperties>
-          <inkml:channelProperty channel="X" name="resolution" value="1000" units="1/cm"/>
-          <inkml:channelProperty channel="Y" name="resolution" value="1000" units="1/cm"/>
-          <inkml:channelProperty channel="F" name="resolution" value="0" units="1/dev"/>
-        </inkml:channelProperties>
-      </inkml:inkSource>
-      <inkml:timestamp xml:id="ts0" timeString="2026-04-07T09:25:41.818"/>
-    </inkml:context>
-    <inkml:brush xml:id="br0">
-      <inkml:brushProperty name="width" value="0.035" units="cm"/>
-      <inkml:brushProperty name="height" value="0.035" units="cm"/>
-    </inkml:brush>
-  </inkml:definitions>
-  <inkml:trace contextRef="#ctx0" brushRef="#br0">4 536 24575,'-1'-74'0,"-1"39"0,1 1 0,2-1 0,2 0 0,11-57 0,-9 73 0,0 1 0,2 0 0,0 1 0,1-1 0,0 1 0,17-23 0,-21 34 0,2-1 0,-1 1 0,1 0 0,0 1 0,0-1 0,0 1 0,1 0 0,0 1 0,0 0 0,0 0 0,0 0 0,1 1 0,-1 0 0,1 1 0,0-1 0,0 1 0,13-1 0,15-1 0,59 2 0,-84 3 0,0-1 0,0 2 0,0-1 0,0 2 0,0-1 0,-1 2 0,1-1 0,-1 1 0,17 10 0,4 7 0,56 34 0,-77-50 0,-1 0 0,1-1 0,0 0 0,1 0 0,-1-1 0,20 4 0,-25-7 0,0 0 0,0 0 0,0-1 0,0 1 0,0-1 0,0 0 0,0-1 0,0 1 0,0-1 0,-1 0 0,1 0 0,0 0 0,-1 0 0,8-7 0,2-2 0,-1 0 0,21-25 0,-29 31 0,-5 4 0,0 1 0,1-1 0,-1 0 0,0 1 0,1-1 0,-1 1 0,1-1 0,-1 1 0,1-1 0,-1 1 0,1 0 0,-1-1 0,1 1 0,0 0 0,-1-1 0,1 1 0,-1 0 0,1 0 0,0-1 0,-1 1 0,1 0 0,0 0 0,-1 0 0,1 0 0,0 0 0,-1 0 0,1 0 0,0 0 0,-1 0 0,1 0 0,1 1 0,6 19 0,-6 44 0,-3-55 0,-2 108 0,4 164 0,15-196 0,-10-63 0,-2 1 0,3 25 0,16 166 0,-18-188 0,2 0 0,0-1 0,1 0 0,2-1 0,0 0 0,17 28 0,-16-36 0,0 0 0,-2 1 0,0 0 0,-1 1 0,0 0 0,-2 0 0,0 0 0,-1 1 0,-1 0 0,2 22 0,-8 192 0,1-227-3,-1-13-13,-2-4-1330,-3-3-5480</inkml:trace>
-</inkml:ink>
-</file>
-
-<file path=ppt/ink/ink12.xml><?xml version="1.0" encoding="utf-8"?>
-<inkml:ink xmlns:inkml="http://www.w3.org/2003/InkML">
-  <inkml:definitions>
-    <inkml:context xml:id="ctx0">
-      <inkml:inkSource xml:id="inkSrc0">
-        <inkml:traceFormat>
-          <inkml:channel name="X" type="integer" min="-2.14748E9" max="2.14748E9" units="cm"/>
-          <inkml:channel name="Y" type="integer" min="-2.14748E9" max="2.14748E9" units="cm"/>
-          <inkml:channel name="F" type="integer" max="32767" units="dev"/>
-        </inkml:traceFormat>
-        <inkml:channelProperties>
-          <inkml:channelProperty channel="X" name="resolution" value="1000" units="1/cm"/>
-          <inkml:channelProperty channel="Y" name="resolution" value="1000" units="1/cm"/>
-          <inkml:channelProperty channel="F" name="resolution" value="0" units="1/dev"/>
-        </inkml:channelProperties>
-      </inkml:inkSource>
-      <inkml:timestamp xml:id="ts0" timeString="2026-04-07T09:25:42.428"/>
-    </inkml:context>
-    <inkml:brush xml:id="br0">
-      <inkml:brushProperty name="width" value="0.035" units="cm"/>
-      <inkml:brushProperty name="height" value="0.035" units="cm"/>
-    </inkml:brush>
-  </inkml:definitions>
-  <inkml:trace contextRef="#ctx0" brushRef="#br0">1 64 24575,'50'-2'0,"79"-14"0,-78 7 0,73-1 0,-77 9-455,-1-2 0,72-13 0,-88 10-6371</inkml:trace>
-</inkml:ink>
-</file>
-
-<file path=ppt/ink/ink13.xml><?xml version="1.0" encoding="utf-8"?>
+<file path=ppt/ink/ink2.xml><?xml version="1.0" encoding="utf-8"?>
 <inkml:ink xmlns:inkml="http://www.w3.org/2003/InkML">
   <inkml:definitions>
     <inkml:context xml:id="ctx0">
@@ -247,87 +174,6 @@
     </inkml:brush>
   </inkml:definitions>
   <inkml:trace contextRef="#ctx0" brushRef="#br0">0 0 24575,'0'0'-8191</inkml:trace>
-</inkml:ink>
-</file>
-
-<file path=ppt/ink/ink14.xml><?xml version="1.0" encoding="utf-8"?>
-<inkml:ink xmlns:inkml="http://www.w3.org/2003/InkML">
-  <inkml:definitions>
-    <inkml:context xml:id="ctx0">
-      <inkml:inkSource xml:id="inkSrc0">
-        <inkml:traceFormat>
-          <inkml:channel name="X" type="integer" min="-2.14748E9" max="2.14748E9" units="cm"/>
-          <inkml:channel name="Y" type="integer" min="-2.14748E9" max="2.14748E9" units="cm"/>
-          <inkml:channel name="F" type="integer" max="32767" units="dev"/>
-        </inkml:traceFormat>
-        <inkml:channelProperties>
-          <inkml:channelProperty channel="X" name="resolution" value="1000" units="1/cm"/>
-          <inkml:channelProperty channel="Y" name="resolution" value="1000" units="1/cm"/>
-          <inkml:channelProperty channel="F" name="resolution" value="0" units="1/dev"/>
-        </inkml:channelProperties>
-      </inkml:inkSource>
-      <inkml:timestamp xml:id="ts0" timeString="2026-04-07T09:26:03.164"/>
-    </inkml:context>
-    <inkml:brush xml:id="br0">
-      <inkml:brushProperty name="width" value="0.035" units="cm"/>
-      <inkml:brushProperty name="height" value="0.035" units="cm"/>
-    </inkml:brush>
-  </inkml:definitions>
-  <inkml:trace contextRef="#ctx0" brushRef="#br0">714 1029 24575,'-15'-1'0,"1"-1"0,0 0 0,-1-1 0,1 0 0,0-2 0,0 1 0,1-2 0,-14-7 0,-101-61 0,91 50 0,-138-96 0,163 110 0,1-2 0,1 1 0,0-2 0,1 1 0,0-1 0,1-1 0,-9-18 0,-31-46 0,38 66 0,0-1 0,0 0 0,1-1 0,1 1 0,0-2 0,1 1 0,1-1 0,0 0 0,1 0 0,1-1 0,0 1 0,1-1 0,-1-17 0,2 1 0,0 11 0,1 0 0,1 1 0,1-1 0,0 1 0,2-1 0,7-29 0,-8 44 0,1 0 0,0 1 0,0-1 0,0 1 0,1 0 0,0 0 0,0 0 0,1 0 0,-1 1 0,1-1 0,0 1 0,0 0 0,0 1 0,1-1 0,-1 1 0,12-5 0,7-1 0,-1 2 0,2 0 0,26-3 0,4-3 0,-7 5 0,1 1 0,-1 2 0,1 3 0,0 2 0,55 6 0,-83-5 0,0 1 0,0 2 0,-1 0 0,1 0 0,-1 2 0,0 1 0,-1 0 0,1 2 0,-2 0 0,1 1 0,21 15 0,37 23 0,-60-38 0,1 0 0,-1 1 0,16 14 0,-28-20 0,0 0 0,0 0 0,0 0 0,-1 1 0,0-1 0,0 1 0,-1 0 0,1 0 0,-1 1 0,-1-1 0,1 1 0,2 12 0,0 17 0,-1 0 0,-2 0 0,-1 0 0,-9 69 0,7-96 0,-1 0 0,0 0 0,0 0 0,-1-1 0,-1 1 0,1-1 0,-1 0 0,-1 0 0,1 0 0,-1 0 0,-7 7 0,-7 7 0,-2-1 0,-26 21 0,30-28 0,0 2 0,0 0 0,2 0 0,-19 26 0,25-31 0,0 0 0,0-1 0,-1 0 0,0 0 0,-14 9 0,13-10 0,0 0 0,0 1 0,1 0 0,-17 22 0,4 3 0,1 1 0,-22 50 0,30-48 0,1 1 0,2-1 0,2 2 0,2 0 0,1 0 0,2 0 0,3 78 0,1-113 0,-1 11 0,2-1 0,0 1 0,1-1 0,5 24 0,-5-34 0,-1 0 0,1 0 0,1-1 0,-1 1 0,1-1 0,0 1 0,0-1 0,0 0 0,0 0 0,1 0 0,-1 0 0,1-1 0,0 0 0,0 0 0,1 0 0,-1 0 0,8 3 0,18 7 0,0-3 0,1 0 0,37 6 0,-41-10 0,16 1 0,1-2 0,-1-2 0,85-4 0,-45-1 0,-58-1 0,0-1 0,-1-1 0,1 0 0,-1-2 0,0-2 0,-1 0 0,31-16 0,-35 16 0,-9 4 0,0-1 0,-1 0 0,0-1 0,0 0 0,0 0 0,-1-1 0,0 0 0,-1-1 0,0 0 0,0 0 0,-1 0 0,0-1 0,8-17 0,-10 19 0,-1 0 0,1-1 0,-1 1 0,0-1 0,-1 0 0,0 0 0,-1 0 0,0 0 0,0 0 0,-1-1 0,0 1 0,0 0 0,-1 0 0,-1 0 0,1 0 0,-1 0 0,-4-10 0,1 9 0,0 1 0,0 0 0,-1 0 0,0 1 0,-1-1 0,0 1 0,0 1 0,0-1 0,-1 1 0,0 0 0,-1 1 0,0 0 0,-10-5 0,-11-4 0,-2 2 0,-56-17 0,53 19 0,-62-28 0,68 26 0,0 2 0,-52-14 0,45 15 0,-48-20 0,12-9 0,56 29 0,0 1 0,0 1 0,-1 0 0,-34-10 0,5 5-18,24 6-431,-1 1 0,-27-3 0,22 7-6377</inkml:trace>
-</inkml:ink>
-</file>
-
-<file path=ppt/ink/ink15.xml><?xml version="1.0" encoding="utf-8"?>
-<inkml:ink xmlns:inkml="http://www.w3.org/2003/InkML">
-  <inkml:definitions>
-    <inkml:context xml:id="ctx0">
-      <inkml:inkSource xml:id="inkSrc0">
-        <inkml:traceFormat>
-          <inkml:channel name="X" type="integer" min="-2.14748E9" max="2.14748E9" units="cm"/>
-          <inkml:channel name="Y" type="integer" min="-2.14748E9" max="2.14748E9" units="cm"/>
-          <inkml:channel name="F" type="integer" max="32767" units="dev"/>
-        </inkml:traceFormat>
-        <inkml:channelProperties>
-          <inkml:channelProperty channel="X" name="resolution" value="1000" units="1/cm"/>
-          <inkml:channelProperty channel="Y" name="resolution" value="1000" units="1/cm"/>
-          <inkml:channelProperty channel="F" name="resolution" value="0" units="1/dev"/>
-        </inkml:channelProperties>
-      </inkml:inkSource>
-      <inkml:timestamp xml:id="ts0" timeString="2026-04-07T09:26:25.507"/>
-    </inkml:context>
-    <inkml:brush xml:id="br0">
-      <inkml:brushProperty name="width" value="0.035" units="cm"/>
-      <inkml:brushProperty name="height" value="0.035" units="cm"/>
-    </inkml:brush>
-  </inkml:definitions>
-  <inkml:trace contextRef="#ctx0" brushRef="#br0">636 289 24575,'0'0'0,"1"0"0,0 0 0,0 0 0,0 0 0,-1 0 0,1-1 0,0 1 0,0 0 0,-1 0 0,1-1 0,0 1 0,0 0 0,-1-1 0,1 1 0,0-1 0,-1 1 0,1-1 0,-1 0 0,1 1 0,-1-1 0,1 1 0,-1-1 0,1 0 0,-1 1 0,1-1 0,-1 0 0,1-1 0,2-28 0,-12-27 0,6 47 0,1 1 0,-1 0 0,-1 0 0,0 0 0,0 1 0,-1-1 0,0 1 0,0 0 0,-1 0 0,0 1 0,0-1 0,-1 2 0,0-1 0,0 1 0,0 0 0,-1 0 0,-14-8 0,7 7 0,-1 1 0,0 0 0,0 1 0,0 1 0,0 0 0,-1 1 0,0 1 0,1 0 0,-22 2 0,-2-1 0,13 0 0,0 1 0,0 1 0,0 1 0,-33 7 0,55-7 0,-1-1 0,0 1 0,1-1 0,-1 2 0,1-1 0,0 0 0,0 1 0,0 0 0,0 1 0,0-1 0,0 1 0,1-1 0,0 1 0,0 1 0,0-1 0,0 1 0,1-1 0,-1 1 0,1 0 0,1 0 0,-1 1 0,1-1 0,0 0 0,0 1 0,-2 7 0,-8 41 0,4-24 0,2 0 0,-5 58 0,11-79 0,0 1 0,0 0 0,1 0 0,1-1 0,0 1 0,0-1 0,1 1 0,0-1 0,0 0 0,1 0 0,0 0 0,1-1 0,7 12 0,3 0 0,1 0 0,1 0 0,1-2 0,35 30 0,-43-41 0,0 0 0,1-1 0,-1 1 0,1-2 0,0 0 0,1 0 0,-1-1 0,1 0 0,0-1 0,0-1 0,0 1 0,13-1 0,7 0 0,-1-1 0,1-2 0,0-1 0,0-2 0,44-11 0,-68 13 0,1 0 0,-1-1 0,0-1 0,-1 1 0,1-1 0,0 0 0,-1-1 0,0 0 0,0 0 0,-1-1 0,1 1 0,-1-1 0,0-1 0,-1 1 0,0-1 0,0 0 0,0 0 0,-1-1 0,0 1 0,0-1 0,-1 0 0,0 0 0,0 0 0,-1 0 0,2-10 0,-1-2 0,-1-1 0,-1-30 0,-5 497 0,3-420 0,-2 0 0,-11 48 0,8-46 0,0 0 0,-1 36 0,3-6 0,-16 73 0,10-73 0,7-35 0,-2-1 0,0 0 0,-13 30 0,15-43 0,-1-1 0,0 0 0,0-1 0,-1 1 0,0-1 0,0 0 0,-1 0 0,0-1 0,0 1 0,-1-1 0,-11 8 0,-41 22 0,33-22 0,-38 30 0,57-38 7,0-1 0,-1-1-1,0 1 1,0-1 0,0-1-1,0 1 1,0-1-1,-1-1 1,1 1 0,-1-2-1,0 1 1,1-1 0,-1 0-1,0-1 1,0 0 0,0-1-1,-13-1 1,11 0-113,0-1 0,0 0 0,0-1 0,1 0 0,-1 0 0,1-1-1,0 0 1,0-1 0,0 0 0,1-1 0,0 0 0,0 0 0,-8-11 0,-1-3-6720</inkml:trace>
-</inkml:ink>
-</file>
-
-<file path=ppt/ink/ink2.xml><?xml version="1.0" encoding="utf-8"?>
-<inkml:ink xmlns:inkml="http://www.w3.org/2003/InkML">
-  <inkml:definitions>
-    <inkml:context xml:id="ctx0">
-      <inkml:inkSource xml:id="inkSrc0">
-        <inkml:traceFormat>
-          <inkml:channel name="X" type="integer" min="-2.14748E9" max="2.14748E9" units="cm"/>
-          <inkml:channel name="Y" type="integer" min="-2.14748E9" max="2.14748E9" units="cm"/>
-          <inkml:channel name="F" type="integer" max="32767" units="dev"/>
-        </inkml:traceFormat>
-        <inkml:channelProperties>
-          <inkml:channelProperty channel="X" name="resolution" value="1000" units="1/cm"/>
-          <inkml:channelProperty channel="Y" name="resolution" value="1000" units="1/cm"/>
-          <inkml:channelProperty channel="F" name="resolution" value="0" units="1/dev"/>
-        </inkml:channelProperties>
-      </inkml:inkSource>
-      <inkml:timestamp xml:id="ts0" timeString="2026-04-07T09:07:57.338"/>
-    </inkml:context>
-    <inkml:brush xml:id="br0">
-      <inkml:brushProperty name="width" value="0.035" units="cm"/>
-      <inkml:brushProperty name="height" value="0.035" units="cm"/>
-    </inkml:brush>
-  </inkml:definitions>
-  <inkml:trace contextRef="#ctx0" brushRef="#br0">82 393 24575,'-1'-48'0,"0"21"0,1 1 0,1-1 0,7-39 0,-7 58 0,1 0 0,1 1 0,-1-1 0,1 1 0,1-1 0,-1 1 0,1 0 0,1 0 0,-1 0 0,1 1 0,0 0 0,1 0 0,-1 0 0,1 0 0,13-8 0,-6 4 0,1 1 0,0 0 0,1 1 0,0 1 0,0 0 0,1 1 0,0 1 0,0 0 0,0 1 0,1 1 0,-1 0 0,1 1 0,18 1 0,-5 1 0,-10-1 0,-1 1 0,1 1 0,38 6 0,-51-5 0,-1-1 0,0 1 0,0 1 0,0 0 0,0-1 0,-1 2 0,1-1 0,-1 1 0,1-1 0,-1 1 0,-1 1 0,1-1 0,0 1 0,-1 0 0,0 0 0,4 7 0,20 31 0,-1 2 0,-3 0 0,32 85 0,-51-114 0,-1 1 0,0-1 0,-1 1 0,-1 0 0,-1 0 0,-1 0 0,0 0 0,-1 0 0,-1 0 0,-4 18 0,4-25 0,-1 0 0,0-1 0,0 1 0,-1-1 0,0 0 0,-1 0 0,0-1 0,0 1 0,-1-1 0,0 0 0,-1 0 0,0-1 0,0 0 0,0 0 0,-1-1 0,0 0 0,0 0 0,-13 6 0,-15 6 0,-2-2 0,0-1 0,-53 12 0,67-26 0,24-1 0,0 0 0,0 0 0,-1 0 0,1 0 0,0 0 0,0-1 0,0 1 0,0 0 0,-1 0 0,1 0 0,0 0 0,0-1 0,0 1 0,0 0 0,-1 0 0,1 0 0,0-1 0,0 1 0,0 0 0,0 0 0,0-1 0,0 1 0,0 0 0,0 0 0,0-1 0,0 1 0,0 0 0,0 0 0,0-1 0,0 1 0,0 0 0,0 0 0,0-1 0,0 1 0,0 0 0,0 0 0,1 0 0,-1-1 0,0 1 0,0 0 0,0-1 0,2-1 0,1-1 0,-1 0 0,0 1 0,1-1 0,-1 1 0,1 0 0,0 0 0,0 0 0,5-3 0,13-6 0,0 1 0,1 1 0,0 0 0,1 2 0,0 1 0,38-7 0,-55 13 0,0-1 0,0 1 0,0-1 0,0 2 0,0-1 0,-1 1 0,1-1 0,0 2 0,0-1 0,-1 1 0,1-1 0,0 2 0,-1-1 0,0 1 0,0-1 0,0 1 0,0 1 0,0-1 0,0 1 0,-1 0 0,0 0 0,0 0 0,0 1 0,0-1 0,0 1 0,-1 0 0,0 0 0,0 0 0,-1 0 0,1 1 0,-1-1 0,2 8 0,1 6 0,-1 1 0,-1 0 0,0 0 0,-2 1 0,-1 22 0,-11 102 0,11-137 0,-1 0 0,0 0 0,0 0 0,-1 0 0,0-1 0,-1 1 0,1-1 0,-2 0 0,1 1 0,-1-1 0,0-1 0,0 1 0,-1-1 0,1 1 0,-2-1 0,1 0 0,-1-1 0,0 0 0,0 0 0,0 0 0,0 0 0,-1-1 0,0 0 0,0-1 0,0 1 0,-1-1 0,1-1 0,-1 1 0,1-1 0,-1-1 0,0 1 0,-14-1 0,-13 3 0,0-2 0,-1-2 0,1-1 0,-65-11 0,90 9 0,0-1 0,1 0 0,-1 0 0,-12-9 0,13 8 0,0-1 0,-1 2 0,0-1 0,-12-3 0,-46-10 0,-79-32 0,143 49-65,-1-1 0,1-1 0,0 1 0,0-1 0,0 1 0,0-1 0,0 0 0,1-1 0,-1 1 0,1-1 0,0 1 0,0-1 0,0 0 0,0 0 0,1 0 0,0-1 0,0 1 0,0-1 0,0 1 0,-1-7 0,3-4-6761</inkml:trace>
 </inkml:ink>
 </file>
 
@@ -374,14 +220,14 @@
           <inkml:channelProperty channel="F" name="resolution" value="0" units="1/dev"/>
         </inkml:channelProperties>
       </inkml:inkSource>
-      <inkml:timestamp xml:id="ts0" timeString="2026-04-07T09:15:42.132"/>
+      <inkml:timestamp xml:id="ts0" timeString="2026-04-07T09:08:23"/>
     </inkml:context>
     <inkml:brush xml:id="br0">
       <inkml:brushProperty name="width" value="0.035" units="cm"/>
       <inkml:brushProperty name="height" value="0.035" units="cm"/>
     </inkml:brush>
   </inkml:definitions>
-  <inkml:trace contextRef="#ctx0" brushRef="#br0">2 0 24575,'-2'116'0,"5"132"0,0-224 0,1 0 0,0 0 0,2-1 0,1 1 0,0-1 0,2-1 0,1 1 0,0-2 0,2 1 0,0-2 0,1 1 0,21 22 0,-27-37 0,-1 0 0,1-1 0,0 0 0,1-1 0,-1 0 0,1 0 0,0 0 0,0-1 0,0 0 0,0-1 0,1 0 0,-1 0 0,1 0 0,11-1 0,9 1 0,0-1 0,55-7 0,-80 5 0,0 1 0,0-1 0,0 0 0,0 0 0,-1 0 0,1-1 0,0 1 0,-1-1 0,1 0 0,-1 0 0,0 0 0,1-1 0,-1 1 0,0-1 0,0 0 0,-1 1 0,6-8 0,-4 4 0,-1 0 0,0-1 0,0 1 0,0-1 0,-1 0 0,0 0 0,0 0 0,0 0 0,0-10 0,-1-5 0,0-1 0,-2 0 0,-1 0 0,0 1 0,-9-33 0,4 23 0,-2 0 0,-2 1 0,0 0 0,-3 0 0,-25-43 0,39 73 0,0 0 0,0 1 0,-1-1 0,1 0 0,0 1 0,-1-1 0,1 0 0,0 1 0,-1-1 0,1 0 0,-1 1 0,1-1 0,-1 1 0,0-1 0,1 1 0,-1-1 0,0 1 0,1 0 0,-1-1 0,0 1 0,1 0 0,-1-1 0,0 1 0,0 0 0,1 0 0,-1-1 0,0 1 0,-1 0 0,1 1 0,0 0 0,1 0 0,-1 0 0,0 0 0,1 0 0,-1 0 0,0 0 0,1 0 0,-1 0 0,1 0 0,0 0 0,-1 0 0,1 0 0,0 0 0,0 0 0,0 2 0,-2 51 0,6-22 0,17 57 0,-8-37 0,-5-20 0,25 56 0,-21-59 0,-1 0 0,8 38 0,4 35 0,52 141 0,6-4-1365,-71-214-5461</inkml:trace>
+  <inkml:trace contextRef="#ctx0" brushRef="#br0">0 0 24575,'0'0'-8191</inkml:trace>
 </inkml:ink>
 </file>
 
@@ -409,114 +255,6 @@
     </inkml:brush>
   </inkml:definitions>
   <inkml:trace contextRef="#ctx0" brushRef="#br0">0 0 24575,'0'0'-8191</inkml:trace>
-</inkml:ink>
-</file>
-
-<file path=ppt/ink/ink6.xml><?xml version="1.0" encoding="utf-8"?>
-<inkml:ink xmlns:inkml="http://www.w3.org/2003/InkML">
-  <inkml:definitions>
-    <inkml:context xml:id="ctx0">
-      <inkml:inkSource xml:id="inkSrc0">
-        <inkml:traceFormat>
-          <inkml:channel name="X" type="integer" min="-2.14748E9" max="2.14748E9" units="cm"/>
-          <inkml:channel name="Y" type="integer" min="-2.14748E9" max="2.14748E9" units="cm"/>
-          <inkml:channel name="F" type="integer" max="32767" units="dev"/>
-        </inkml:traceFormat>
-        <inkml:channelProperties>
-          <inkml:channelProperty channel="X" name="resolution" value="1000" units="1/cm"/>
-          <inkml:channelProperty channel="Y" name="resolution" value="1000" units="1/cm"/>
-          <inkml:channelProperty channel="F" name="resolution" value="0" units="1/dev"/>
-        </inkml:channelProperties>
-      </inkml:inkSource>
-      <inkml:timestamp xml:id="ts0" timeString="2026-04-07T09:16:41.767"/>
-    </inkml:context>
-    <inkml:brush xml:id="br0">
-      <inkml:brushProperty name="width" value="0.035" units="cm"/>
-      <inkml:brushProperty name="height" value="0.035" units="cm"/>
-    </inkml:brush>
-  </inkml:definitions>
-  <inkml:trace contextRef="#ctx0" brushRef="#br0">556 1 24575,'1'63'0,"0"-3"0,-8 71 0,4-111 0,0 1 0,-2-1 0,0 0 0,-2 0 0,0-1 0,-1 0 0,-13 23 0,10-25 0,-16 29 0,27-45 0,-1 0 0,1 0 0,0 0 0,-1 0 0,1 0 0,0 0 0,0 0 0,0 0 0,0 0 0,0 0 0,0 0 0,0 0 0,0 0 0,0 0 0,0 0 0,1 0 0,-1 0 0,0 0 0,1 0 0,-1 0 0,0 0 0,1 0 0,0 0 0,-1-1 0,1 1 0,-1 0 0,1 0 0,0 0 0,0-1 0,-1 1 0,1 0 0,0-1 0,0 1 0,0-1 0,0 1 0,0-1 0,-1 1 0,1-1 0,0 0 0,0 1 0,2-1 0,14 3 0,1 0 0,-1-1 0,1-1 0,35-2 0,-34 0 0,0 0 0,0 2 0,-1 0 0,1 1 0,22 5 0,-36-5 0,0 0 0,0 0 0,0 0 0,0 0 0,-1 1 0,1 0 0,-1 0 0,1 0 0,-1 1 0,0-1 0,0 1 0,-1 0 0,1 0 0,-1 0 0,0 1 0,0-1 0,0 1 0,-1-1 0,1 1 0,-1 0 0,0 0 0,2 9 0,2 21 0,-1 0 0,-1 0 0,-2 1 0,-2-1 0,-6 59 0,0 2 0,6-81 0,0 1 0,-2-1 0,0 1 0,-1-1 0,0 0 0,-8 20 0,9-30 0,-1 1 0,1-1 0,-1 0 0,0 0 0,0-1 0,-1 1 0,1-1 0,-1 1 0,0-1 0,-1 0 0,1-1 0,0 1 0,-1-1 0,0 0 0,0 0 0,0 0 0,0-1 0,-1 0 0,1 0 0,-8 2 0,-25 3 0,-1-3 0,1-1 0,-1-1 0,-75-8 0,17 1 0,21 4 0,-61-2 0,129 2-105,0-1 0,0 0 0,0 0 0,0-1 0,1 0 0,-1 0 0,1-1 0,0 0 0,0 0 0,0-1 0,1 0 0,-10-9 0,-8-7-6721</inkml:trace>
-</inkml:ink>
-</file>
-
-<file path=ppt/ink/ink7.xml><?xml version="1.0" encoding="utf-8"?>
-<inkml:ink xmlns:inkml="http://www.w3.org/2003/InkML">
-  <inkml:definitions>
-    <inkml:context xml:id="ctx0">
-      <inkml:inkSource xml:id="inkSrc0">
-        <inkml:traceFormat>
-          <inkml:channel name="X" type="integer" min="-2.14748E9" max="2.14748E9" units="cm"/>
-          <inkml:channel name="Y" type="integer" min="-2.14748E9" max="2.14748E9" units="cm"/>
-          <inkml:channel name="F" type="integer" max="32767" units="dev"/>
-        </inkml:traceFormat>
-        <inkml:channelProperties>
-          <inkml:channelProperty channel="X" name="resolution" value="1000" units="1/cm"/>
-          <inkml:channelProperty channel="Y" name="resolution" value="1000" units="1/cm"/>
-          <inkml:channelProperty channel="F" name="resolution" value="0" units="1/dev"/>
-        </inkml:channelProperties>
-      </inkml:inkSource>
-      <inkml:timestamp xml:id="ts0" timeString="2026-04-07T09:16:42.620"/>
-    </inkml:context>
-    <inkml:brush xml:id="br0">
-      <inkml:brushProperty name="width" value="0.035" units="cm"/>
-      <inkml:brushProperty name="height" value="0.035" units="cm"/>
-    </inkml:brush>
-  </inkml:definitions>
-  <inkml:trace contextRef="#ctx0" brushRef="#br0">0 190 24575,'10'0'0,"11"0"0,11 0 0,10 0 0,-3-9 0,1-3 0,3 1 0,3 2 0,3 3 0,-7-8 0,-2 0 0,2 2 0,-7-7 0,0 1 0,-6-6 0,1 1 0,-4 5-8191</inkml:trace>
-</inkml:ink>
-</file>
-
-<file path=ppt/ink/ink8.xml><?xml version="1.0" encoding="utf-8"?>
-<inkml:ink xmlns:inkml="http://www.w3.org/2003/InkML">
-  <inkml:definitions>
-    <inkml:context xml:id="ctx0">
-      <inkml:inkSource xml:id="inkSrc0">
-        <inkml:traceFormat>
-          <inkml:channel name="X" type="integer" min="-2.14748E9" max="2.14748E9" units="cm"/>
-          <inkml:channel name="Y" type="integer" min="-2.14748E9" max="2.14748E9" units="cm"/>
-          <inkml:channel name="F" type="integer" max="32767" units="dev"/>
-        </inkml:traceFormat>
-        <inkml:channelProperties>
-          <inkml:channelProperty channel="X" name="resolution" value="1000" units="1/cm"/>
-          <inkml:channelProperty channel="Y" name="resolution" value="1000" units="1/cm"/>
-          <inkml:channelProperty channel="F" name="resolution" value="0" units="1/dev"/>
-        </inkml:channelProperties>
-      </inkml:inkSource>
-      <inkml:timestamp xml:id="ts0" timeString="2026-04-07T09:08:23"/>
-    </inkml:context>
-    <inkml:brush xml:id="br0">
-      <inkml:brushProperty name="width" value="0.035" units="cm"/>
-      <inkml:brushProperty name="height" value="0.035" units="cm"/>
-    </inkml:brush>
-  </inkml:definitions>
-  <inkml:trace contextRef="#ctx0" brushRef="#br0">0 0 24575,'0'0'-8191</inkml:trace>
-</inkml:ink>
-</file>
-
-<file path=ppt/ink/ink9.xml><?xml version="1.0" encoding="utf-8"?>
-<inkml:ink xmlns:inkml="http://www.w3.org/2003/InkML">
-  <inkml:definitions>
-    <inkml:context xml:id="ctx0">
-      <inkml:inkSource xml:id="inkSrc0">
-        <inkml:traceFormat>
-          <inkml:channel name="X" type="integer" min="-2.14748E9" max="2.14748E9" units="cm"/>
-          <inkml:channel name="Y" type="integer" min="-2.14748E9" max="2.14748E9" units="cm"/>
-          <inkml:channel name="F" type="integer" max="32767" units="dev"/>
-        </inkml:traceFormat>
-        <inkml:channelProperties>
-          <inkml:channelProperty channel="X" name="resolution" value="1000" units="1/cm"/>
-          <inkml:channelProperty channel="Y" name="resolution" value="1000" units="1/cm"/>
-          <inkml:channelProperty channel="F" name="resolution" value="0" units="1/dev"/>
-        </inkml:channelProperties>
-      </inkml:inkSource>
-      <inkml:timestamp xml:id="ts0" timeString="2026-04-07T09:18:05.433"/>
-    </inkml:context>
-    <inkml:brush xml:id="br0">
-      <inkml:brushProperty name="width" value="0.035" units="cm"/>
-      <inkml:brushProperty name="height" value="0.035" units="cm"/>
-    </inkml:brush>
-  </inkml:definitions>
-  <inkml:trace contextRef="#ctx0" brushRef="#br0">1120 200 24575,'-1'-2'0,"0"-1"0,0 0 0,0 1 0,-1 0 0,1-1 0,0 1 0,-1 0 0,1-1 0,-1 1 0,0 0 0,0 0 0,0 0 0,0 1 0,0-1 0,0 0 0,-1 1 0,-2-2 0,-45-26 0,48 28 0,-20-10 0,-1-2 0,-1 1 0,0 1 0,0 1 0,-1 1 0,-1 1 0,-43-7 0,-93 11 0,124 5 0,1-1 0,-1-1 0,0-3 0,-51-11 0,71 10 0,-1 1 0,0 0 0,0 2 0,0 0 0,0 1 0,0 1 0,-31 3 0,43-2 0,0 1 0,-1-1 0,1 1 0,0 1 0,0 0 0,0 0 0,1 0 0,-1 0 0,1 1 0,-1 0 0,1 1 0,1 0 0,-1 0 0,1 0 0,-1 0 0,1 1 0,1 0 0,-1 0 0,1 0 0,0 0 0,1 1 0,-5 9 0,-7 21 0,2 1 0,2-1 0,1 2 0,2 0 0,2 0 0,1 0 0,1 46 0,2-17 0,0-28 0,1 1 0,3-1 0,1 1 0,9 40 0,-6-62 0,1 0 0,1-1 0,0 0 0,12 18 0,16 34 0,-22-39 0,37 55 0,-20-35 0,-17-33 0,0-1 0,1 0 0,1 0 0,0-2 0,1 0 0,1-1 0,0-1 0,21 11 0,-8-9 0,-1-1 0,2-2 0,0-1 0,0-2 0,1 0 0,53 5 0,-36-8 0,0-2 0,0-2 0,67-6 0,-112 4 0,1-1 0,-1 0 0,0 0 0,0-1 0,0 1 0,-1-1 0,1 0 0,0 0 0,-1-1 0,1 1 0,-1-1 0,0 0 0,0-1 0,0 1 0,0-1 0,0 1 0,4-7 0,-4 3 0,0 1 0,0-1 0,-1 0 0,0 0 0,0 0 0,0 0 0,-1-1 0,0 1 0,-1-1 0,0 0 0,1-8 0,-2 7 0,1-1 0,-2 0 0,1 1 0,-1-1 0,0 0 0,-1 1 0,-1-1 0,1 1 0,-1 0 0,-1 0 0,0 0 0,0 0 0,0 1 0,-1-1 0,-1 1 0,1 0 0,-2 1 0,1-1 0,-9-7 0,-6 1 0,-1 1 0,-1 0 0,0 2 0,0 1 0,-1 0 0,0 2 0,-1 1 0,1 1 0,-29-3 0,-39-11 0,53 10 0,-1 3 0,-53-5 0,75 11 0,1 0 0,0 0 0,0 1 0,-1 1 0,-17 4 0,30-5 0,1 1 0,0 1 0,0-1 0,-1 1 0,1-1 0,0 1 0,0 0 0,0 1 0,1-1 0,-1 1 0,0 0 0,1-1 0,0 2 0,0-1 0,0 0 0,0 1 0,0-1 0,1 1 0,-1 0 0,-2 7 0,1-3-97,1 0-1,1 1 1,0-1-1,0 1 1,0-1-1,1 1 1,1 0-1,-1 0 1,1 0-1,1-1 1,0 1-1,0 0 0,3 9 1,8 17-6729</inkml:trace>
 </inkml:ink>
 </file>
 
@@ -667,7 +405,7 @@
           <a:p>
             <a:fld id="{50515A2B-AE4F-471D-BB0D-414F97FB88AD}" type="datetimeFigureOut">
               <a:rPr lang="ru-RU" smtClean="0"/>
-              <a:t>07.04.2026</a:t>
+              <a:t>17.04.2026</a:t>
             </a:fld>
             <a:endParaRPr lang="ru-RU"/>
           </a:p>
@@ -865,7 +603,7 @@
           <a:p>
             <a:fld id="{50515A2B-AE4F-471D-BB0D-414F97FB88AD}" type="datetimeFigureOut">
               <a:rPr lang="ru-RU" smtClean="0"/>
-              <a:t>07.04.2026</a:t>
+              <a:t>17.04.2026</a:t>
             </a:fld>
             <a:endParaRPr lang="ru-RU"/>
           </a:p>
@@ -1073,7 +811,7 @@
           <a:p>
             <a:fld id="{50515A2B-AE4F-471D-BB0D-414F97FB88AD}" type="datetimeFigureOut">
               <a:rPr lang="ru-RU" smtClean="0"/>
-              <a:t>07.04.2026</a:t>
+              <a:t>17.04.2026</a:t>
             </a:fld>
             <a:endParaRPr lang="ru-RU"/>
           </a:p>
@@ -1271,7 +1009,7 @@
           <a:p>
             <a:fld id="{50515A2B-AE4F-471D-BB0D-414F97FB88AD}" type="datetimeFigureOut">
               <a:rPr lang="ru-RU" smtClean="0"/>
-              <a:t>07.04.2026</a:t>
+              <a:t>17.04.2026</a:t>
             </a:fld>
             <a:endParaRPr lang="ru-RU"/>
           </a:p>
@@ -1546,7 +1284,7 @@
           <a:p>
             <a:fld id="{50515A2B-AE4F-471D-BB0D-414F97FB88AD}" type="datetimeFigureOut">
               <a:rPr lang="ru-RU" smtClean="0"/>
-              <a:t>07.04.2026</a:t>
+              <a:t>17.04.2026</a:t>
             </a:fld>
             <a:endParaRPr lang="ru-RU"/>
           </a:p>
@@ -1811,7 +1549,7 @@
           <a:p>
             <a:fld id="{50515A2B-AE4F-471D-BB0D-414F97FB88AD}" type="datetimeFigureOut">
               <a:rPr lang="ru-RU" smtClean="0"/>
-              <a:t>07.04.2026</a:t>
+              <a:t>17.04.2026</a:t>
             </a:fld>
             <a:endParaRPr lang="ru-RU"/>
           </a:p>
@@ -2223,7 +1961,7 @@
           <a:p>
             <a:fld id="{50515A2B-AE4F-471D-BB0D-414F97FB88AD}" type="datetimeFigureOut">
               <a:rPr lang="ru-RU" smtClean="0"/>
-              <a:t>07.04.2026</a:t>
+              <a:t>17.04.2026</a:t>
             </a:fld>
             <a:endParaRPr lang="ru-RU"/>
           </a:p>
@@ -2364,7 +2102,7 @@
           <a:p>
             <a:fld id="{50515A2B-AE4F-471D-BB0D-414F97FB88AD}" type="datetimeFigureOut">
               <a:rPr lang="ru-RU" smtClean="0"/>
-              <a:t>07.04.2026</a:t>
+              <a:t>17.04.2026</a:t>
             </a:fld>
             <a:endParaRPr lang="ru-RU"/>
           </a:p>
@@ -2477,7 +2215,7 @@
           <a:p>
             <a:fld id="{50515A2B-AE4F-471D-BB0D-414F97FB88AD}" type="datetimeFigureOut">
               <a:rPr lang="ru-RU" smtClean="0"/>
-              <a:t>07.04.2026</a:t>
+              <a:t>17.04.2026</a:t>
             </a:fld>
             <a:endParaRPr lang="ru-RU"/>
           </a:p>
@@ -2788,7 +2526,7 @@
           <a:p>
             <a:fld id="{50515A2B-AE4F-471D-BB0D-414F97FB88AD}" type="datetimeFigureOut">
               <a:rPr lang="ru-RU" smtClean="0"/>
-              <a:t>07.04.2026</a:t>
+              <a:t>17.04.2026</a:t>
             </a:fld>
             <a:endParaRPr lang="ru-RU"/>
           </a:p>
@@ -3076,7 +2814,7 @@
           <a:p>
             <a:fld id="{50515A2B-AE4F-471D-BB0D-414F97FB88AD}" type="datetimeFigureOut">
               <a:rPr lang="ru-RU" smtClean="0"/>
-              <a:t>07.04.2026</a:t>
+              <a:t>17.04.2026</a:t>
             </a:fld>
             <a:endParaRPr lang="ru-RU"/>
           </a:p>
@@ -3317,7 +3055,7 @@
           <a:p>
             <a:fld id="{50515A2B-AE4F-471D-BB0D-414F97FB88AD}" type="datetimeFigureOut">
               <a:rPr lang="ru-RU" smtClean="0"/>
-              <a:t>07.04.2026</a:t>
+              <a:t>17.04.2026</a:t>
             </a:fld>
             <a:endParaRPr lang="ru-RU"/>
           </a:p>
@@ -4146,2852 +3884,7 @@
 </p:sld>
 </file>
 
-<file path=ppt/slides/slide2.xml><?xml version="1.0" encoding="utf-8"?>
-<p:sld xmlns:a="http://schemas.openxmlformats.org/drawingml/2006/main" xmlns:r="http://schemas.openxmlformats.org/officeDocument/2006/relationships" xmlns:p="http://schemas.openxmlformats.org/presentationml/2006/main">
-  <p:cSld>
-    <p:spTree>
-      <p:nvGrpSpPr>
-        <p:cNvPr id="1" name="">
-          <a:extLst>
-            <a:ext uri="{FF2B5EF4-FFF2-40B4-BE49-F238E27FC236}">
-              <a16:creationId xmlns:a16="http://schemas.microsoft.com/office/drawing/2014/main" id="{8A34C5A8-97F1-18D5-1F14-F402E8241E6D}"/>
-            </a:ext>
-          </a:extLst>
-        </p:cNvPr>
-        <p:cNvGrpSpPr/>
-        <p:nvPr/>
-      </p:nvGrpSpPr>
-      <p:grpSpPr>
-        <a:xfrm>
-          <a:off x="0" y="0"/>
-          <a:ext cx="0" cy="0"/>
-          <a:chOff x="0" y="0"/>
-          <a:chExt cx="0" cy="0"/>
-        </a:xfrm>
-      </p:grpSpPr>
-      <p:sp>
-        <p:nvSpPr>
-          <p:cNvPr id="6" name="Прямоугольник 5">
-            <a:extLst>
-              <a:ext uri="{FF2B5EF4-FFF2-40B4-BE49-F238E27FC236}">
-                <a16:creationId xmlns:a16="http://schemas.microsoft.com/office/drawing/2014/main" id="{D454F66D-7F57-0B1B-CFCC-B87B41336081}"/>
-              </a:ext>
-            </a:extLst>
-          </p:cNvPr>
-          <p:cNvSpPr/>
-          <p:nvPr/>
-        </p:nvSpPr>
-        <p:spPr>
-          <a:xfrm>
-            <a:off x="-2235200" y="0"/>
-            <a:ext cx="14427200" cy="6858000"/>
-          </a:xfrm>
-          <a:prstGeom prst="rect">
-            <a:avLst/>
-          </a:prstGeom>
-          <a:solidFill>
-            <a:srgbClr val="CCECFF"/>
-          </a:solidFill>
-        </p:spPr>
-        <p:style>
-          <a:lnRef idx="2">
-            <a:schemeClr val="accent1">
-              <a:shade val="15000"/>
-            </a:schemeClr>
-          </a:lnRef>
-          <a:fillRef idx="1">
-            <a:schemeClr val="accent1"/>
-          </a:fillRef>
-          <a:effectRef idx="0">
-            <a:schemeClr val="accent1"/>
-          </a:effectRef>
-          <a:fontRef idx="minor">
-            <a:schemeClr val="lt1"/>
-          </a:fontRef>
-        </p:style>
-        <p:txBody>
-          <a:bodyPr rtlCol="0" anchor="ctr"/>
-          <a:lstStyle/>
-          <a:p>
-            <a:pPr algn="ctr"/>
-            <a:endParaRPr lang="ru-RU"/>
-          </a:p>
-        </p:txBody>
-      </p:sp>
-      <p:sp>
-        <p:nvSpPr>
-          <p:cNvPr id="7" name="Прямоугольник 6">
-            <a:extLst>
-              <a:ext uri="{FF2B5EF4-FFF2-40B4-BE49-F238E27FC236}">
-                <a16:creationId xmlns:a16="http://schemas.microsoft.com/office/drawing/2014/main" id="{75D73E66-63C1-542E-F801-F2009E035158}"/>
-              </a:ext>
-            </a:extLst>
-          </p:cNvPr>
-          <p:cNvSpPr/>
-          <p:nvPr/>
-        </p:nvSpPr>
-        <p:spPr>
-          <a:xfrm>
-            <a:off x="-3451101" y="0"/>
-            <a:ext cx="6555179" cy="6858000"/>
-          </a:xfrm>
-          <a:prstGeom prst="rect">
-            <a:avLst/>
-          </a:prstGeom>
-          <a:solidFill>
-            <a:srgbClr val="99CCFF"/>
-          </a:solidFill>
-        </p:spPr>
-        <p:style>
-          <a:lnRef idx="2">
-            <a:schemeClr val="accent1">
-              <a:shade val="15000"/>
-            </a:schemeClr>
-          </a:lnRef>
-          <a:fillRef idx="1">
-            <a:schemeClr val="accent1"/>
-          </a:fillRef>
-          <a:effectRef idx="0">
-            <a:schemeClr val="accent1"/>
-          </a:effectRef>
-          <a:fontRef idx="minor">
-            <a:schemeClr val="lt1"/>
-          </a:fontRef>
-        </p:style>
-        <p:txBody>
-          <a:bodyPr rtlCol="0" anchor="ctr"/>
-          <a:lstStyle/>
-          <a:p>
-            <a:pPr algn="ctr"/>
-            <a:endParaRPr lang="ru-RU"/>
-          </a:p>
-        </p:txBody>
-      </p:sp>
-      <p:sp>
-        <p:nvSpPr>
-          <p:cNvPr id="8" name="Прямоугольник 7">
-            <a:extLst>
-              <a:ext uri="{FF2B5EF4-FFF2-40B4-BE49-F238E27FC236}">
-                <a16:creationId xmlns:a16="http://schemas.microsoft.com/office/drawing/2014/main" id="{3BF0C138-1E0C-E1D4-B99D-7F9414DB6A68}"/>
-              </a:ext>
-            </a:extLst>
-          </p:cNvPr>
-          <p:cNvSpPr/>
-          <p:nvPr/>
-        </p:nvSpPr>
-        <p:spPr>
-          <a:xfrm>
-            <a:off x="-4207824" y="0"/>
-            <a:ext cx="6555179" cy="6858000"/>
-          </a:xfrm>
-          <a:prstGeom prst="rect">
-            <a:avLst/>
-          </a:prstGeom>
-          <a:solidFill>
-            <a:srgbClr val="66CCFF"/>
-          </a:solidFill>
-        </p:spPr>
-        <p:style>
-          <a:lnRef idx="2">
-            <a:schemeClr val="accent1">
-              <a:shade val="15000"/>
-            </a:schemeClr>
-          </a:lnRef>
-          <a:fillRef idx="1">
-            <a:schemeClr val="accent1"/>
-          </a:fillRef>
-          <a:effectRef idx="0">
-            <a:schemeClr val="accent1"/>
-          </a:effectRef>
-          <a:fontRef idx="minor">
-            <a:schemeClr val="lt1"/>
-          </a:fontRef>
-        </p:style>
-        <p:txBody>
-          <a:bodyPr rtlCol="0" anchor="ctr"/>
-          <a:lstStyle/>
-          <a:p>
-            <a:pPr algn="ctr"/>
-            <a:endParaRPr lang="ru-RU"/>
-          </a:p>
-        </p:txBody>
-      </p:sp>
-      <p:sp>
-        <p:nvSpPr>
-          <p:cNvPr id="9" name="Прямоугольник 8">
-            <a:extLst>
-              <a:ext uri="{FF2B5EF4-FFF2-40B4-BE49-F238E27FC236}">
-                <a16:creationId xmlns:a16="http://schemas.microsoft.com/office/drawing/2014/main" id="{5E4C3042-F0A3-C4A4-8AFE-83E8EC323B4A}"/>
-              </a:ext>
-            </a:extLst>
-          </p:cNvPr>
-          <p:cNvSpPr/>
-          <p:nvPr/>
-        </p:nvSpPr>
-        <p:spPr>
-          <a:xfrm>
-            <a:off x="-4964547" y="0"/>
-            <a:ext cx="6555179" cy="6858000"/>
-          </a:xfrm>
-          <a:prstGeom prst="rect">
-            <a:avLst/>
-          </a:prstGeom>
-          <a:solidFill>
-            <a:srgbClr val="3399FF"/>
-          </a:solidFill>
-        </p:spPr>
-        <p:style>
-          <a:lnRef idx="2">
-            <a:schemeClr val="accent1">
-              <a:shade val="15000"/>
-            </a:schemeClr>
-          </a:lnRef>
-          <a:fillRef idx="1">
-            <a:schemeClr val="accent1"/>
-          </a:fillRef>
-          <a:effectRef idx="0">
-            <a:schemeClr val="accent1"/>
-          </a:effectRef>
-          <a:fontRef idx="minor">
-            <a:schemeClr val="lt1"/>
-          </a:fontRef>
-        </p:style>
-        <p:txBody>
-          <a:bodyPr rtlCol="0" anchor="ctr"/>
-          <a:lstStyle/>
-          <a:p>
-            <a:pPr algn="ctr"/>
-            <a:endParaRPr lang="ru-RU"/>
-          </a:p>
-        </p:txBody>
-      </p:sp>
-      <p:sp>
-        <p:nvSpPr>
-          <p:cNvPr id="10" name="Прямоугольник 9">
-            <a:extLst>
-              <a:ext uri="{FF2B5EF4-FFF2-40B4-BE49-F238E27FC236}">
-                <a16:creationId xmlns:a16="http://schemas.microsoft.com/office/drawing/2014/main" id="{F173E3B5-A55E-9559-30BC-9578724FECF6}"/>
-              </a:ext>
-            </a:extLst>
-          </p:cNvPr>
-          <p:cNvSpPr/>
-          <p:nvPr/>
-        </p:nvSpPr>
-        <p:spPr>
-          <a:xfrm>
-            <a:off x="-5742378" y="0"/>
-            <a:ext cx="6555179" cy="6858000"/>
-          </a:xfrm>
-          <a:prstGeom prst="rect">
-            <a:avLst/>
-          </a:prstGeom>
-          <a:solidFill>
-            <a:srgbClr val="0066FF"/>
-          </a:solidFill>
-        </p:spPr>
-        <p:style>
-          <a:lnRef idx="2">
-            <a:schemeClr val="accent1">
-              <a:shade val="15000"/>
-            </a:schemeClr>
-          </a:lnRef>
-          <a:fillRef idx="1">
-            <a:schemeClr val="accent1"/>
-          </a:fillRef>
-          <a:effectRef idx="0">
-            <a:schemeClr val="accent1"/>
-          </a:effectRef>
-          <a:fontRef idx="minor">
-            <a:schemeClr val="lt1"/>
-          </a:fontRef>
-        </p:style>
-        <p:txBody>
-          <a:bodyPr rtlCol="0" anchor="ctr"/>
-          <a:lstStyle/>
-          <a:p>
-            <a:pPr algn="ctr"/>
-            <a:endParaRPr lang="ru-RU"/>
-          </a:p>
-        </p:txBody>
-      </p:sp>
-      <p:sp>
-        <p:nvSpPr>
-          <p:cNvPr id="2" name="TextBox 1">
-            <a:extLst>
-              <a:ext uri="{FF2B5EF4-FFF2-40B4-BE49-F238E27FC236}">
-                <a16:creationId xmlns:a16="http://schemas.microsoft.com/office/drawing/2014/main" id="{83E3DC71-B70E-3A9E-C1BA-190F16742BF5}"/>
-              </a:ext>
-            </a:extLst>
-          </p:cNvPr>
-          <p:cNvSpPr txBox="1"/>
-          <p:nvPr/>
-        </p:nvSpPr>
-        <p:spPr>
-          <a:xfrm>
-            <a:off x="3314700" y="1090811"/>
-            <a:ext cx="8877300" cy="5539978"/>
-          </a:xfrm>
-          <a:prstGeom prst="rect">
-            <a:avLst/>
-          </a:prstGeom>
-          <a:noFill/>
-        </p:spPr>
-        <p:txBody>
-          <a:bodyPr wrap="square" rtlCol="0">
-            <a:spAutoFit/>
-          </a:bodyPr>
-          <a:lstStyle/>
-          <a:p>
-            <a:r>
-              <a:rPr lang="ru-RU" sz="2400" b="1" dirty="0">
-                <a:latin typeface="Bahnschrift" panose="020B0502040204020203" pitchFamily="34" charset="0"/>
-              </a:rPr>
-              <a:t>О проекте:</a:t>
-            </a:r>
-            <a:br>
-              <a:rPr lang="ru-RU" sz="2400" dirty="0">
-                <a:latin typeface="Bahnschrift" panose="020B0502040204020203" pitchFamily="34" charset="0"/>
-              </a:rPr>
-            </a:br>
-            <a:r>
-              <a:rPr lang="ru-RU" sz="2400" dirty="0">
-                <a:latin typeface="Bahnschrift" panose="020B0502040204020203" pitchFamily="34" charset="0"/>
-              </a:rPr>
-              <a:t>BloGGing CenteR — это веб-платформа для создания и ведения блогов.</a:t>
-            </a:r>
-          </a:p>
-          <a:p>
-            <a:r>
-              <a:rPr lang="ru-RU" sz="2400" b="1" dirty="0">
-                <a:latin typeface="Bahnschrift" panose="020B0502040204020203" pitchFamily="34" charset="0"/>
-              </a:rPr>
-              <a:t>Целевая аудитория:</a:t>
-            </a:r>
-            <a:endParaRPr lang="ru-RU" sz="2400" dirty="0">
-              <a:latin typeface="Bahnschrift" panose="020B0502040204020203" pitchFamily="34" charset="0"/>
-            </a:endParaRPr>
-          </a:p>
-          <a:p>
-            <a:r>
-              <a:rPr lang="ru-RU" sz="2400" b="1" dirty="0">
-                <a:latin typeface="Bahnschrift" panose="020B0502040204020203" pitchFamily="34" charset="0"/>
-              </a:rPr>
-              <a:t>- Авторы</a:t>
-            </a:r>
-            <a:r>
-              <a:rPr lang="ru-RU" sz="2400" dirty="0">
-                <a:latin typeface="Bahnschrift" panose="020B0502040204020203" pitchFamily="34" charset="0"/>
-              </a:rPr>
-              <a:t> — создают блоги и публикуют статьи;</a:t>
-            </a:r>
-          </a:p>
-          <a:p>
-            <a:r>
-              <a:rPr lang="ru-RU" sz="2400" b="1" dirty="0">
-                <a:latin typeface="Bahnschrift" panose="020B0502040204020203" pitchFamily="34" charset="0"/>
-              </a:rPr>
-              <a:t>- Читатели</a:t>
-            </a:r>
-            <a:r>
-              <a:rPr lang="ru-RU" sz="2400" dirty="0">
-                <a:latin typeface="Bahnschrift" panose="020B0502040204020203" pitchFamily="34" charset="0"/>
-              </a:rPr>
-              <a:t> — читают статьи, комментируют, подписываются;</a:t>
-            </a:r>
-          </a:p>
-          <a:p>
-            <a:r>
-              <a:rPr lang="ru-RU" sz="2400" b="1" dirty="0">
-                <a:latin typeface="Bahnschrift" panose="020B0502040204020203" pitchFamily="34" charset="0"/>
-              </a:rPr>
-              <a:t>- Администратор</a:t>
-            </a:r>
-            <a:r>
-              <a:rPr lang="ru-RU" sz="2400" dirty="0">
-                <a:latin typeface="Bahnschrift" panose="020B0502040204020203" pitchFamily="34" charset="0"/>
-              </a:rPr>
-              <a:t> — управляет пользователями и модерирует контент;</a:t>
-            </a:r>
-          </a:p>
-          <a:p>
-            <a:r>
-              <a:rPr lang="ru-RU" sz="2400" b="1" dirty="0">
-                <a:latin typeface="Bahnschrift" panose="020B0502040204020203" pitchFamily="34" charset="0"/>
-              </a:rPr>
-              <a:t>Основной функционал MVP:</a:t>
-            </a:r>
-            <a:endParaRPr lang="ru-RU" sz="2400" dirty="0">
-              <a:latin typeface="Bahnschrift" panose="020B0502040204020203" pitchFamily="34" charset="0"/>
-            </a:endParaRPr>
-          </a:p>
-          <a:p>
-            <a:pPr marL="342900" indent="-342900">
-              <a:buFont typeface="Arial" panose="020B0604020202020204" pitchFamily="34" charset="0"/>
-              <a:buChar char="•"/>
-            </a:pPr>
-            <a:r>
-              <a:rPr lang="ru-RU" sz="2400" dirty="0">
-                <a:latin typeface="Bahnschrift" panose="020B0502040204020203" pitchFamily="34" charset="0"/>
-              </a:rPr>
-              <a:t>Регистрация и аутентификация;</a:t>
-            </a:r>
-          </a:p>
-          <a:p>
-            <a:pPr marL="342900" indent="-342900">
-              <a:buFont typeface="Arial" panose="020B0604020202020204" pitchFamily="34" charset="0"/>
-              <a:buChar char="•"/>
-            </a:pPr>
-            <a:r>
-              <a:rPr lang="ru-RU" sz="2400" dirty="0">
-                <a:latin typeface="Bahnschrift" panose="020B0502040204020203" pitchFamily="34" charset="0"/>
-              </a:rPr>
-              <a:t>Управление блогом (создание, редактирование);</a:t>
-            </a:r>
-          </a:p>
-          <a:p>
-            <a:pPr marL="342900" indent="-342900">
-              <a:buFont typeface="Arial" panose="020B0604020202020204" pitchFamily="34" charset="0"/>
-              <a:buChar char="•"/>
-            </a:pPr>
-            <a:r>
-              <a:rPr lang="ru-RU" sz="2400" dirty="0">
-                <a:latin typeface="Bahnschrift" panose="020B0502040204020203" pitchFamily="34" charset="0"/>
-              </a:rPr>
-              <a:t>Публикация статей (CRUD);</a:t>
-            </a:r>
-          </a:p>
-          <a:p>
-            <a:pPr marL="342900" indent="-342900">
-              <a:buFont typeface="Arial" panose="020B0604020202020204" pitchFamily="34" charset="0"/>
-              <a:buChar char="•"/>
-            </a:pPr>
-            <a:r>
-              <a:rPr lang="ru-RU" sz="2400" dirty="0">
-                <a:latin typeface="Bahnschrift" panose="020B0502040204020203" pitchFamily="34" charset="0"/>
-              </a:rPr>
-              <a:t>Система комментариев;</a:t>
-            </a:r>
-          </a:p>
-          <a:p>
-            <a:pPr marL="342900" indent="-342900">
-              <a:buFont typeface="Arial" panose="020B0604020202020204" pitchFamily="34" charset="0"/>
-              <a:buChar char="•"/>
-            </a:pPr>
-            <a:r>
-              <a:rPr lang="ru-RU" sz="2400" dirty="0">
-                <a:latin typeface="Bahnschrift" panose="020B0502040204020203" pitchFamily="34" charset="0"/>
-              </a:rPr>
-              <a:t>Админ-панель (блокировка пользователей);</a:t>
-            </a:r>
-          </a:p>
-          <a:p>
-            <a:endParaRPr lang="ru-RU" dirty="0"/>
-          </a:p>
-        </p:txBody>
-      </p:sp>
-      <p:sp>
-        <p:nvSpPr>
-          <p:cNvPr id="3" name="TextBox 2">
-            <a:extLst>
-              <a:ext uri="{FF2B5EF4-FFF2-40B4-BE49-F238E27FC236}">
-                <a16:creationId xmlns:a16="http://schemas.microsoft.com/office/drawing/2014/main" id="{C248BF56-17DF-AD15-E2C4-45EE91A09F82}"/>
-              </a:ext>
-            </a:extLst>
-          </p:cNvPr>
-          <p:cNvSpPr txBox="1"/>
-          <p:nvPr/>
-        </p:nvSpPr>
-        <p:spPr>
-          <a:xfrm>
-            <a:off x="4711700" y="278825"/>
-            <a:ext cx="6555179" cy="584775"/>
-          </a:xfrm>
-          <a:prstGeom prst="rect">
-            <a:avLst/>
-          </a:prstGeom>
-          <a:noFill/>
-        </p:spPr>
-        <p:txBody>
-          <a:bodyPr wrap="square" rtlCol="0">
-            <a:spAutoFit/>
-          </a:bodyPr>
-          <a:lstStyle/>
-          <a:p>
-            <a:r>
-              <a:rPr lang="ru-RU" sz="3200" b="1" dirty="0">
-                <a:latin typeface="Bahnschrift" panose="020B0502040204020203" pitchFamily="34" charset="0"/>
-              </a:rPr>
-              <a:t>Краткое описание приложения</a:t>
-            </a:r>
-          </a:p>
-        </p:txBody>
-      </p:sp>
-      <mc:AlternateContent xmlns:mc="http://schemas.openxmlformats.org/markup-compatibility/2006">
-        <mc:Choice xmlns:p14="http://schemas.microsoft.com/office/powerpoint/2010/main" Requires="p14">
-          <p:contentPart p14:bwMode="auto" r:id="rId2">
-            <p14:nvContentPartPr>
-              <p14:cNvPr id="4" name="Рукописный ввод 3">
-                <a:extLst>
-                  <a:ext uri="{FF2B5EF4-FFF2-40B4-BE49-F238E27FC236}">
-                    <a16:creationId xmlns:a16="http://schemas.microsoft.com/office/drawing/2014/main" id="{DFB5897D-3A74-9D6F-65D2-40763F6E1C4B}"/>
-                  </a:ext>
-                </a:extLst>
-              </p14:cNvPr>
-              <p14:cNvContentPartPr/>
-              <p14:nvPr/>
-            </p14:nvContentPartPr>
-            <p14:xfrm>
-              <a:off x="11607540" y="6324020"/>
-              <a:ext cx="443160" cy="408240"/>
-            </p14:xfrm>
-          </p:contentPart>
-        </mc:Choice>
-        <mc:Fallback>
-          <p:pic>
-            <p:nvPicPr>
-              <p:cNvPr id="4" name="Рукописный ввод 3">
-                <a:extLst>
-                  <a:ext uri="{FF2B5EF4-FFF2-40B4-BE49-F238E27FC236}">
-                    <a16:creationId xmlns:a16="http://schemas.microsoft.com/office/drawing/2014/main" id="{DFB5897D-3A74-9D6F-65D2-40763F6E1C4B}"/>
-                  </a:ext>
-                </a:extLst>
-              </p:cNvPr>
-              <p:cNvPicPr/>
-              <p:nvPr/>
-            </p:nvPicPr>
-            <p:blipFill>
-              <a:blip r:embed="rId3"/>
-              <a:stretch>
-                <a:fillRect/>
-              </a:stretch>
-            </p:blipFill>
-            <p:spPr>
-              <a:xfrm>
-                <a:off x="11601420" y="6317900"/>
-                <a:ext cx="455400" cy="420480"/>
-              </a:xfrm>
-              <a:prstGeom prst="rect">
-                <a:avLst/>
-              </a:prstGeom>
-            </p:spPr>
-          </p:pic>
-        </mc:Fallback>
-      </mc:AlternateContent>
-    </p:spTree>
-    <p:extLst>
-      <p:ext uri="{BB962C8B-B14F-4D97-AF65-F5344CB8AC3E}">
-        <p14:creationId xmlns:p14="http://schemas.microsoft.com/office/powerpoint/2010/main" val="1435874274"/>
-      </p:ext>
-    </p:extLst>
-  </p:cSld>
-  <p:clrMapOvr>
-    <a:masterClrMapping/>
-  </p:clrMapOvr>
-  <mc:AlternateContent xmlns:mc="http://schemas.openxmlformats.org/markup-compatibility/2006">
-    <mc:Choice xmlns:p159="http://schemas.microsoft.com/office/powerpoint/2015/09/main" Requires="p159">
-      <p:transition xmlns:p14="http://schemas.microsoft.com/office/powerpoint/2010/main" spd="slow" p14:dur="2000">
-        <p159:morph option="byObject"/>
-      </p:transition>
-    </mc:Choice>
-    <mc:Fallback>
-      <p:transition spd="slow">
-        <p:fade/>
-      </p:transition>
-    </mc:Fallback>
-  </mc:AlternateContent>
-</p:sld>
-</file>
-
-<file path=ppt/slides/slide3.xml><?xml version="1.0" encoding="utf-8"?>
-<p:sld xmlns:a="http://schemas.openxmlformats.org/drawingml/2006/main" xmlns:r="http://schemas.openxmlformats.org/officeDocument/2006/relationships" xmlns:p="http://schemas.openxmlformats.org/presentationml/2006/main">
-  <p:cSld>
-    <p:spTree>
-      <p:nvGrpSpPr>
-        <p:cNvPr id="1" name="">
-          <a:extLst>
-            <a:ext uri="{FF2B5EF4-FFF2-40B4-BE49-F238E27FC236}">
-              <a16:creationId xmlns:a16="http://schemas.microsoft.com/office/drawing/2014/main" id="{CFFC0B81-6736-A949-2E10-F678BE459511}"/>
-            </a:ext>
-          </a:extLst>
-        </p:cNvPr>
-        <p:cNvGrpSpPr/>
-        <p:nvPr/>
-      </p:nvGrpSpPr>
-      <p:grpSpPr>
-        <a:xfrm>
-          <a:off x="0" y="0"/>
-          <a:ext cx="0" cy="0"/>
-          <a:chOff x="0" y="0"/>
-          <a:chExt cx="0" cy="0"/>
-        </a:xfrm>
-      </p:grpSpPr>
-      <p:sp>
-        <p:nvSpPr>
-          <p:cNvPr id="6" name="Прямоугольник 5">
-            <a:extLst>
-              <a:ext uri="{FF2B5EF4-FFF2-40B4-BE49-F238E27FC236}">
-                <a16:creationId xmlns:a16="http://schemas.microsoft.com/office/drawing/2014/main" id="{5DCB34BD-BC34-6A75-EF38-CC2DFF263FFE}"/>
-              </a:ext>
-            </a:extLst>
-          </p:cNvPr>
-          <p:cNvSpPr/>
-          <p:nvPr/>
-        </p:nvSpPr>
-        <p:spPr>
-          <a:xfrm>
-            <a:off x="-2235200" y="0"/>
-            <a:ext cx="14427200" cy="6858000"/>
-          </a:xfrm>
-          <a:prstGeom prst="rect">
-            <a:avLst/>
-          </a:prstGeom>
-          <a:solidFill>
-            <a:srgbClr val="CCECFF"/>
-          </a:solidFill>
-        </p:spPr>
-        <p:style>
-          <a:lnRef idx="2">
-            <a:schemeClr val="accent1">
-              <a:shade val="15000"/>
-            </a:schemeClr>
-          </a:lnRef>
-          <a:fillRef idx="1">
-            <a:schemeClr val="accent1"/>
-          </a:fillRef>
-          <a:effectRef idx="0">
-            <a:schemeClr val="accent1"/>
-          </a:effectRef>
-          <a:fontRef idx="minor">
-            <a:schemeClr val="lt1"/>
-          </a:fontRef>
-        </p:style>
-        <p:txBody>
-          <a:bodyPr rtlCol="0" anchor="ctr"/>
-          <a:lstStyle/>
-          <a:p>
-            <a:pPr algn="ctr"/>
-            <a:endParaRPr lang="ru-RU"/>
-          </a:p>
-        </p:txBody>
-      </p:sp>
-      <p:sp>
-        <p:nvSpPr>
-          <p:cNvPr id="7" name="Прямоугольник 6">
-            <a:extLst>
-              <a:ext uri="{FF2B5EF4-FFF2-40B4-BE49-F238E27FC236}">
-                <a16:creationId xmlns:a16="http://schemas.microsoft.com/office/drawing/2014/main" id="{E6997E66-1E4E-B767-7449-A7E78BEF9680}"/>
-              </a:ext>
-            </a:extLst>
-          </p:cNvPr>
-          <p:cNvSpPr/>
-          <p:nvPr/>
-        </p:nvSpPr>
-        <p:spPr>
-          <a:xfrm>
-            <a:off x="-3451101" y="0"/>
-            <a:ext cx="15643101" cy="6858000"/>
-          </a:xfrm>
-          <a:prstGeom prst="rect">
-            <a:avLst/>
-          </a:prstGeom>
-          <a:solidFill>
-            <a:srgbClr val="99CCFF"/>
-          </a:solidFill>
-        </p:spPr>
-        <p:style>
-          <a:lnRef idx="2">
-            <a:schemeClr val="accent1">
-              <a:shade val="15000"/>
-            </a:schemeClr>
-          </a:lnRef>
-          <a:fillRef idx="1">
-            <a:schemeClr val="accent1"/>
-          </a:fillRef>
-          <a:effectRef idx="0">
-            <a:schemeClr val="accent1"/>
-          </a:effectRef>
-          <a:fontRef idx="minor">
-            <a:schemeClr val="lt1"/>
-          </a:fontRef>
-        </p:style>
-        <p:txBody>
-          <a:bodyPr rtlCol="0" anchor="ctr"/>
-          <a:lstStyle/>
-          <a:p>
-            <a:pPr algn="ctr"/>
-            <a:endParaRPr lang="ru-RU"/>
-          </a:p>
-        </p:txBody>
-      </p:sp>
-      <p:sp>
-        <p:nvSpPr>
-          <p:cNvPr id="8" name="Прямоугольник 7">
-            <a:extLst>
-              <a:ext uri="{FF2B5EF4-FFF2-40B4-BE49-F238E27FC236}">
-                <a16:creationId xmlns:a16="http://schemas.microsoft.com/office/drawing/2014/main" id="{1D2AE98D-0520-8E4B-3B03-DBDA05E7C116}"/>
-              </a:ext>
-            </a:extLst>
-          </p:cNvPr>
-          <p:cNvSpPr/>
-          <p:nvPr/>
-        </p:nvSpPr>
-        <p:spPr>
-          <a:xfrm>
-            <a:off x="-4207824" y="0"/>
-            <a:ext cx="6555179" cy="6858000"/>
-          </a:xfrm>
-          <a:prstGeom prst="rect">
-            <a:avLst/>
-          </a:prstGeom>
-          <a:solidFill>
-            <a:srgbClr val="66CCFF"/>
-          </a:solidFill>
-        </p:spPr>
-        <p:style>
-          <a:lnRef idx="2">
-            <a:schemeClr val="accent1">
-              <a:shade val="15000"/>
-            </a:schemeClr>
-          </a:lnRef>
-          <a:fillRef idx="1">
-            <a:schemeClr val="accent1"/>
-          </a:fillRef>
-          <a:effectRef idx="0">
-            <a:schemeClr val="accent1"/>
-          </a:effectRef>
-          <a:fontRef idx="minor">
-            <a:schemeClr val="lt1"/>
-          </a:fontRef>
-        </p:style>
-        <p:txBody>
-          <a:bodyPr rtlCol="0" anchor="ctr"/>
-          <a:lstStyle/>
-          <a:p>
-            <a:pPr algn="ctr"/>
-            <a:endParaRPr lang="ru-RU"/>
-          </a:p>
-        </p:txBody>
-      </p:sp>
-      <p:sp>
-        <p:nvSpPr>
-          <p:cNvPr id="9" name="Прямоугольник 8">
-            <a:extLst>
-              <a:ext uri="{FF2B5EF4-FFF2-40B4-BE49-F238E27FC236}">
-                <a16:creationId xmlns:a16="http://schemas.microsoft.com/office/drawing/2014/main" id="{0D5EBBFF-47EC-034A-D80E-5E242E67E393}"/>
-              </a:ext>
-            </a:extLst>
-          </p:cNvPr>
-          <p:cNvSpPr/>
-          <p:nvPr/>
-        </p:nvSpPr>
-        <p:spPr>
-          <a:xfrm>
-            <a:off x="-4964547" y="0"/>
-            <a:ext cx="6555179" cy="6858000"/>
-          </a:xfrm>
-          <a:prstGeom prst="rect">
-            <a:avLst/>
-          </a:prstGeom>
-          <a:solidFill>
-            <a:srgbClr val="3399FF"/>
-          </a:solidFill>
-        </p:spPr>
-        <p:style>
-          <a:lnRef idx="2">
-            <a:schemeClr val="accent1">
-              <a:shade val="15000"/>
-            </a:schemeClr>
-          </a:lnRef>
-          <a:fillRef idx="1">
-            <a:schemeClr val="accent1"/>
-          </a:fillRef>
-          <a:effectRef idx="0">
-            <a:schemeClr val="accent1"/>
-          </a:effectRef>
-          <a:fontRef idx="minor">
-            <a:schemeClr val="lt1"/>
-          </a:fontRef>
-        </p:style>
-        <p:txBody>
-          <a:bodyPr rtlCol="0" anchor="ctr"/>
-          <a:lstStyle/>
-          <a:p>
-            <a:pPr algn="ctr"/>
-            <a:endParaRPr lang="ru-RU"/>
-          </a:p>
-        </p:txBody>
-      </p:sp>
-      <p:sp>
-        <p:nvSpPr>
-          <p:cNvPr id="10" name="Прямоугольник 9">
-            <a:extLst>
-              <a:ext uri="{FF2B5EF4-FFF2-40B4-BE49-F238E27FC236}">
-                <a16:creationId xmlns:a16="http://schemas.microsoft.com/office/drawing/2014/main" id="{3198E00B-9438-2C6D-2B77-7C1891683286}"/>
-              </a:ext>
-            </a:extLst>
-          </p:cNvPr>
-          <p:cNvSpPr/>
-          <p:nvPr/>
-        </p:nvSpPr>
-        <p:spPr>
-          <a:xfrm>
-            <a:off x="-5742378" y="0"/>
-            <a:ext cx="6555179" cy="6858000"/>
-          </a:xfrm>
-          <a:prstGeom prst="rect">
-            <a:avLst/>
-          </a:prstGeom>
-          <a:solidFill>
-            <a:srgbClr val="0066FF"/>
-          </a:solidFill>
-        </p:spPr>
-        <p:style>
-          <a:lnRef idx="2">
-            <a:schemeClr val="accent1">
-              <a:shade val="15000"/>
-            </a:schemeClr>
-          </a:lnRef>
-          <a:fillRef idx="1">
-            <a:schemeClr val="accent1"/>
-          </a:fillRef>
-          <a:effectRef idx="0">
-            <a:schemeClr val="accent1"/>
-          </a:effectRef>
-          <a:fontRef idx="minor">
-            <a:schemeClr val="lt1"/>
-          </a:fontRef>
-        </p:style>
-        <p:txBody>
-          <a:bodyPr rtlCol="0" anchor="ctr"/>
-          <a:lstStyle/>
-          <a:p>
-            <a:pPr algn="ctr"/>
-            <a:endParaRPr lang="ru-RU"/>
-          </a:p>
-        </p:txBody>
-      </p:sp>
-      <p:sp>
-        <p:nvSpPr>
-          <p:cNvPr id="3" name="TextBox 2">
-            <a:extLst>
-              <a:ext uri="{FF2B5EF4-FFF2-40B4-BE49-F238E27FC236}">
-                <a16:creationId xmlns:a16="http://schemas.microsoft.com/office/drawing/2014/main" id="{09CA7E7C-FEFE-AEC9-9D65-AFA5C099AF3E}"/>
-              </a:ext>
-            </a:extLst>
-          </p:cNvPr>
-          <p:cNvSpPr txBox="1"/>
-          <p:nvPr/>
-        </p:nvSpPr>
-        <p:spPr>
-          <a:xfrm>
-            <a:off x="4370449" y="266125"/>
-            <a:ext cx="6555179" cy="584775"/>
-          </a:xfrm>
-          <a:prstGeom prst="rect">
-            <a:avLst/>
-          </a:prstGeom>
-          <a:noFill/>
-        </p:spPr>
-        <p:txBody>
-          <a:bodyPr wrap="square" rtlCol="0">
-            <a:spAutoFit/>
-          </a:bodyPr>
-          <a:lstStyle/>
-          <a:p>
-            <a:r>
-              <a:rPr lang="ru-RU" sz="3200" b="1" dirty="0">
-                <a:latin typeface="Bahnschrift" panose="020B0502040204020203" pitchFamily="34" charset="0"/>
-              </a:rPr>
-              <a:t>Структура файлов проекта</a:t>
-            </a:r>
-          </a:p>
-        </p:txBody>
-      </p:sp>
-      <p:pic>
-        <p:nvPicPr>
-          <p:cNvPr id="5" name="Рисунок 4">
-            <a:extLst>
-              <a:ext uri="{FF2B5EF4-FFF2-40B4-BE49-F238E27FC236}">
-                <a16:creationId xmlns:a16="http://schemas.microsoft.com/office/drawing/2014/main" id="{F579D325-3212-E4AF-676C-93FDE32769A1}"/>
-              </a:ext>
-            </a:extLst>
-          </p:cNvPr>
-          <p:cNvPicPr>
-            <a:picLocks noChangeAspect="1"/>
-          </p:cNvPicPr>
-          <p:nvPr/>
-        </p:nvPicPr>
-        <p:blipFill>
-          <a:blip r:embed="rId2"/>
-          <a:stretch>
-            <a:fillRect/>
-          </a:stretch>
-        </p:blipFill>
-        <p:spPr>
-          <a:xfrm>
-            <a:off x="3423556" y="990025"/>
-            <a:ext cx="7352228" cy="5490920"/>
-          </a:xfrm>
-          <a:prstGeom prst="rect">
-            <a:avLst/>
-          </a:prstGeom>
-        </p:spPr>
-      </p:pic>
-      <mc:AlternateContent xmlns:mc="http://schemas.openxmlformats.org/markup-compatibility/2006">
-        <mc:Choice xmlns:p14="http://schemas.microsoft.com/office/powerpoint/2010/main" Requires="p14">
-          <p:contentPart p14:bwMode="auto" r:id="rId3">
-            <p14:nvContentPartPr>
-              <p14:cNvPr id="11" name="Рукописный ввод 10">
-                <a:extLst>
-                  <a:ext uri="{FF2B5EF4-FFF2-40B4-BE49-F238E27FC236}">
-                    <a16:creationId xmlns:a16="http://schemas.microsoft.com/office/drawing/2014/main" id="{70E174BD-0990-50C9-7111-C44101E45135}"/>
-                  </a:ext>
-                </a:extLst>
-              </p14:cNvPr>
-              <p14:cNvContentPartPr/>
-              <p14:nvPr/>
-            </p14:nvContentPartPr>
-            <p14:xfrm>
-              <a:off x="11578020" y="6284420"/>
-              <a:ext cx="300240" cy="449280"/>
-            </p14:xfrm>
-          </p:contentPart>
-        </mc:Choice>
-        <mc:Fallback>
-          <p:pic>
-            <p:nvPicPr>
-              <p:cNvPr id="11" name="Рукописный ввод 10">
-                <a:extLst>
-                  <a:ext uri="{FF2B5EF4-FFF2-40B4-BE49-F238E27FC236}">
-                    <a16:creationId xmlns:a16="http://schemas.microsoft.com/office/drawing/2014/main" id="{70E174BD-0990-50C9-7111-C44101E45135}"/>
-                  </a:ext>
-                </a:extLst>
-              </p:cNvPr>
-              <p:cNvPicPr/>
-              <p:nvPr/>
-            </p:nvPicPr>
-            <p:blipFill>
-              <a:blip r:embed="rId4"/>
-              <a:stretch>
-                <a:fillRect/>
-              </a:stretch>
-            </p:blipFill>
-            <p:spPr>
-              <a:xfrm>
-                <a:off x="11571900" y="6278300"/>
-                <a:ext cx="312480" cy="461520"/>
-              </a:xfrm>
-              <a:prstGeom prst="rect">
-                <a:avLst/>
-              </a:prstGeom>
-            </p:spPr>
-          </p:pic>
-        </mc:Fallback>
-      </mc:AlternateContent>
-    </p:spTree>
-    <p:extLst>
-      <p:ext uri="{BB962C8B-B14F-4D97-AF65-F5344CB8AC3E}">
-        <p14:creationId xmlns:p14="http://schemas.microsoft.com/office/powerpoint/2010/main" val="545565142"/>
-      </p:ext>
-    </p:extLst>
-  </p:cSld>
-  <p:clrMapOvr>
-    <a:masterClrMapping/>
-  </p:clrMapOvr>
-  <mc:AlternateContent xmlns:mc="http://schemas.openxmlformats.org/markup-compatibility/2006">
-    <mc:Choice xmlns:p159="http://schemas.microsoft.com/office/powerpoint/2015/09/main" Requires="p159">
-      <p:transition xmlns:p14="http://schemas.microsoft.com/office/powerpoint/2010/main" spd="slow" p14:dur="2000">
-        <p159:morph option="byObject"/>
-      </p:transition>
-    </mc:Choice>
-    <mc:Fallback>
-      <p:transition spd="slow">
-        <p:fade/>
-      </p:transition>
-    </mc:Fallback>
-  </mc:AlternateContent>
-</p:sld>
-</file>
-
-<file path=ppt/slides/slide4.xml><?xml version="1.0" encoding="utf-8"?>
-<p:sld xmlns:a="http://schemas.openxmlformats.org/drawingml/2006/main" xmlns:r="http://schemas.openxmlformats.org/officeDocument/2006/relationships" xmlns:p="http://schemas.openxmlformats.org/presentationml/2006/main">
-  <p:cSld>
-    <p:spTree>
-      <p:nvGrpSpPr>
-        <p:cNvPr id="1" name="">
-          <a:extLst>
-            <a:ext uri="{FF2B5EF4-FFF2-40B4-BE49-F238E27FC236}">
-              <a16:creationId xmlns:a16="http://schemas.microsoft.com/office/drawing/2014/main" id="{56BDAA26-44A0-5D97-ABB6-5462D26726AE}"/>
-            </a:ext>
-          </a:extLst>
-        </p:cNvPr>
-        <p:cNvGrpSpPr/>
-        <p:nvPr/>
-      </p:nvGrpSpPr>
-      <p:grpSpPr>
-        <a:xfrm>
-          <a:off x="0" y="0"/>
-          <a:ext cx="0" cy="0"/>
-          <a:chOff x="0" y="0"/>
-          <a:chExt cx="0" cy="0"/>
-        </a:xfrm>
-      </p:grpSpPr>
-      <p:sp>
-        <p:nvSpPr>
-          <p:cNvPr id="6" name="Прямоугольник 5">
-            <a:extLst>
-              <a:ext uri="{FF2B5EF4-FFF2-40B4-BE49-F238E27FC236}">
-                <a16:creationId xmlns:a16="http://schemas.microsoft.com/office/drawing/2014/main" id="{B704D3AD-39D4-9FDA-399A-B5693D0F492F}"/>
-              </a:ext>
-            </a:extLst>
-          </p:cNvPr>
-          <p:cNvSpPr/>
-          <p:nvPr/>
-        </p:nvSpPr>
-        <p:spPr>
-          <a:xfrm>
-            <a:off x="-2235200" y="0"/>
-            <a:ext cx="14427200" cy="6858000"/>
-          </a:xfrm>
-          <a:prstGeom prst="rect">
-            <a:avLst/>
-          </a:prstGeom>
-          <a:solidFill>
-            <a:srgbClr val="CCECFF"/>
-          </a:solidFill>
-        </p:spPr>
-        <p:style>
-          <a:lnRef idx="2">
-            <a:schemeClr val="accent1">
-              <a:shade val="15000"/>
-            </a:schemeClr>
-          </a:lnRef>
-          <a:fillRef idx="1">
-            <a:schemeClr val="accent1"/>
-          </a:fillRef>
-          <a:effectRef idx="0">
-            <a:schemeClr val="accent1"/>
-          </a:effectRef>
-          <a:fontRef idx="minor">
-            <a:schemeClr val="lt1"/>
-          </a:fontRef>
-        </p:style>
-        <p:txBody>
-          <a:bodyPr rtlCol="0" anchor="ctr"/>
-          <a:lstStyle/>
-          <a:p>
-            <a:pPr algn="ctr"/>
-            <a:endParaRPr lang="ru-RU"/>
-          </a:p>
-        </p:txBody>
-      </p:sp>
-      <p:sp>
-        <p:nvSpPr>
-          <p:cNvPr id="7" name="Прямоугольник 6">
-            <a:extLst>
-              <a:ext uri="{FF2B5EF4-FFF2-40B4-BE49-F238E27FC236}">
-                <a16:creationId xmlns:a16="http://schemas.microsoft.com/office/drawing/2014/main" id="{24946CB1-AE4C-3C6D-2486-CB6EBC4C0BA2}"/>
-              </a:ext>
-            </a:extLst>
-          </p:cNvPr>
-          <p:cNvSpPr/>
-          <p:nvPr/>
-        </p:nvSpPr>
-        <p:spPr>
-          <a:xfrm>
-            <a:off x="-3451101" y="0"/>
-            <a:ext cx="15643101" cy="6858000"/>
-          </a:xfrm>
-          <a:prstGeom prst="rect">
-            <a:avLst/>
-          </a:prstGeom>
-          <a:solidFill>
-            <a:srgbClr val="99CCFF"/>
-          </a:solidFill>
-        </p:spPr>
-        <p:style>
-          <a:lnRef idx="2">
-            <a:schemeClr val="accent1">
-              <a:shade val="15000"/>
-            </a:schemeClr>
-          </a:lnRef>
-          <a:fillRef idx="1">
-            <a:schemeClr val="accent1"/>
-          </a:fillRef>
-          <a:effectRef idx="0">
-            <a:schemeClr val="accent1"/>
-          </a:effectRef>
-          <a:fontRef idx="minor">
-            <a:schemeClr val="lt1"/>
-          </a:fontRef>
-        </p:style>
-        <p:txBody>
-          <a:bodyPr rtlCol="0" anchor="ctr"/>
-          <a:lstStyle/>
-          <a:p>
-            <a:pPr algn="ctr"/>
-            <a:endParaRPr lang="ru-RU"/>
-          </a:p>
-        </p:txBody>
-      </p:sp>
-      <p:sp>
-        <p:nvSpPr>
-          <p:cNvPr id="8" name="Прямоугольник 7">
-            <a:extLst>
-              <a:ext uri="{FF2B5EF4-FFF2-40B4-BE49-F238E27FC236}">
-                <a16:creationId xmlns:a16="http://schemas.microsoft.com/office/drawing/2014/main" id="{53227780-729C-2789-1540-D7B919BB43A7}"/>
-              </a:ext>
-            </a:extLst>
-          </p:cNvPr>
-          <p:cNvSpPr/>
-          <p:nvPr/>
-        </p:nvSpPr>
-        <p:spPr>
-          <a:xfrm>
-            <a:off x="-4207824" y="0"/>
-            <a:ext cx="16399824" cy="6858000"/>
-          </a:xfrm>
-          <a:prstGeom prst="rect">
-            <a:avLst/>
-          </a:prstGeom>
-          <a:solidFill>
-            <a:srgbClr val="66CCFF"/>
-          </a:solidFill>
-        </p:spPr>
-        <p:style>
-          <a:lnRef idx="2">
-            <a:schemeClr val="accent1">
-              <a:shade val="15000"/>
-            </a:schemeClr>
-          </a:lnRef>
-          <a:fillRef idx="1">
-            <a:schemeClr val="accent1"/>
-          </a:fillRef>
-          <a:effectRef idx="0">
-            <a:schemeClr val="accent1"/>
-          </a:effectRef>
-          <a:fontRef idx="minor">
-            <a:schemeClr val="lt1"/>
-          </a:fontRef>
-        </p:style>
-        <p:txBody>
-          <a:bodyPr rtlCol="0" anchor="ctr"/>
-          <a:lstStyle/>
-          <a:p>
-            <a:pPr algn="ctr"/>
-            <a:endParaRPr lang="ru-RU"/>
-          </a:p>
-        </p:txBody>
-      </p:sp>
-      <p:sp>
-        <p:nvSpPr>
-          <p:cNvPr id="9" name="Прямоугольник 8">
-            <a:extLst>
-              <a:ext uri="{FF2B5EF4-FFF2-40B4-BE49-F238E27FC236}">
-                <a16:creationId xmlns:a16="http://schemas.microsoft.com/office/drawing/2014/main" id="{6F3AEAD3-23B5-4ACF-44B8-173B940E277B}"/>
-              </a:ext>
-            </a:extLst>
-          </p:cNvPr>
-          <p:cNvSpPr/>
-          <p:nvPr/>
-        </p:nvSpPr>
-        <p:spPr>
-          <a:xfrm>
-            <a:off x="-4964547" y="0"/>
-            <a:ext cx="6555179" cy="6858000"/>
-          </a:xfrm>
-          <a:prstGeom prst="rect">
-            <a:avLst/>
-          </a:prstGeom>
-          <a:solidFill>
-            <a:srgbClr val="3399FF"/>
-          </a:solidFill>
-        </p:spPr>
-        <p:style>
-          <a:lnRef idx="2">
-            <a:schemeClr val="accent1">
-              <a:shade val="15000"/>
-            </a:schemeClr>
-          </a:lnRef>
-          <a:fillRef idx="1">
-            <a:schemeClr val="accent1"/>
-          </a:fillRef>
-          <a:effectRef idx="0">
-            <a:schemeClr val="accent1"/>
-          </a:effectRef>
-          <a:fontRef idx="minor">
-            <a:schemeClr val="lt1"/>
-          </a:fontRef>
-        </p:style>
-        <p:txBody>
-          <a:bodyPr rtlCol="0" anchor="ctr"/>
-          <a:lstStyle/>
-          <a:p>
-            <a:pPr algn="ctr"/>
-            <a:endParaRPr lang="ru-RU"/>
-          </a:p>
-        </p:txBody>
-      </p:sp>
-      <p:sp>
-        <p:nvSpPr>
-          <p:cNvPr id="10" name="Прямоугольник 9">
-            <a:extLst>
-              <a:ext uri="{FF2B5EF4-FFF2-40B4-BE49-F238E27FC236}">
-                <a16:creationId xmlns:a16="http://schemas.microsoft.com/office/drawing/2014/main" id="{BEC2EB16-E79C-1F34-E759-FEC15D091845}"/>
-              </a:ext>
-            </a:extLst>
-          </p:cNvPr>
-          <p:cNvSpPr/>
-          <p:nvPr/>
-        </p:nvSpPr>
-        <p:spPr>
-          <a:xfrm>
-            <a:off x="-5742378" y="0"/>
-            <a:ext cx="6555179" cy="6858000"/>
-          </a:xfrm>
-          <a:prstGeom prst="rect">
-            <a:avLst/>
-          </a:prstGeom>
-          <a:solidFill>
-            <a:srgbClr val="0066FF"/>
-          </a:solidFill>
-        </p:spPr>
-        <p:style>
-          <a:lnRef idx="2">
-            <a:schemeClr val="accent1">
-              <a:shade val="15000"/>
-            </a:schemeClr>
-          </a:lnRef>
-          <a:fillRef idx="1">
-            <a:schemeClr val="accent1"/>
-          </a:fillRef>
-          <a:effectRef idx="0">
-            <a:schemeClr val="accent1"/>
-          </a:effectRef>
-          <a:fontRef idx="minor">
-            <a:schemeClr val="lt1"/>
-          </a:fontRef>
-        </p:style>
-        <p:txBody>
-          <a:bodyPr rtlCol="0" anchor="ctr"/>
-          <a:lstStyle/>
-          <a:p>
-            <a:pPr algn="ctr"/>
-            <a:endParaRPr lang="ru-RU"/>
-          </a:p>
-        </p:txBody>
-      </p:sp>
-      <p:sp>
-        <p:nvSpPr>
-          <p:cNvPr id="3" name="TextBox 2">
-            <a:extLst>
-              <a:ext uri="{FF2B5EF4-FFF2-40B4-BE49-F238E27FC236}">
-                <a16:creationId xmlns:a16="http://schemas.microsoft.com/office/drawing/2014/main" id="{4779E386-DC90-725E-C637-2248058C9F74}"/>
-              </a:ext>
-            </a:extLst>
-          </p:cNvPr>
-          <p:cNvSpPr txBox="1"/>
-          <p:nvPr/>
-        </p:nvSpPr>
-        <p:spPr>
-          <a:xfrm>
-            <a:off x="4370449" y="266125"/>
-            <a:ext cx="6555179" cy="584775"/>
-          </a:xfrm>
-          <a:prstGeom prst="rect">
-            <a:avLst/>
-          </a:prstGeom>
-          <a:noFill/>
-        </p:spPr>
-        <p:txBody>
-          <a:bodyPr wrap="square" rtlCol="0">
-            <a:spAutoFit/>
-          </a:bodyPr>
-          <a:lstStyle/>
-          <a:p>
-            <a:r>
-              <a:rPr lang="ru-RU" sz="3200" b="1" dirty="0">
-                <a:latin typeface="Bahnschrift" panose="020B0502040204020203" pitchFamily="34" charset="0"/>
-              </a:rPr>
-              <a:t>Скриншоты веб-страниц</a:t>
-            </a:r>
-          </a:p>
-        </p:txBody>
-      </p:sp>
-      <p:pic>
-        <p:nvPicPr>
-          <p:cNvPr id="5" name="Рисунок 4">
-            <a:extLst>
-              <a:ext uri="{FF2B5EF4-FFF2-40B4-BE49-F238E27FC236}">
-                <a16:creationId xmlns:a16="http://schemas.microsoft.com/office/drawing/2014/main" id="{E3DD98B8-D6D2-0AFF-4FDE-0397A4C4FB7D}"/>
-              </a:ext>
-            </a:extLst>
-          </p:cNvPr>
-          <p:cNvPicPr>
-            <a:picLocks noChangeAspect="1"/>
-          </p:cNvPicPr>
-          <p:nvPr/>
-        </p:nvPicPr>
-        <p:blipFill>
-          <a:blip r:embed="rId2"/>
-          <a:stretch>
-            <a:fillRect/>
-          </a:stretch>
-        </p:blipFill>
-        <p:spPr>
-          <a:xfrm>
-            <a:off x="15711925" y="683540"/>
-            <a:ext cx="7352228" cy="5490920"/>
-          </a:xfrm>
-          <a:prstGeom prst="rect">
-            <a:avLst/>
-          </a:prstGeom>
-        </p:spPr>
-      </p:pic>
-      <mc:AlternateContent xmlns:mc="http://schemas.openxmlformats.org/markup-compatibility/2006">
-        <mc:Choice xmlns:p14="http://schemas.microsoft.com/office/powerpoint/2010/main" Requires="p14">
-          <p:contentPart p14:bwMode="auto" r:id="rId3">
-            <p14:nvContentPartPr>
-              <p14:cNvPr id="2" name="Рукописный ввод 1">
-                <a:extLst>
-                  <a:ext uri="{FF2B5EF4-FFF2-40B4-BE49-F238E27FC236}">
-                    <a16:creationId xmlns:a16="http://schemas.microsoft.com/office/drawing/2014/main" id="{6751E251-86F7-7B56-321F-76F8CBA8E5C7}"/>
-                  </a:ext>
-                </a:extLst>
-              </p14:cNvPr>
-              <p14:cNvContentPartPr/>
-              <p14:nvPr/>
-            </p14:nvContentPartPr>
-            <p14:xfrm>
-              <a:off x="5867280" y="3961980"/>
-              <a:ext cx="360" cy="360"/>
-            </p14:xfrm>
-          </p:contentPart>
-        </mc:Choice>
-        <mc:Fallback>
-          <p:pic>
-            <p:nvPicPr>
-              <p:cNvPr id="2" name="Рукописный ввод 1">
-                <a:extLst>
-                  <a:ext uri="{FF2B5EF4-FFF2-40B4-BE49-F238E27FC236}">
-                    <a16:creationId xmlns:a16="http://schemas.microsoft.com/office/drawing/2014/main" id="{6751E251-86F7-7B56-321F-76F8CBA8E5C7}"/>
-                  </a:ext>
-                </a:extLst>
-              </p:cNvPr>
-              <p:cNvPicPr/>
-              <p:nvPr/>
-            </p:nvPicPr>
-            <p:blipFill>
-              <a:blip r:embed="rId4"/>
-              <a:stretch>
-                <a:fillRect/>
-              </a:stretch>
-            </p:blipFill>
-            <p:spPr>
-              <a:xfrm>
-                <a:off x="5861160" y="3955860"/>
-                <a:ext cx="12600" cy="12600"/>
-              </a:xfrm>
-              <a:prstGeom prst="rect">
-                <a:avLst/>
-              </a:prstGeom>
-            </p:spPr>
-          </p:pic>
-        </mc:Fallback>
-      </mc:AlternateContent>
-      <p:pic>
-        <p:nvPicPr>
-          <p:cNvPr id="12" name="Рисунок 11">
-            <a:extLst>
-              <a:ext uri="{FF2B5EF4-FFF2-40B4-BE49-F238E27FC236}">
-                <a16:creationId xmlns:a16="http://schemas.microsoft.com/office/drawing/2014/main" id="{FA21DBF4-7BA1-BFA9-637C-274C43628F37}"/>
-              </a:ext>
-            </a:extLst>
-          </p:cNvPr>
-          <p:cNvPicPr>
-            <a:picLocks noChangeAspect="1"/>
-          </p:cNvPicPr>
-          <p:nvPr/>
-        </p:nvPicPr>
-        <p:blipFill>
-          <a:blip r:embed="rId5"/>
-          <a:stretch>
-            <a:fillRect/>
-          </a:stretch>
-        </p:blipFill>
-        <p:spPr>
-          <a:xfrm>
-            <a:off x="11902386" y="-2090305"/>
-            <a:ext cx="3809539" cy="2031346"/>
-          </a:xfrm>
-          <a:prstGeom prst="rect">
-            <a:avLst/>
-          </a:prstGeom>
-        </p:spPr>
-      </p:pic>
-      <p:pic>
-        <p:nvPicPr>
-          <p:cNvPr id="14" name="Рисунок 13">
-            <a:extLst>
-              <a:ext uri="{FF2B5EF4-FFF2-40B4-BE49-F238E27FC236}">
-                <a16:creationId xmlns:a16="http://schemas.microsoft.com/office/drawing/2014/main" id="{5CAB06E2-E2E4-F56A-F697-B0CD6DBA771F}"/>
-              </a:ext>
-            </a:extLst>
-          </p:cNvPr>
-          <p:cNvPicPr>
-            <a:picLocks noChangeAspect="1"/>
-          </p:cNvPicPr>
-          <p:nvPr/>
-        </p:nvPicPr>
-        <p:blipFill>
-          <a:blip r:embed="rId6"/>
-          <a:stretch>
-            <a:fillRect/>
-          </a:stretch>
-        </p:blipFill>
-        <p:spPr>
-          <a:xfrm>
-            <a:off x="2568546" y="1066320"/>
-            <a:ext cx="5835011" cy="1781214"/>
-          </a:xfrm>
-          <a:prstGeom prst="rect">
-            <a:avLst/>
-          </a:prstGeom>
-        </p:spPr>
-      </p:pic>
-      <p:pic>
-        <p:nvPicPr>
-          <p:cNvPr id="16" name="Рисунок 15">
-            <a:extLst>
-              <a:ext uri="{FF2B5EF4-FFF2-40B4-BE49-F238E27FC236}">
-                <a16:creationId xmlns:a16="http://schemas.microsoft.com/office/drawing/2014/main" id="{2D29408F-1E2A-22C6-5260-D36DFD6E0D34}"/>
-              </a:ext>
-            </a:extLst>
-          </p:cNvPr>
-          <p:cNvPicPr>
-            <a:picLocks noChangeAspect="1"/>
-          </p:cNvPicPr>
-          <p:nvPr/>
-        </p:nvPicPr>
-        <p:blipFill>
-          <a:blip r:embed="rId7"/>
-          <a:stretch>
-            <a:fillRect/>
-          </a:stretch>
-        </p:blipFill>
-        <p:spPr>
-          <a:xfrm>
-            <a:off x="5486051" y="2939369"/>
-            <a:ext cx="5835011" cy="1898267"/>
-          </a:xfrm>
-          <a:prstGeom prst="rect">
-            <a:avLst/>
-          </a:prstGeom>
-        </p:spPr>
-      </p:pic>
-      <p:pic>
-        <p:nvPicPr>
-          <p:cNvPr id="18" name="Рисунок 17">
-            <a:extLst>
-              <a:ext uri="{FF2B5EF4-FFF2-40B4-BE49-F238E27FC236}">
-                <a16:creationId xmlns:a16="http://schemas.microsoft.com/office/drawing/2014/main" id="{743F5657-1A6F-F22E-8229-4D1E6262CFD1}"/>
-              </a:ext>
-            </a:extLst>
-          </p:cNvPr>
-          <p:cNvPicPr>
-            <a:picLocks noChangeAspect="1"/>
-          </p:cNvPicPr>
-          <p:nvPr/>
-        </p:nvPicPr>
-        <p:blipFill>
-          <a:blip r:embed="rId8"/>
-          <a:stretch>
-            <a:fillRect/>
-          </a:stretch>
-        </p:blipFill>
-        <p:spPr>
-          <a:xfrm>
-            <a:off x="-140444" y="-2421971"/>
-            <a:ext cx="3715016" cy="1608362"/>
-          </a:xfrm>
-          <a:prstGeom prst="rect">
-            <a:avLst/>
-          </a:prstGeom>
-        </p:spPr>
-      </p:pic>
-      <p:pic>
-        <p:nvPicPr>
-          <p:cNvPr id="20" name="Рисунок 19">
-            <a:extLst>
-              <a:ext uri="{FF2B5EF4-FFF2-40B4-BE49-F238E27FC236}">
-                <a16:creationId xmlns:a16="http://schemas.microsoft.com/office/drawing/2014/main" id="{7A0428BD-E447-B5F8-1109-D65ECA8749DC}"/>
-              </a:ext>
-            </a:extLst>
-          </p:cNvPr>
-          <p:cNvPicPr>
-            <a:picLocks noChangeAspect="1"/>
-          </p:cNvPicPr>
-          <p:nvPr/>
-        </p:nvPicPr>
-        <p:blipFill>
-          <a:blip r:embed="rId9"/>
-          <a:stretch>
-            <a:fillRect/>
-          </a:stretch>
-        </p:blipFill>
-        <p:spPr>
-          <a:xfrm>
-            <a:off x="2568546" y="4936003"/>
-            <a:ext cx="5338623" cy="1705715"/>
-          </a:xfrm>
-          <a:prstGeom prst="rect">
-            <a:avLst/>
-          </a:prstGeom>
-        </p:spPr>
-      </p:pic>
-      <p:pic>
-        <p:nvPicPr>
-          <p:cNvPr id="22" name="Рисунок 21">
-            <a:extLst>
-              <a:ext uri="{FF2B5EF4-FFF2-40B4-BE49-F238E27FC236}">
-                <a16:creationId xmlns:a16="http://schemas.microsoft.com/office/drawing/2014/main" id="{983672E9-5284-4CB8-765B-B524D5A90FA0}"/>
-              </a:ext>
-            </a:extLst>
-          </p:cNvPr>
-          <p:cNvPicPr>
-            <a:picLocks noChangeAspect="1"/>
-          </p:cNvPicPr>
-          <p:nvPr/>
-        </p:nvPicPr>
-        <p:blipFill>
-          <a:blip r:embed="rId10"/>
-          <a:stretch>
-            <a:fillRect/>
-          </a:stretch>
-        </p:blipFill>
-        <p:spPr>
-          <a:xfrm>
-            <a:off x="3884170" y="-2723628"/>
-            <a:ext cx="5657374" cy="2209203"/>
-          </a:xfrm>
-          <a:prstGeom prst="rect">
-            <a:avLst/>
-          </a:prstGeom>
-        </p:spPr>
-      </p:pic>
-      <mc:AlternateContent xmlns:mc="http://schemas.openxmlformats.org/markup-compatibility/2006">
-        <mc:Choice xmlns:p14="http://schemas.microsoft.com/office/powerpoint/2010/main" Requires="p14">
-          <p:contentPart p14:bwMode="auto" r:id="rId11">
-            <p14:nvContentPartPr>
-              <p14:cNvPr id="23" name="Рукописный ввод 22">
-                <a:extLst>
-                  <a:ext uri="{FF2B5EF4-FFF2-40B4-BE49-F238E27FC236}">
-                    <a16:creationId xmlns:a16="http://schemas.microsoft.com/office/drawing/2014/main" id="{D78124B8-FBE1-A6FF-933E-788401530C9C}"/>
-                  </a:ext>
-                </a:extLst>
-              </p14:cNvPr>
-              <p14:cNvContentPartPr/>
-              <p14:nvPr/>
-            </p14:nvContentPartPr>
-            <p14:xfrm>
-              <a:off x="11363646" y="6241240"/>
-              <a:ext cx="243000" cy="468000"/>
-            </p14:xfrm>
-          </p:contentPart>
-        </mc:Choice>
-        <mc:Fallback>
-          <p:pic>
-            <p:nvPicPr>
-              <p:cNvPr id="23" name="Рукописный ввод 22">
-                <a:extLst>
-                  <a:ext uri="{FF2B5EF4-FFF2-40B4-BE49-F238E27FC236}">
-                    <a16:creationId xmlns:a16="http://schemas.microsoft.com/office/drawing/2014/main" id="{D78124B8-FBE1-A6FF-933E-788401530C9C}"/>
-                  </a:ext>
-                </a:extLst>
-              </p:cNvPr>
-              <p:cNvPicPr/>
-              <p:nvPr/>
-            </p:nvPicPr>
-            <p:blipFill>
-              <a:blip r:embed="rId12"/>
-              <a:stretch>
-                <a:fillRect/>
-              </a:stretch>
-            </p:blipFill>
-            <p:spPr>
-              <a:xfrm>
-                <a:off x="11357526" y="6235120"/>
-                <a:ext cx="255240" cy="480240"/>
-              </a:xfrm>
-              <a:prstGeom prst="rect">
-                <a:avLst/>
-              </a:prstGeom>
-            </p:spPr>
-          </p:pic>
-        </mc:Fallback>
-      </mc:AlternateContent>
-    </p:spTree>
-    <p:extLst>
-      <p:ext uri="{BB962C8B-B14F-4D97-AF65-F5344CB8AC3E}">
-        <p14:creationId xmlns:p14="http://schemas.microsoft.com/office/powerpoint/2010/main" val="800678927"/>
-      </p:ext>
-    </p:extLst>
-  </p:cSld>
-  <p:clrMapOvr>
-    <a:masterClrMapping/>
-  </p:clrMapOvr>
-  <mc:AlternateContent xmlns:mc="http://schemas.openxmlformats.org/markup-compatibility/2006">
-    <mc:Choice xmlns:p159="http://schemas.microsoft.com/office/powerpoint/2015/09/main" Requires="p159">
-      <p:transition xmlns:p14="http://schemas.microsoft.com/office/powerpoint/2010/main" spd="slow" p14:dur="2000">
-        <p159:morph option="byObject"/>
-      </p:transition>
-    </mc:Choice>
-    <mc:Fallback>
-      <p:transition spd="slow">
-        <p:fade/>
-      </p:transition>
-    </mc:Fallback>
-  </mc:AlternateContent>
-</p:sld>
-</file>
-
-<file path=ppt/slides/slide5.xml><?xml version="1.0" encoding="utf-8"?>
-<p:sld xmlns:a="http://schemas.openxmlformats.org/drawingml/2006/main" xmlns:r="http://schemas.openxmlformats.org/officeDocument/2006/relationships" xmlns:p="http://schemas.openxmlformats.org/presentationml/2006/main">
-  <p:cSld>
-    <p:spTree>
-      <p:nvGrpSpPr>
-        <p:cNvPr id="1" name="">
-          <a:extLst>
-            <a:ext uri="{FF2B5EF4-FFF2-40B4-BE49-F238E27FC236}">
-              <a16:creationId xmlns:a16="http://schemas.microsoft.com/office/drawing/2014/main" id="{817C0A93-0BAA-A3C2-446B-2F2A2DE06EC0}"/>
-            </a:ext>
-          </a:extLst>
-        </p:cNvPr>
-        <p:cNvGrpSpPr/>
-        <p:nvPr/>
-      </p:nvGrpSpPr>
-      <p:grpSpPr>
-        <a:xfrm>
-          <a:off x="0" y="0"/>
-          <a:ext cx="0" cy="0"/>
-          <a:chOff x="0" y="0"/>
-          <a:chExt cx="0" cy="0"/>
-        </a:xfrm>
-      </p:grpSpPr>
-      <p:sp>
-        <p:nvSpPr>
-          <p:cNvPr id="6" name="Прямоугольник 5">
-            <a:extLst>
-              <a:ext uri="{FF2B5EF4-FFF2-40B4-BE49-F238E27FC236}">
-                <a16:creationId xmlns:a16="http://schemas.microsoft.com/office/drawing/2014/main" id="{C15D2AE5-FCCA-179C-00B8-83DF42EFAD9A}"/>
-              </a:ext>
-            </a:extLst>
-          </p:cNvPr>
-          <p:cNvSpPr/>
-          <p:nvPr/>
-        </p:nvSpPr>
-        <p:spPr>
-          <a:xfrm>
-            <a:off x="-2235200" y="0"/>
-            <a:ext cx="14427200" cy="6858000"/>
-          </a:xfrm>
-          <a:prstGeom prst="rect">
-            <a:avLst/>
-          </a:prstGeom>
-          <a:solidFill>
-            <a:srgbClr val="CCECFF"/>
-          </a:solidFill>
-        </p:spPr>
-        <p:style>
-          <a:lnRef idx="2">
-            <a:schemeClr val="accent1">
-              <a:shade val="15000"/>
-            </a:schemeClr>
-          </a:lnRef>
-          <a:fillRef idx="1">
-            <a:schemeClr val="accent1"/>
-          </a:fillRef>
-          <a:effectRef idx="0">
-            <a:schemeClr val="accent1"/>
-          </a:effectRef>
-          <a:fontRef idx="minor">
-            <a:schemeClr val="lt1"/>
-          </a:fontRef>
-        </p:style>
-        <p:txBody>
-          <a:bodyPr rtlCol="0" anchor="ctr"/>
-          <a:lstStyle/>
-          <a:p>
-            <a:pPr algn="ctr"/>
-            <a:endParaRPr lang="ru-RU"/>
-          </a:p>
-        </p:txBody>
-      </p:sp>
-      <p:sp>
-        <p:nvSpPr>
-          <p:cNvPr id="7" name="Прямоугольник 6">
-            <a:extLst>
-              <a:ext uri="{FF2B5EF4-FFF2-40B4-BE49-F238E27FC236}">
-                <a16:creationId xmlns:a16="http://schemas.microsoft.com/office/drawing/2014/main" id="{2AC9087C-9ABE-BE43-8BC2-B38A770C76E6}"/>
-              </a:ext>
-            </a:extLst>
-          </p:cNvPr>
-          <p:cNvSpPr/>
-          <p:nvPr/>
-        </p:nvSpPr>
-        <p:spPr>
-          <a:xfrm>
-            <a:off x="-3451101" y="0"/>
-            <a:ext cx="15643101" cy="6858000"/>
-          </a:xfrm>
-          <a:prstGeom prst="rect">
-            <a:avLst/>
-          </a:prstGeom>
-          <a:solidFill>
-            <a:srgbClr val="99CCFF"/>
-          </a:solidFill>
-        </p:spPr>
-        <p:style>
-          <a:lnRef idx="2">
-            <a:schemeClr val="accent1">
-              <a:shade val="15000"/>
-            </a:schemeClr>
-          </a:lnRef>
-          <a:fillRef idx="1">
-            <a:schemeClr val="accent1"/>
-          </a:fillRef>
-          <a:effectRef idx="0">
-            <a:schemeClr val="accent1"/>
-          </a:effectRef>
-          <a:fontRef idx="minor">
-            <a:schemeClr val="lt1"/>
-          </a:fontRef>
-        </p:style>
-        <p:txBody>
-          <a:bodyPr rtlCol="0" anchor="ctr"/>
-          <a:lstStyle/>
-          <a:p>
-            <a:pPr algn="ctr"/>
-            <a:endParaRPr lang="ru-RU"/>
-          </a:p>
-        </p:txBody>
-      </p:sp>
-      <p:sp>
-        <p:nvSpPr>
-          <p:cNvPr id="8" name="Прямоугольник 7">
-            <a:extLst>
-              <a:ext uri="{FF2B5EF4-FFF2-40B4-BE49-F238E27FC236}">
-                <a16:creationId xmlns:a16="http://schemas.microsoft.com/office/drawing/2014/main" id="{4C971EBF-3B8C-5DDA-5FF9-DAFDCC63B5CB}"/>
-              </a:ext>
-            </a:extLst>
-          </p:cNvPr>
-          <p:cNvSpPr/>
-          <p:nvPr/>
-        </p:nvSpPr>
-        <p:spPr>
-          <a:xfrm>
-            <a:off x="-4207824" y="0"/>
-            <a:ext cx="16399824" cy="6858000"/>
-          </a:xfrm>
-          <a:prstGeom prst="rect">
-            <a:avLst/>
-          </a:prstGeom>
-          <a:solidFill>
-            <a:srgbClr val="66CCFF"/>
-          </a:solidFill>
-        </p:spPr>
-        <p:style>
-          <a:lnRef idx="2">
-            <a:schemeClr val="accent1">
-              <a:shade val="15000"/>
-            </a:schemeClr>
-          </a:lnRef>
-          <a:fillRef idx="1">
-            <a:schemeClr val="accent1"/>
-          </a:fillRef>
-          <a:effectRef idx="0">
-            <a:schemeClr val="accent1"/>
-          </a:effectRef>
-          <a:fontRef idx="minor">
-            <a:schemeClr val="lt1"/>
-          </a:fontRef>
-        </p:style>
-        <p:txBody>
-          <a:bodyPr rtlCol="0" anchor="ctr"/>
-          <a:lstStyle/>
-          <a:p>
-            <a:pPr algn="ctr"/>
-            <a:endParaRPr lang="ru-RU"/>
-          </a:p>
-        </p:txBody>
-      </p:sp>
-      <p:sp>
-        <p:nvSpPr>
-          <p:cNvPr id="9" name="Прямоугольник 8">
-            <a:extLst>
-              <a:ext uri="{FF2B5EF4-FFF2-40B4-BE49-F238E27FC236}">
-                <a16:creationId xmlns:a16="http://schemas.microsoft.com/office/drawing/2014/main" id="{5A855681-C060-A96C-3C44-A3CB67FEC8DA}"/>
-              </a:ext>
-            </a:extLst>
-          </p:cNvPr>
-          <p:cNvSpPr/>
-          <p:nvPr/>
-        </p:nvSpPr>
-        <p:spPr>
-          <a:xfrm>
-            <a:off x="-4964547" y="0"/>
-            <a:ext cx="6555179" cy="6858000"/>
-          </a:xfrm>
-          <a:prstGeom prst="rect">
-            <a:avLst/>
-          </a:prstGeom>
-          <a:solidFill>
-            <a:srgbClr val="3399FF"/>
-          </a:solidFill>
-        </p:spPr>
-        <p:style>
-          <a:lnRef idx="2">
-            <a:schemeClr val="accent1">
-              <a:shade val="15000"/>
-            </a:schemeClr>
-          </a:lnRef>
-          <a:fillRef idx="1">
-            <a:schemeClr val="accent1"/>
-          </a:fillRef>
-          <a:effectRef idx="0">
-            <a:schemeClr val="accent1"/>
-          </a:effectRef>
-          <a:fontRef idx="minor">
-            <a:schemeClr val="lt1"/>
-          </a:fontRef>
-        </p:style>
-        <p:txBody>
-          <a:bodyPr rtlCol="0" anchor="ctr"/>
-          <a:lstStyle/>
-          <a:p>
-            <a:pPr algn="ctr"/>
-            <a:endParaRPr lang="ru-RU"/>
-          </a:p>
-        </p:txBody>
-      </p:sp>
-      <p:sp>
-        <p:nvSpPr>
-          <p:cNvPr id="10" name="Прямоугольник 9">
-            <a:extLst>
-              <a:ext uri="{FF2B5EF4-FFF2-40B4-BE49-F238E27FC236}">
-                <a16:creationId xmlns:a16="http://schemas.microsoft.com/office/drawing/2014/main" id="{C8482234-0718-400F-7E17-120687F586E8}"/>
-              </a:ext>
-            </a:extLst>
-          </p:cNvPr>
-          <p:cNvSpPr/>
-          <p:nvPr/>
-        </p:nvSpPr>
-        <p:spPr>
-          <a:xfrm>
-            <a:off x="-5742378" y="0"/>
-            <a:ext cx="6555179" cy="6858000"/>
-          </a:xfrm>
-          <a:prstGeom prst="rect">
-            <a:avLst/>
-          </a:prstGeom>
-          <a:solidFill>
-            <a:srgbClr val="0066FF"/>
-          </a:solidFill>
-        </p:spPr>
-        <p:style>
-          <a:lnRef idx="2">
-            <a:schemeClr val="accent1">
-              <a:shade val="15000"/>
-            </a:schemeClr>
-          </a:lnRef>
-          <a:fillRef idx="1">
-            <a:schemeClr val="accent1"/>
-          </a:fillRef>
-          <a:effectRef idx="0">
-            <a:schemeClr val="accent1"/>
-          </a:effectRef>
-          <a:fontRef idx="minor">
-            <a:schemeClr val="lt1"/>
-          </a:fontRef>
-        </p:style>
-        <p:txBody>
-          <a:bodyPr rtlCol="0" anchor="ctr"/>
-          <a:lstStyle/>
-          <a:p>
-            <a:pPr algn="ctr"/>
-            <a:endParaRPr lang="ru-RU"/>
-          </a:p>
-        </p:txBody>
-      </p:sp>
-      <p:sp>
-        <p:nvSpPr>
-          <p:cNvPr id="3" name="TextBox 2">
-            <a:extLst>
-              <a:ext uri="{FF2B5EF4-FFF2-40B4-BE49-F238E27FC236}">
-                <a16:creationId xmlns:a16="http://schemas.microsoft.com/office/drawing/2014/main" id="{8F5FC7C3-F587-20C3-E89A-CCB97B5FB8F0}"/>
-              </a:ext>
-            </a:extLst>
-          </p:cNvPr>
-          <p:cNvSpPr txBox="1"/>
-          <p:nvPr/>
-        </p:nvSpPr>
-        <p:spPr>
-          <a:xfrm>
-            <a:off x="4370449" y="266125"/>
-            <a:ext cx="6555179" cy="584775"/>
-          </a:xfrm>
-          <a:prstGeom prst="rect">
-            <a:avLst/>
-          </a:prstGeom>
-          <a:noFill/>
-        </p:spPr>
-        <p:txBody>
-          <a:bodyPr wrap="square" rtlCol="0">
-            <a:spAutoFit/>
-          </a:bodyPr>
-          <a:lstStyle/>
-          <a:p>
-            <a:r>
-              <a:rPr lang="ru-RU" sz="3200" b="1" dirty="0">
-                <a:latin typeface="Bahnschrift" panose="020B0502040204020203" pitchFamily="34" charset="0"/>
-              </a:rPr>
-              <a:t>Скриншоты веб-страниц</a:t>
-            </a:r>
-          </a:p>
-        </p:txBody>
-      </p:sp>
-      <mc:AlternateContent xmlns:mc="http://schemas.openxmlformats.org/markup-compatibility/2006">
-        <mc:Choice xmlns:p14="http://schemas.microsoft.com/office/powerpoint/2010/main" Requires="p14">
-          <p:contentPart p14:bwMode="auto" r:id="rId2">
-            <p14:nvContentPartPr>
-              <p14:cNvPr id="2" name="Рукописный ввод 1">
-                <a:extLst>
-                  <a:ext uri="{FF2B5EF4-FFF2-40B4-BE49-F238E27FC236}">
-                    <a16:creationId xmlns:a16="http://schemas.microsoft.com/office/drawing/2014/main" id="{49ADCA12-CD45-2446-994E-87482B599485}"/>
-                  </a:ext>
-                </a:extLst>
-              </p14:cNvPr>
-              <p14:cNvContentPartPr/>
-              <p14:nvPr/>
-            </p14:nvContentPartPr>
-            <p14:xfrm>
-              <a:off x="5867280" y="3961980"/>
-              <a:ext cx="360" cy="360"/>
-            </p14:xfrm>
-          </p:contentPart>
-        </mc:Choice>
-        <mc:Fallback>
-          <p:pic>
-            <p:nvPicPr>
-              <p:cNvPr id="2" name="Рукописный ввод 1">
-                <a:extLst>
-                  <a:ext uri="{FF2B5EF4-FFF2-40B4-BE49-F238E27FC236}">
-                    <a16:creationId xmlns:a16="http://schemas.microsoft.com/office/drawing/2014/main" id="{49ADCA12-CD45-2446-994E-87482B599485}"/>
-                  </a:ext>
-                </a:extLst>
-              </p:cNvPr>
-              <p:cNvPicPr/>
-              <p:nvPr/>
-            </p:nvPicPr>
-            <p:blipFill>
-              <a:blip r:embed="rId3"/>
-              <a:stretch>
-                <a:fillRect/>
-              </a:stretch>
-            </p:blipFill>
-            <p:spPr>
-              <a:xfrm>
-                <a:off x="5861160" y="3955860"/>
-                <a:ext cx="12600" cy="12600"/>
-              </a:xfrm>
-              <a:prstGeom prst="rect">
-                <a:avLst/>
-              </a:prstGeom>
-            </p:spPr>
-          </p:pic>
-        </mc:Fallback>
-      </mc:AlternateContent>
-      <p:pic>
-        <p:nvPicPr>
-          <p:cNvPr id="12" name="Рисунок 11">
-            <a:extLst>
-              <a:ext uri="{FF2B5EF4-FFF2-40B4-BE49-F238E27FC236}">
-                <a16:creationId xmlns:a16="http://schemas.microsoft.com/office/drawing/2014/main" id="{BA5A0B49-5354-9A23-38B3-B42AED9CC70B}"/>
-              </a:ext>
-            </a:extLst>
-          </p:cNvPr>
-          <p:cNvPicPr>
-            <a:picLocks noChangeAspect="1"/>
-          </p:cNvPicPr>
-          <p:nvPr/>
-        </p:nvPicPr>
-        <p:blipFill>
-          <a:blip r:embed="rId4"/>
-          <a:stretch>
-            <a:fillRect/>
-          </a:stretch>
-        </p:blipFill>
-        <p:spPr>
-          <a:xfrm>
-            <a:off x="3848330" y="865034"/>
-            <a:ext cx="5807265" cy="3096586"/>
-          </a:xfrm>
-          <a:prstGeom prst="rect">
-            <a:avLst/>
-          </a:prstGeom>
-        </p:spPr>
-      </p:pic>
-      <p:pic>
-        <p:nvPicPr>
-          <p:cNvPr id="14" name="Рисунок 13">
-            <a:extLst>
-              <a:ext uri="{FF2B5EF4-FFF2-40B4-BE49-F238E27FC236}">
-                <a16:creationId xmlns:a16="http://schemas.microsoft.com/office/drawing/2014/main" id="{91489ABD-1888-E3EE-2AD7-03BDC5D5B708}"/>
-              </a:ext>
-            </a:extLst>
-          </p:cNvPr>
-          <p:cNvPicPr>
-            <a:picLocks noChangeAspect="1"/>
-          </p:cNvPicPr>
-          <p:nvPr/>
-        </p:nvPicPr>
-        <p:blipFill>
-          <a:blip r:embed="rId5"/>
-          <a:stretch>
-            <a:fillRect/>
-          </a:stretch>
-        </p:blipFill>
-        <p:spPr>
-          <a:xfrm>
-            <a:off x="-12355220" y="979027"/>
-            <a:ext cx="5835011" cy="1781214"/>
-          </a:xfrm>
-          <a:prstGeom prst="rect">
-            <a:avLst/>
-          </a:prstGeom>
-        </p:spPr>
-      </p:pic>
-      <p:pic>
-        <p:nvPicPr>
-          <p:cNvPr id="16" name="Рисунок 15">
-            <a:extLst>
-              <a:ext uri="{FF2B5EF4-FFF2-40B4-BE49-F238E27FC236}">
-                <a16:creationId xmlns:a16="http://schemas.microsoft.com/office/drawing/2014/main" id="{500F2207-2A84-5896-C3A2-B189D61D4053}"/>
-              </a:ext>
-            </a:extLst>
-          </p:cNvPr>
-          <p:cNvPicPr>
-            <a:picLocks noChangeAspect="1"/>
-          </p:cNvPicPr>
-          <p:nvPr/>
-        </p:nvPicPr>
-        <p:blipFill>
-          <a:blip r:embed="rId6"/>
-          <a:stretch>
-            <a:fillRect/>
-          </a:stretch>
-        </p:blipFill>
-        <p:spPr>
-          <a:xfrm>
-            <a:off x="15049151" y="3037736"/>
-            <a:ext cx="5835011" cy="1898267"/>
-          </a:xfrm>
-          <a:prstGeom prst="rect">
-            <a:avLst/>
-          </a:prstGeom>
-        </p:spPr>
-      </p:pic>
-      <p:pic>
-        <p:nvPicPr>
-          <p:cNvPr id="18" name="Рисунок 17">
-            <a:extLst>
-              <a:ext uri="{FF2B5EF4-FFF2-40B4-BE49-F238E27FC236}">
-                <a16:creationId xmlns:a16="http://schemas.microsoft.com/office/drawing/2014/main" id="{89353B5C-003F-76F7-DCC0-FC127AEC6266}"/>
-              </a:ext>
-            </a:extLst>
-          </p:cNvPr>
-          <p:cNvPicPr>
-            <a:picLocks noChangeAspect="1"/>
-          </p:cNvPicPr>
-          <p:nvPr/>
-        </p:nvPicPr>
-        <p:blipFill>
-          <a:blip r:embed="rId7"/>
-          <a:stretch>
-            <a:fillRect/>
-          </a:stretch>
-        </p:blipFill>
-        <p:spPr>
-          <a:xfrm>
-            <a:off x="2347355" y="4100477"/>
-            <a:ext cx="4010268" cy="2193669"/>
-          </a:xfrm>
-          <a:prstGeom prst="rect">
-            <a:avLst/>
-          </a:prstGeom>
-        </p:spPr>
-      </p:pic>
-      <p:pic>
-        <p:nvPicPr>
-          <p:cNvPr id="20" name="Рисунок 19">
-            <a:extLst>
-              <a:ext uri="{FF2B5EF4-FFF2-40B4-BE49-F238E27FC236}">
-                <a16:creationId xmlns:a16="http://schemas.microsoft.com/office/drawing/2014/main" id="{1E145C0A-89EB-A4BA-F4EF-3F9456BA1686}"/>
-              </a:ext>
-            </a:extLst>
-          </p:cNvPr>
-          <p:cNvPicPr>
-            <a:picLocks noChangeAspect="1"/>
-          </p:cNvPicPr>
-          <p:nvPr/>
-        </p:nvPicPr>
-        <p:blipFill>
-          <a:blip r:embed="rId8"/>
-          <a:stretch>
-            <a:fillRect/>
-          </a:stretch>
-        </p:blipFill>
-        <p:spPr>
-          <a:xfrm>
-            <a:off x="-12066986" y="4936003"/>
-            <a:ext cx="5338623" cy="1705715"/>
-          </a:xfrm>
-          <a:prstGeom prst="rect">
-            <a:avLst/>
-          </a:prstGeom>
-        </p:spPr>
-      </p:pic>
-      <p:pic>
-        <p:nvPicPr>
-          <p:cNvPr id="22" name="Рисунок 21">
-            <a:extLst>
-              <a:ext uri="{FF2B5EF4-FFF2-40B4-BE49-F238E27FC236}">
-                <a16:creationId xmlns:a16="http://schemas.microsoft.com/office/drawing/2014/main" id="{133D5C28-A7D5-56BC-9967-644F74B0A495}"/>
-              </a:ext>
-            </a:extLst>
-          </p:cNvPr>
-          <p:cNvPicPr>
-            <a:picLocks noChangeAspect="1"/>
-          </p:cNvPicPr>
-          <p:nvPr/>
-        </p:nvPicPr>
-        <p:blipFill>
-          <a:blip r:embed="rId9"/>
-          <a:stretch>
-            <a:fillRect/>
-          </a:stretch>
-        </p:blipFill>
-        <p:spPr>
-          <a:xfrm>
-            <a:off x="7114345" y="4091608"/>
-            <a:ext cx="4455673" cy="2202537"/>
-          </a:xfrm>
-          <a:prstGeom prst="rect">
-            <a:avLst/>
-          </a:prstGeom>
-        </p:spPr>
-      </p:pic>
-      <p:grpSp>
-        <p:nvGrpSpPr>
-          <p:cNvPr id="13" name="Группа 12">
-            <a:extLst>
-              <a:ext uri="{FF2B5EF4-FFF2-40B4-BE49-F238E27FC236}">
-                <a16:creationId xmlns:a16="http://schemas.microsoft.com/office/drawing/2014/main" id="{7A5573B1-12FF-8EBE-36B4-BBC7257287E0}"/>
-              </a:ext>
-            </a:extLst>
-          </p:cNvPr>
-          <p:cNvGrpSpPr/>
-          <p:nvPr/>
-        </p:nvGrpSpPr>
-        <p:grpSpPr>
-          <a:xfrm>
-            <a:off x="11496720" y="6141870"/>
-            <a:ext cx="453960" cy="511560"/>
-            <a:chOff x="11496720" y="6141870"/>
-            <a:chExt cx="453960" cy="511560"/>
-          </a:xfrm>
-        </p:grpSpPr>
-        <mc:AlternateContent xmlns:mc="http://schemas.openxmlformats.org/markup-compatibility/2006">
-          <mc:Choice xmlns:p14="http://schemas.microsoft.com/office/powerpoint/2010/main" Requires="p14">
-            <p:contentPart p14:bwMode="auto" r:id="rId10">
-              <p14:nvContentPartPr>
-                <p14:cNvPr id="4" name="Рукописный ввод 3">
-                  <a:extLst>
-                    <a:ext uri="{FF2B5EF4-FFF2-40B4-BE49-F238E27FC236}">
-                      <a16:creationId xmlns:a16="http://schemas.microsoft.com/office/drawing/2014/main" id="{BC5DCCCC-8988-213B-D538-50EB811995EF}"/>
-                    </a:ext>
-                  </a:extLst>
-                </p14:cNvPr>
-                <p14:cNvContentPartPr/>
-                <p14:nvPr/>
-              </p14:nvContentPartPr>
-              <p14:xfrm>
-                <a:off x="11496720" y="6209910"/>
-                <a:ext cx="300600" cy="443520"/>
-              </p14:xfrm>
-            </p:contentPart>
-          </mc:Choice>
-          <mc:Fallback>
-            <p:pic>
-              <p:nvPicPr>
-                <p:cNvPr id="4" name="Рукописный ввод 3">
-                  <a:extLst>
-                    <a:ext uri="{FF2B5EF4-FFF2-40B4-BE49-F238E27FC236}">
-                      <a16:creationId xmlns:a16="http://schemas.microsoft.com/office/drawing/2014/main" id="{BC5DCCCC-8988-213B-D538-50EB811995EF}"/>
-                    </a:ext>
-                  </a:extLst>
-                </p:cNvPr>
-                <p:cNvPicPr/>
-                <p:nvPr/>
-              </p:nvPicPr>
-              <p:blipFill>
-                <a:blip r:embed="rId11"/>
-                <a:stretch>
-                  <a:fillRect/>
-                </a:stretch>
-              </p:blipFill>
-              <p:spPr>
-                <a:xfrm>
-                  <a:off x="11490600" y="6203790"/>
-                  <a:ext cx="312840" cy="455760"/>
-                </a:xfrm>
-                <a:prstGeom prst="rect">
-                  <a:avLst/>
-                </a:prstGeom>
-              </p:spPr>
-            </p:pic>
-          </mc:Fallback>
-        </mc:AlternateContent>
-        <mc:AlternateContent xmlns:mc="http://schemas.openxmlformats.org/markup-compatibility/2006">
-          <mc:Choice xmlns:p14="http://schemas.microsoft.com/office/powerpoint/2010/main" Requires="p14">
-            <p:contentPart p14:bwMode="auto" r:id="rId12">
-              <p14:nvContentPartPr>
-                <p14:cNvPr id="11" name="Рукописный ввод 10">
-                  <a:extLst>
-                    <a:ext uri="{FF2B5EF4-FFF2-40B4-BE49-F238E27FC236}">
-                      <a16:creationId xmlns:a16="http://schemas.microsoft.com/office/drawing/2014/main" id="{5A3AF7BE-64B8-CA77-D74C-DF7061CB8E38}"/>
-                    </a:ext>
-                  </a:extLst>
-                </p14:cNvPr>
-                <p14:cNvContentPartPr/>
-                <p14:nvPr/>
-              </p14:nvContentPartPr>
-              <p14:xfrm>
-                <a:off x="11734320" y="6141870"/>
-                <a:ext cx="216360" cy="68400"/>
-              </p14:xfrm>
-            </p:contentPart>
-          </mc:Choice>
-          <mc:Fallback>
-            <p:pic>
-              <p:nvPicPr>
-                <p:cNvPr id="11" name="Рукописный ввод 10">
-                  <a:extLst>
-                    <a:ext uri="{FF2B5EF4-FFF2-40B4-BE49-F238E27FC236}">
-                      <a16:creationId xmlns:a16="http://schemas.microsoft.com/office/drawing/2014/main" id="{5A3AF7BE-64B8-CA77-D74C-DF7061CB8E38}"/>
-                    </a:ext>
-                  </a:extLst>
-                </p:cNvPr>
-                <p:cNvPicPr/>
-                <p:nvPr/>
-              </p:nvPicPr>
-              <p:blipFill>
-                <a:blip r:embed="rId13"/>
-                <a:stretch>
-                  <a:fillRect/>
-                </a:stretch>
-              </p:blipFill>
-              <p:spPr>
-                <a:xfrm>
-                  <a:off x="11728200" y="6135750"/>
-                  <a:ext cx="228600" cy="80640"/>
-                </a:xfrm>
-                <a:prstGeom prst="rect">
-                  <a:avLst/>
-                </a:prstGeom>
-              </p:spPr>
-            </p:pic>
-          </mc:Fallback>
-        </mc:AlternateContent>
-      </p:grpSp>
-    </p:spTree>
-    <p:extLst>
-      <p:ext uri="{BB962C8B-B14F-4D97-AF65-F5344CB8AC3E}">
-        <p14:creationId xmlns:p14="http://schemas.microsoft.com/office/powerpoint/2010/main" val="1183806610"/>
-      </p:ext>
-    </p:extLst>
-  </p:cSld>
-  <p:clrMapOvr>
-    <a:masterClrMapping/>
-  </p:clrMapOvr>
-  <mc:AlternateContent xmlns:mc="http://schemas.openxmlformats.org/markup-compatibility/2006">
-    <mc:Choice xmlns:p159="http://schemas.microsoft.com/office/powerpoint/2015/09/main" Requires="p159">
-      <p:transition xmlns:p14="http://schemas.microsoft.com/office/powerpoint/2010/main" spd="slow" p14:dur="2000">
-        <p159:morph option="byObject"/>
-      </p:transition>
-    </mc:Choice>
-    <mc:Fallback>
-      <p:transition spd="slow">
-        <p:fade/>
-      </p:transition>
-    </mc:Fallback>
-  </mc:AlternateContent>
-</p:sld>
-</file>
-
-<file path=ppt/slides/slide6.xml><?xml version="1.0" encoding="utf-8"?>
-<p:sld xmlns:a="http://schemas.openxmlformats.org/drawingml/2006/main" xmlns:r="http://schemas.openxmlformats.org/officeDocument/2006/relationships" xmlns:p="http://schemas.openxmlformats.org/presentationml/2006/main">
-  <p:cSld>
-    <p:spTree>
-      <p:nvGrpSpPr>
-        <p:cNvPr id="1" name="">
-          <a:extLst>
-            <a:ext uri="{FF2B5EF4-FFF2-40B4-BE49-F238E27FC236}">
-              <a16:creationId xmlns:a16="http://schemas.microsoft.com/office/drawing/2014/main" id="{193031E2-C683-AACF-5102-68BD31D4C07E}"/>
-            </a:ext>
-          </a:extLst>
-        </p:cNvPr>
-        <p:cNvGrpSpPr/>
-        <p:nvPr/>
-      </p:nvGrpSpPr>
-      <p:grpSpPr>
-        <a:xfrm>
-          <a:off x="0" y="0"/>
-          <a:ext cx="0" cy="0"/>
-          <a:chOff x="0" y="0"/>
-          <a:chExt cx="0" cy="0"/>
-        </a:xfrm>
-      </p:grpSpPr>
-      <p:sp>
-        <p:nvSpPr>
-          <p:cNvPr id="6" name="Прямоугольник 5">
-            <a:extLst>
-              <a:ext uri="{FF2B5EF4-FFF2-40B4-BE49-F238E27FC236}">
-                <a16:creationId xmlns:a16="http://schemas.microsoft.com/office/drawing/2014/main" id="{4003FF7B-5073-1D1B-C8DF-1A6BA25189DF}"/>
-              </a:ext>
-            </a:extLst>
-          </p:cNvPr>
-          <p:cNvSpPr/>
-          <p:nvPr/>
-        </p:nvSpPr>
-        <p:spPr>
-          <a:xfrm>
-            <a:off x="-2235200" y="0"/>
-            <a:ext cx="14427200" cy="6858000"/>
-          </a:xfrm>
-          <a:prstGeom prst="rect">
-            <a:avLst/>
-          </a:prstGeom>
-          <a:solidFill>
-            <a:srgbClr val="CCECFF"/>
-          </a:solidFill>
-        </p:spPr>
-        <p:style>
-          <a:lnRef idx="2">
-            <a:schemeClr val="accent1">
-              <a:shade val="15000"/>
-            </a:schemeClr>
-          </a:lnRef>
-          <a:fillRef idx="1">
-            <a:schemeClr val="accent1"/>
-          </a:fillRef>
-          <a:effectRef idx="0">
-            <a:schemeClr val="accent1"/>
-          </a:effectRef>
-          <a:fontRef idx="minor">
-            <a:schemeClr val="lt1"/>
-          </a:fontRef>
-        </p:style>
-        <p:txBody>
-          <a:bodyPr rtlCol="0" anchor="ctr"/>
-          <a:lstStyle/>
-          <a:p>
-            <a:pPr algn="ctr"/>
-            <a:endParaRPr lang="ru-RU"/>
-          </a:p>
-        </p:txBody>
-      </p:sp>
-      <p:sp>
-        <p:nvSpPr>
-          <p:cNvPr id="7" name="Прямоугольник 6">
-            <a:extLst>
-              <a:ext uri="{FF2B5EF4-FFF2-40B4-BE49-F238E27FC236}">
-                <a16:creationId xmlns:a16="http://schemas.microsoft.com/office/drawing/2014/main" id="{50C1DB9E-39D0-9C1A-C4D2-AC3CA2150853}"/>
-              </a:ext>
-            </a:extLst>
-          </p:cNvPr>
-          <p:cNvSpPr/>
-          <p:nvPr/>
-        </p:nvSpPr>
-        <p:spPr>
-          <a:xfrm>
-            <a:off x="-3451101" y="0"/>
-            <a:ext cx="15643101" cy="6858000"/>
-          </a:xfrm>
-          <a:prstGeom prst="rect">
-            <a:avLst/>
-          </a:prstGeom>
-          <a:solidFill>
-            <a:srgbClr val="99CCFF"/>
-          </a:solidFill>
-        </p:spPr>
-        <p:style>
-          <a:lnRef idx="2">
-            <a:schemeClr val="accent1">
-              <a:shade val="15000"/>
-            </a:schemeClr>
-          </a:lnRef>
-          <a:fillRef idx="1">
-            <a:schemeClr val="accent1"/>
-          </a:fillRef>
-          <a:effectRef idx="0">
-            <a:schemeClr val="accent1"/>
-          </a:effectRef>
-          <a:fontRef idx="minor">
-            <a:schemeClr val="lt1"/>
-          </a:fontRef>
-        </p:style>
-        <p:txBody>
-          <a:bodyPr rtlCol="0" anchor="ctr"/>
-          <a:lstStyle/>
-          <a:p>
-            <a:pPr algn="ctr"/>
-            <a:endParaRPr lang="ru-RU"/>
-          </a:p>
-        </p:txBody>
-      </p:sp>
-      <p:sp>
-        <p:nvSpPr>
-          <p:cNvPr id="8" name="Прямоугольник 7">
-            <a:extLst>
-              <a:ext uri="{FF2B5EF4-FFF2-40B4-BE49-F238E27FC236}">
-                <a16:creationId xmlns:a16="http://schemas.microsoft.com/office/drawing/2014/main" id="{3752E8E7-CAC2-E479-D364-32AD9128E508}"/>
-              </a:ext>
-            </a:extLst>
-          </p:cNvPr>
-          <p:cNvSpPr/>
-          <p:nvPr/>
-        </p:nvSpPr>
-        <p:spPr>
-          <a:xfrm>
-            <a:off x="-4207824" y="0"/>
-            <a:ext cx="16399824" cy="6858000"/>
-          </a:xfrm>
-          <a:prstGeom prst="rect">
-            <a:avLst/>
-          </a:prstGeom>
-          <a:solidFill>
-            <a:srgbClr val="66CCFF"/>
-          </a:solidFill>
-        </p:spPr>
-        <p:style>
-          <a:lnRef idx="2">
-            <a:schemeClr val="accent1">
-              <a:shade val="15000"/>
-            </a:schemeClr>
-          </a:lnRef>
-          <a:fillRef idx="1">
-            <a:schemeClr val="accent1"/>
-          </a:fillRef>
-          <a:effectRef idx="0">
-            <a:schemeClr val="accent1"/>
-          </a:effectRef>
-          <a:fontRef idx="minor">
-            <a:schemeClr val="lt1"/>
-          </a:fontRef>
-        </p:style>
-        <p:txBody>
-          <a:bodyPr rtlCol="0" anchor="ctr"/>
-          <a:lstStyle/>
-          <a:p>
-            <a:pPr algn="ctr"/>
-            <a:endParaRPr lang="ru-RU"/>
-          </a:p>
-        </p:txBody>
-      </p:sp>
-      <p:sp>
-        <p:nvSpPr>
-          <p:cNvPr id="9" name="Прямоугольник 8">
-            <a:extLst>
-              <a:ext uri="{FF2B5EF4-FFF2-40B4-BE49-F238E27FC236}">
-                <a16:creationId xmlns:a16="http://schemas.microsoft.com/office/drawing/2014/main" id="{7F4597F5-8BE7-C0F4-1511-D2E8DC04233B}"/>
-              </a:ext>
-            </a:extLst>
-          </p:cNvPr>
-          <p:cNvSpPr/>
-          <p:nvPr/>
-        </p:nvSpPr>
-        <p:spPr>
-          <a:xfrm>
-            <a:off x="-4964547" y="0"/>
-            <a:ext cx="17156547" cy="6858000"/>
-          </a:xfrm>
-          <a:prstGeom prst="rect">
-            <a:avLst/>
-          </a:prstGeom>
-          <a:solidFill>
-            <a:srgbClr val="3399FF"/>
-          </a:solidFill>
-        </p:spPr>
-        <p:style>
-          <a:lnRef idx="2">
-            <a:schemeClr val="accent1">
-              <a:shade val="15000"/>
-            </a:schemeClr>
-          </a:lnRef>
-          <a:fillRef idx="1">
-            <a:schemeClr val="accent1"/>
-          </a:fillRef>
-          <a:effectRef idx="0">
-            <a:schemeClr val="accent1"/>
-          </a:effectRef>
-          <a:fontRef idx="minor">
-            <a:schemeClr val="lt1"/>
-          </a:fontRef>
-        </p:style>
-        <p:txBody>
-          <a:bodyPr rtlCol="0" anchor="ctr"/>
-          <a:lstStyle/>
-          <a:p>
-            <a:pPr algn="ctr"/>
-            <a:endParaRPr lang="ru-RU"/>
-          </a:p>
-        </p:txBody>
-      </p:sp>
-      <p:sp>
-        <p:nvSpPr>
-          <p:cNvPr id="10" name="Прямоугольник 9">
-            <a:extLst>
-              <a:ext uri="{FF2B5EF4-FFF2-40B4-BE49-F238E27FC236}">
-                <a16:creationId xmlns:a16="http://schemas.microsoft.com/office/drawing/2014/main" id="{96F78269-526C-4D7A-B5DC-AF20C9237813}"/>
-              </a:ext>
-            </a:extLst>
-          </p:cNvPr>
-          <p:cNvSpPr/>
-          <p:nvPr/>
-        </p:nvSpPr>
-        <p:spPr>
-          <a:xfrm>
-            <a:off x="-5742378" y="0"/>
-            <a:ext cx="6555179" cy="6858000"/>
-          </a:xfrm>
-          <a:prstGeom prst="rect">
-            <a:avLst/>
-          </a:prstGeom>
-          <a:solidFill>
-            <a:srgbClr val="0066FF"/>
-          </a:solidFill>
-        </p:spPr>
-        <p:style>
-          <a:lnRef idx="2">
-            <a:schemeClr val="accent1">
-              <a:shade val="15000"/>
-            </a:schemeClr>
-          </a:lnRef>
-          <a:fillRef idx="1">
-            <a:schemeClr val="accent1"/>
-          </a:fillRef>
-          <a:effectRef idx="0">
-            <a:schemeClr val="accent1"/>
-          </a:effectRef>
-          <a:fontRef idx="minor">
-            <a:schemeClr val="lt1"/>
-          </a:fontRef>
-        </p:style>
-        <p:txBody>
-          <a:bodyPr rtlCol="0" anchor="ctr"/>
-          <a:lstStyle/>
-          <a:p>
-            <a:pPr algn="ctr"/>
-            <a:endParaRPr lang="ru-RU"/>
-          </a:p>
-        </p:txBody>
-      </p:sp>
-      <p:sp>
-        <p:nvSpPr>
-          <p:cNvPr id="3" name="TextBox 2">
-            <a:extLst>
-              <a:ext uri="{FF2B5EF4-FFF2-40B4-BE49-F238E27FC236}">
-                <a16:creationId xmlns:a16="http://schemas.microsoft.com/office/drawing/2014/main" id="{B5A0B1CE-B335-774D-B7E0-0431C6D0773C}"/>
-              </a:ext>
-            </a:extLst>
-          </p:cNvPr>
-          <p:cNvSpPr txBox="1"/>
-          <p:nvPr/>
-        </p:nvSpPr>
-        <p:spPr>
-          <a:xfrm>
-            <a:off x="3613726" y="189925"/>
-            <a:ext cx="6555179" cy="584775"/>
-          </a:xfrm>
-          <a:prstGeom prst="rect">
-            <a:avLst/>
-          </a:prstGeom>
-          <a:noFill/>
-        </p:spPr>
-        <p:txBody>
-          <a:bodyPr wrap="square" rtlCol="0">
-            <a:spAutoFit/>
-          </a:bodyPr>
-          <a:lstStyle/>
-          <a:p>
-            <a:r>
-              <a:rPr lang="ru-RU" sz="3200" b="1" dirty="0">
-                <a:latin typeface="Bahnschrift" panose="020B0502040204020203" pitchFamily="34" charset="0"/>
-              </a:rPr>
-              <a:t>Репозиторий проекта</a:t>
-            </a:r>
-          </a:p>
-        </p:txBody>
-      </p:sp>
-      <mc:AlternateContent xmlns:mc="http://schemas.openxmlformats.org/markup-compatibility/2006">
-        <mc:Choice xmlns:p14="http://schemas.microsoft.com/office/powerpoint/2010/main" Requires="p14">
-          <p:contentPart p14:bwMode="auto" r:id="rId2">
-            <p14:nvContentPartPr>
-              <p14:cNvPr id="2" name="Рукописный ввод 1">
-                <a:extLst>
-                  <a:ext uri="{FF2B5EF4-FFF2-40B4-BE49-F238E27FC236}">
-                    <a16:creationId xmlns:a16="http://schemas.microsoft.com/office/drawing/2014/main" id="{2179F4C4-96D2-E327-1BAF-18BB81A25409}"/>
-                  </a:ext>
-                </a:extLst>
-              </p14:cNvPr>
-              <p14:cNvContentPartPr/>
-              <p14:nvPr/>
-            </p14:nvContentPartPr>
-            <p14:xfrm>
-              <a:off x="5867280" y="3961980"/>
-              <a:ext cx="360" cy="360"/>
-            </p14:xfrm>
-          </p:contentPart>
-        </mc:Choice>
-        <mc:Fallback>
-          <p:pic>
-            <p:nvPicPr>
-              <p:cNvPr id="2" name="Рукописный ввод 1">
-                <a:extLst>
-                  <a:ext uri="{FF2B5EF4-FFF2-40B4-BE49-F238E27FC236}">
-                    <a16:creationId xmlns:a16="http://schemas.microsoft.com/office/drawing/2014/main" id="{2179F4C4-96D2-E327-1BAF-18BB81A25409}"/>
-                  </a:ext>
-                </a:extLst>
-              </p:cNvPr>
-              <p:cNvPicPr/>
-              <p:nvPr/>
-            </p:nvPicPr>
-            <p:blipFill>
-              <a:blip r:embed="rId3"/>
-              <a:stretch>
-                <a:fillRect/>
-              </a:stretch>
-            </p:blipFill>
-            <p:spPr>
-              <a:xfrm>
-                <a:off x="5861160" y="3955860"/>
-                <a:ext cx="12600" cy="12600"/>
-              </a:xfrm>
-              <a:prstGeom prst="rect">
-                <a:avLst/>
-              </a:prstGeom>
-            </p:spPr>
-          </p:pic>
-        </mc:Fallback>
-      </mc:AlternateContent>
-      <p:pic>
-        <p:nvPicPr>
-          <p:cNvPr id="14" name="Рисунок 13">
-            <a:extLst>
-              <a:ext uri="{FF2B5EF4-FFF2-40B4-BE49-F238E27FC236}">
-                <a16:creationId xmlns:a16="http://schemas.microsoft.com/office/drawing/2014/main" id="{8C913B4A-CC3D-AC53-64B0-4C5894469336}"/>
-              </a:ext>
-            </a:extLst>
-          </p:cNvPr>
-          <p:cNvPicPr>
-            <a:picLocks noChangeAspect="1"/>
-          </p:cNvPicPr>
-          <p:nvPr/>
-        </p:nvPicPr>
-        <p:blipFill>
-          <a:blip r:embed="rId4"/>
-          <a:stretch>
-            <a:fillRect/>
-          </a:stretch>
-        </p:blipFill>
-        <p:spPr>
-          <a:xfrm>
-            <a:off x="-12355220" y="979027"/>
-            <a:ext cx="5835011" cy="1781214"/>
-          </a:xfrm>
-          <a:prstGeom prst="rect">
-            <a:avLst/>
-          </a:prstGeom>
-        </p:spPr>
-      </p:pic>
-      <p:pic>
-        <p:nvPicPr>
-          <p:cNvPr id="16" name="Рисунок 15">
-            <a:extLst>
-              <a:ext uri="{FF2B5EF4-FFF2-40B4-BE49-F238E27FC236}">
-                <a16:creationId xmlns:a16="http://schemas.microsoft.com/office/drawing/2014/main" id="{2F4C9A0F-9B12-25A6-4502-0276F932AF23}"/>
-              </a:ext>
-            </a:extLst>
-          </p:cNvPr>
-          <p:cNvPicPr>
-            <a:picLocks noChangeAspect="1"/>
-          </p:cNvPicPr>
-          <p:nvPr/>
-        </p:nvPicPr>
-        <p:blipFill>
-          <a:blip r:embed="rId5"/>
-          <a:stretch>
-            <a:fillRect/>
-          </a:stretch>
-        </p:blipFill>
-        <p:spPr>
-          <a:xfrm>
-            <a:off x="15049151" y="3037736"/>
-            <a:ext cx="5835011" cy="1898267"/>
-          </a:xfrm>
-          <a:prstGeom prst="rect">
-            <a:avLst/>
-          </a:prstGeom>
-        </p:spPr>
-      </p:pic>
-      <p:pic>
-        <p:nvPicPr>
-          <p:cNvPr id="20" name="Рисунок 19">
-            <a:extLst>
-              <a:ext uri="{FF2B5EF4-FFF2-40B4-BE49-F238E27FC236}">
-                <a16:creationId xmlns:a16="http://schemas.microsoft.com/office/drawing/2014/main" id="{2F360C33-F541-3651-775B-3C20B66036BF}"/>
-              </a:ext>
-            </a:extLst>
-          </p:cNvPr>
-          <p:cNvPicPr>
-            <a:picLocks noChangeAspect="1"/>
-          </p:cNvPicPr>
-          <p:nvPr/>
-        </p:nvPicPr>
-        <p:blipFill>
-          <a:blip r:embed="rId6"/>
-          <a:stretch>
-            <a:fillRect/>
-          </a:stretch>
-        </p:blipFill>
-        <p:spPr>
-          <a:xfrm>
-            <a:off x="-12066986" y="4936003"/>
-            <a:ext cx="5338623" cy="1705715"/>
-          </a:xfrm>
-          <a:prstGeom prst="rect">
-            <a:avLst/>
-          </a:prstGeom>
-        </p:spPr>
-      </p:pic>
-      <p:pic>
-        <p:nvPicPr>
-          <p:cNvPr id="15" name="Рисунок 14">
-            <a:extLst>
-              <a:ext uri="{FF2B5EF4-FFF2-40B4-BE49-F238E27FC236}">
-                <a16:creationId xmlns:a16="http://schemas.microsoft.com/office/drawing/2014/main" id="{0D6E794B-4B81-68CF-56CC-4A4B97C23225}"/>
-              </a:ext>
-            </a:extLst>
-          </p:cNvPr>
-          <p:cNvPicPr>
-            <a:picLocks noChangeAspect="1"/>
-          </p:cNvPicPr>
-          <p:nvPr/>
-        </p:nvPicPr>
-        <p:blipFill>
-          <a:blip r:embed="rId7"/>
-          <a:stretch>
-            <a:fillRect/>
-          </a:stretch>
-        </p:blipFill>
-        <p:spPr>
-          <a:xfrm>
-            <a:off x="2060964" y="964625"/>
-            <a:ext cx="8107941" cy="5399840"/>
-          </a:xfrm>
-          <a:prstGeom prst="rect">
-            <a:avLst/>
-          </a:prstGeom>
-        </p:spPr>
-      </p:pic>
-      <mc:AlternateContent xmlns:mc="http://schemas.openxmlformats.org/markup-compatibility/2006">
-        <mc:Choice xmlns:p14="http://schemas.microsoft.com/office/powerpoint/2010/main" Requires="p14">
-          <p:contentPart p14:bwMode="auto" r:id="rId8">
-            <p14:nvContentPartPr>
-              <p14:cNvPr id="17" name="Рукописный ввод 16">
-                <a:extLst>
-                  <a:ext uri="{FF2B5EF4-FFF2-40B4-BE49-F238E27FC236}">
-                    <a16:creationId xmlns:a16="http://schemas.microsoft.com/office/drawing/2014/main" id="{E142D2B7-5EDA-2719-0808-C22DD54C9CFA}"/>
-                  </a:ext>
-                </a:extLst>
-              </p14:cNvPr>
-              <p14:cNvContentPartPr/>
-              <p14:nvPr/>
-            </p14:nvContentPartPr>
-            <p14:xfrm>
-              <a:off x="11274960" y="6081330"/>
-              <a:ext cx="403200" cy="493200"/>
-            </p14:xfrm>
-          </p:contentPart>
-        </mc:Choice>
-        <mc:Fallback>
-          <p:pic>
-            <p:nvPicPr>
-              <p:cNvPr id="17" name="Рукописный ввод 16">
-                <a:extLst>
-                  <a:ext uri="{FF2B5EF4-FFF2-40B4-BE49-F238E27FC236}">
-                    <a16:creationId xmlns:a16="http://schemas.microsoft.com/office/drawing/2014/main" id="{E142D2B7-5EDA-2719-0808-C22DD54C9CFA}"/>
-                  </a:ext>
-                </a:extLst>
-              </p:cNvPr>
-              <p:cNvPicPr/>
-              <p:nvPr/>
-            </p:nvPicPr>
-            <p:blipFill>
-              <a:blip r:embed="rId9"/>
-              <a:stretch>
-                <a:fillRect/>
-              </a:stretch>
-            </p:blipFill>
-            <p:spPr>
-              <a:xfrm>
-                <a:off x="11268840" y="6075210"/>
-                <a:ext cx="415440" cy="505440"/>
-              </a:xfrm>
-              <a:prstGeom prst="rect">
-                <a:avLst/>
-              </a:prstGeom>
-            </p:spPr>
-          </p:pic>
-        </mc:Fallback>
-      </mc:AlternateContent>
-    </p:spTree>
-    <p:extLst>
-      <p:ext uri="{BB962C8B-B14F-4D97-AF65-F5344CB8AC3E}">
-        <p14:creationId xmlns:p14="http://schemas.microsoft.com/office/powerpoint/2010/main" val="3924456240"/>
-      </p:ext>
-    </p:extLst>
-  </p:cSld>
-  <p:clrMapOvr>
-    <a:masterClrMapping/>
-  </p:clrMapOvr>
-  <mc:AlternateContent xmlns:mc="http://schemas.openxmlformats.org/markup-compatibility/2006">
-    <mc:Choice xmlns:p159="http://schemas.microsoft.com/office/powerpoint/2015/09/main" Requires="p159">
-      <p:transition xmlns:p14="http://schemas.microsoft.com/office/powerpoint/2010/main" spd="slow" p14:dur="2000">
-        <p159:morph option="byObject"/>
-      </p:transition>
-    </mc:Choice>
-    <mc:Fallback>
-      <p:transition spd="slow">
-        <p:fade/>
-      </p:transition>
-    </mc:Fallback>
-  </mc:AlternateContent>
-</p:sld>
-</file>
-
-<file path=ppt/slides/slide7.xml><?xml version="1.0" encoding="utf-8"?>
+<file path=ppt/slides/slide10.xml><?xml version="1.0" encoding="utf-8"?>
 <p:sld xmlns:a="http://schemas.openxmlformats.org/drawingml/2006/main" xmlns:r="http://schemas.openxmlformats.org/officeDocument/2006/relationships" xmlns:p="http://schemas.openxmlformats.org/presentationml/2006/main">
   <p:cSld>
     <p:spTree>
@@ -7149,8 +4042,8 @@
           </a:p>
         </p:txBody>
       </p:sp>
-      <mc:AlternateContent xmlns:mc="http://schemas.openxmlformats.org/markup-compatibility/2006">
-        <mc:Choice xmlns:p14="http://schemas.microsoft.com/office/powerpoint/2010/main" Requires="p14">
+      <mc:AlternateContent xmlns:mc="http://schemas.openxmlformats.org/markup-compatibility/2006" xmlns:p14="http://schemas.microsoft.com/office/powerpoint/2010/main">
+        <mc:Choice Requires="p14">
           <p:contentPart p14:bwMode="auto" r:id="rId2">
             <p14:nvContentPartPr>
               <p14:cNvPr id="2" name="Рукописный ввод 1">
@@ -7169,7 +4062,7 @@
             </p14:xfrm>
           </p:contentPart>
         </mc:Choice>
-        <mc:Fallback>
+        <mc:Fallback xmlns="">
           <p:pic>
             <p:nvPicPr>
               <p:cNvPr id="2" name="Рукописный ввод 1">
@@ -7260,129 +4153,58 @@
           </a:prstGeom>
         </p:spPr>
       </p:pic>
-      <p:grpSp>
-        <p:nvGrpSpPr>
-          <p:cNvPr id="19" name="Группа 18">
-            <a:extLst>
-              <a:ext uri="{FF2B5EF4-FFF2-40B4-BE49-F238E27FC236}">
-                <a16:creationId xmlns:a16="http://schemas.microsoft.com/office/drawing/2014/main" id="{E61B30E1-9DF4-36FF-C6A7-140BFE13F160}"/>
-              </a:ext>
-            </a:extLst>
-          </p:cNvPr>
-          <p:cNvGrpSpPr/>
-          <p:nvPr/>
-        </p:nvGrpSpPr>
-        <p:grpSpPr>
-          <a:xfrm>
-            <a:off x="11352380" y="6068340"/>
-            <a:ext cx="470160" cy="571680"/>
-            <a:chOff x="11352380" y="6068340"/>
-            <a:chExt cx="470160" cy="571680"/>
-          </a:xfrm>
-        </p:grpSpPr>
-        <mc:AlternateContent xmlns:mc="http://schemas.openxmlformats.org/markup-compatibility/2006">
-          <mc:Choice xmlns:p14="http://schemas.microsoft.com/office/powerpoint/2010/main" Requires="p14">
-            <p:contentPart p14:bwMode="auto" r:id="rId6">
-              <p14:nvContentPartPr>
-                <p14:cNvPr id="13" name="Рукописный ввод 12">
-                  <a:extLst>
-                    <a:ext uri="{FF2B5EF4-FFF2-40B4-BE49-F238E27FC236}">
-                      <a16:creationId xmlns:a16="http://schemas.microsoft.com/office/drawing/2014/main" id="{417BBB5F-1700-FC62-4320-AD423662D083}"/>
-                    </a:ext>
-                  </a:extLst>
-                </p14:cNvPr>
-                <p14:cNvContentPartPr/>
-                <p14:nvPr/>
-              </p14:nvContentPartPr>
-              <p14:xfrm>
-                <a:off x="11352380" y="6068340"/>
-                <a:ext cx="383760" cy="571680"/>
-              </p14:xfrm>
-            </p:contentPart>
-          </mc:Choice>
-          <mc:Fallback>
-            <p:pic>
-              <p:nvPicPr>
-                <p:cNvPr id="13" name="Рукописный ввод 12">
-                  <a:extLst>
-                    <a:ext uri="{FF2B5EF4-FFF2-40B4-BE49-F238E27FC236}">
-                      <a16:creationId xmlns:a16="http://schemas.microsoft.com/office/drawing/2014/main" id="{417BBB5F-1700-FC62-4320-AD423662D083}"/>
-                    </a:ext>
-                  </a:extLst>
-                </p:cNvPr>
-                <p:cNvPicPr/>
-                <p:nvPr/>
-              </p:nvPicPr>
-              <p:blipFill>
-                <a:blip r:embed="rId7"/>
-                <a:stretch>
-                  <a:fillRect/>
-                </a:stretch>
-              </p:blipFill>
-              <p:spPr>
-                <a:xfrm>
-                  <a:off x="11346260" y="6062220"/>
-                  <a:ext cx="396000" cy="583920"/>
-                </a:xfrm>
-                <a:prstGeom prst="rect">
-                  <a:avLst/>
-                </a:prstGeom>
-              </p:spPr>
-            </p:pic>
-          </mc:Fallback>
-        </mc:AlternateContent>
-        <mc:AlternateContent xmlns:mc="http://schemas.openxmlformats.org/markup-compatibility/2006">
-          <mc:Choice xmlns:p14="http://schemas.microsoft.com/office/powerpoint/2010/main" Requires="p14">
-            <p:contentPart p14:bwMode="auto" r:id="rId8">
-              <p14:nvContentPartPr>
-                <p14:cNvPr id="18" name="Рукописный ввод 17">
-                  <a:extLst>
-                    <a:ext uri="{FF2B5EF4-FFF2-40B4-BE49-F238E27FC236}">
-                      <a16:creationId xmlns:a16="http://schemas.microsoft.com/office/drawing/2014/main" id="{F1B45F1F-E19C-76C0-9A51-5F3EA17360A0}"/>
-                    </a:ext>
-                  </a:extLst>
-                </p14:cNvPr>
-                <p14:cNvContentPartPr/>
-                <p14:nvPr/>
-              </p14:nvContentPartPr>
-              <p14:xfrm>
-                <a:off x="11607620" y="6352380"/>
-                <a:ext cx="214920" cy="23040"/>
-              </p14:xfrm>
-            </p:contentPart>
-          </mc:Choice>
-          <mc:Fallback>
-            <p:pic>
-              <p:nvPicPr>
-                <p:cNvPr id="18" name="Рукописный ввод 17">
-                  <a:extLst>
-                    <a:ext uri="{FF2B5EF4-FFF2-40B4-BE49-F238E27FC236}">
-                      <a16:creationId xmlns:a16="http://schemas.microsoft.com/office/drawing/2014/main" id="{F1B45F1F-E19C-76C0-9A51-5F3EA17360A0}"/>
-                    </a:ext>
-                  </a:extLst>
-                </p:cNvPr>
-                <p:cNvPicPr/>
-                <p:nvPr/>
-              </p:nvPicPr>
-              <p:blipFill>
-                <a:blip r:embed="rId9"/>
-                <a:stretch>
-                  <a:fillRect/>
-                </a:stretch>
-              </p:blipFill>
-              <p:spPr>
-                <a:xfrm>
-                  <a:off x="11601500" y="6346260"/>
-                  <a:ext cx="227160" cy="35280"/>
-                </a:xfrm>
-                <a:prstGeom prst="rect">
-                  <a:avLst/>
-                </a:prstGeom>
-              </p:spPr>
-            </p:pic>
-          </mc:Fallback>
-        </mc:AlternateContent>
-      </p:grpSp>
+      <p:sp>
+        <p:nvSpPr>
+          <p:cNvPr id="4" name="Овал 3">
+            <a:extLst>
+              <a:ext uri="{FF2B5EF4-FFF2-40B4-BE49-F238E27FC236}">
+                <a16:creationId xmlns:a16="http://schemas.microsoft.com/office/drawing/2014/main" id="{483C8CF3-3701-6EEA-62CB-322D9AF06490}"/>
+              </a:ext>
+            </a:extLst>
+          </p:cNvPr>
+          <p:cNvSpPr/>
+          <p:nvPr/>
+        </p:nvSpPr>
+        <p:spPr>
+          <a:xfrm>
+            <a:off x="10875729" y="5646058"/>
+            <a:ext cx="1113072" cy="986332"/>
+          </a:xfrm>
+          <a:prstGeom prst="ellipse">
+            <a:avLst/>
+          </a:prstGeom>
+        </p:spPr>
+        <p:style>
+          <a:lnRef idx="2">
+            <a:schemeClr val="dk1"/>
+          </a:lnRef>
+          <a:fillRef idx="1">
+            <a:schemeClr val="lt1"/>
+          </a:fillRef>
+          <a:effectRef idx="0">
+            <a:schemeClr val="dk1"/>
+          </a:effectRef>
+          <a:fontRef idx="minor">
+            <a:schemeClr val="dk1"/>
+          </a:fontRef>
+        </p:style>
+        <p:txBody>
+          <a:bodyPr rtlCol="0" anchor="ctr"/>
+          <a:lstStyle/>
+          <a:p>
+            <a:pPr algn="ctr"/>
+            <a:r>
+              <a:rPr lang="en-US" sz="4800" b="1" dirty="0">
+                <a:latin typeface="Bahnschrift" panose="020B0502040204020203" pitchFamily="34" charset="0"/>
+              </a:rPr>
+              <a:t>10</a:t>
+            </a:r>
+            <a:endParaRPr lang="ru-RU" sz="4800" b="1" dirty="0">
+              <a:latin typeface="Bahnschrift" panose="020B0502040204020203" pitchFamily="34" charset="0"/>
+            </a:endParaRPr>
+          </a:p>
+        </p:txBody>
+      </p:sp>
     </p:spTree>
     <p:extLst>
       <p:ext uri="{BB962C8B-B14F-4D97-AF65-F5344CB8AC3E}">
@@ -7393,13 +4215,13 @@
   <p:clrMapOvr>
     <a:masterClrMapping/>
   </p:clrMapOvr>
-  <mc:AlternateContent xmlns:mc="http://schemas.openxmlformats.org/markup-compatibility/2006">
-    <mc:Choice xmlns:p159="http://schemas.microsoft.com/office/powerpoint/2015/09/main" Requires="p159">
+  <mc:AlternateContent xmlns:mc="http://schemas.openxmlformats.org/markup-compatibility/2006" xmlns:p159="http://schemas.microsoft.com/office/powerpoint/2015/09/main">
+    <mc:Choice Requires="p159">
       <p:transition xmlns:p14="http://schemas.microsoft.com/office/powerpoint/2010/main" spd="slow" p14:dur="2000">
         <p159:morph option="byObject"/>
       </p:transition>
     </mc:Choice>
-    <mc:Fallback>
+    <mc:Fallback xmlns="">
       <p:transition spd="slow">
         <p:fade/>
       </p:transition>
@@ -7408,7 +4230,7 @@
 </p:sld>
 </file>
 
-<file path=ppt/slides/slide8.xml><?xml version="1.0" encoding="utf-8"?>
+<file path=ppt/slides/slide11.xml><?xml version="1.0" encoding="utf-8"?>
 <p:sld xmlns:a="http://schemas.openxmlformats.org/drawingml/2006/main" xmlns:r="http://schemas.openxmlformats.org/officeDocument/2006/relationships" xmlns:p="http://schemas.openxmlformats.org/presentationml/2006/main">
   <p:cSld>
     <p:spTree>
@@ -7468,8 +4290,8 @@
           </a:p>
         </p:txBody>
       </p:sp>
-      <mc:AlternateContent xmlns:mc="http://schemas.openxmlformats.org/markup-compatibility/2006">
-        <mc:Choice xmlns:p14="http://schemas.microsoft.com/office/powerpoint/2010/main" Requires="p14">
+      <mc:AlternateContent xmlns:mc="http://schemas.openxmlformats.org/markup-compatibility/2006" xmlns:p14="http://schemas.microsoft.com/office/powerpoint/2010/main">
+        <mc:Choice Requires="p14">
           <p:contentPart p14:bwMode="auto" r:id="rId2">
             <p14:nvContentPartPr>
               <p14:cNvPr id="2" name="Рукописный ввод 1">
@@ -7488,7 +4310,7 @@
             </p14:xfrm>
           </p:contentPart>
         </mc:Choice>
-        <mc:Fallback>
+        <mc:Fallback xmlns="">
           <p:pic>
             <p:nvPicPr>
               <p:cNvPr id="2" name="Рукописный ввод 1">
@@ -7824,57 +4646,58 @@
           </a:prstGeom>
         </p:spPr>
       </p:pic>
-      <mc:AlternateContent xmlns:mc="http://schemas.openxmlformats.org/markup-compatibility/2006">
-        <mc:Choice xmlns:p14="http://schemas.microsoft.com/office/powerpoint/2010/main" Requires="p14">
-          <p:contentPart p14:bwMode="auto" r:id="rId6">
-            <p14:nvContentPartPr>
-              <p14:cNvPr id="19" name="Рукописный ввод 18">
-                <a:extLst>
-                  <a:ext uri="{FF2B5EF4-FFF2-40B4-BE49-F238E27FC236}">
-                    <a16:creationId xmlns:a16="http://schemas.microsoft.com/office/drawing/2014/main" id="{8FCC59FE-BA0D-8083-1F7B-1B047F9E9BBA}"/>
-                  </a:ext>
-                </a:extLst>
-              </p14:cNvPr>
-              <p14:cNvContentPartPr/>
-              <p14:nvPr/>
-            </p14:nvContentPartPr>
-            <p14:xfrm>
-              <a:off x="11426820" y="5916000"/>
-              <a:ext cx="561960" cy="639000"/>
-            </p14:xfrm>
-          </p:contentPart>
-        </mc:Choice>
-        <mc:Fallback>
-          <p:pic>
-            <p:nvPicPr>
-              <p:cNvPr id="19" name="Рукописный ввод 18">
-                <a:extLst>
-                  <a:ext uri="{FF2B5EF4-FFF2-40B4-BE49-F238E27FC236}">
-                    <a16:creationId xmlns:a16="http://schemas.microsoft.com/office/drawing/2014/main" id="{8FCC59FE-BA0D-8083-1F7B-1B047F9E9BBA}"/>
-                  </a:ext>
-                </a:extLst>
-              </p:cNvPr>
-              <p:cNvPicPr/>
-              <p:nvPr/>
-            </p:nvPicPr>
-            <p:blipFill>
-              <a:blip r:embed="rId7"/>
-              <a:stretch>
-                <a:fillRect/>
-              </a:stretch>
-            </p:blipFill>
-            <p:spPr>
-              <a:xfrm>
-                <a:off x="11420700" y="5909880"/>
-                <a:ext cx="574200" cy="651240"/>
-              </a:xfrm>
-              <a:prstGeom prst="rect">
-                <a:avLst/>
-              </a:prstGeom>
-            </p:spPr>
-          </p:pic>
-        </mc:Fallback>
-      </mc:AlternateContent>
+      <p:sp>
+        <p:nvSpPr>
+          <p:cNvPr id="4" name="Овал 3">
+            <a:extLst>
+              <a:ext uri="{FF2B5EF4-FFF2-40B4-BE49-F238E27FC236}">
+                <a16:creationId xmlns:a16="http://schemas.microsoft.com/office/drawing/2014/main" id="{906A4788-E1E9-1DD7-237A-AE99EED35D16}"/>
+              </a:ext>
+            </a:extLst>
+          </p:cNvPr>
+          <p:cNvSpPr/>
+          <p:nvPr/>
+        </p:nvSpPr>
+        <p:spPr>
+          <a:xfrm>
+            <a:off x="10856794" y="5660573"/>
+            <a:ext cx="1113072" cy="986332"/>
+          </a:xfrm>
+          <a:prstGeom prst="ellipse">
+            <a:avLst/>
+          </a:prstGeom>
+        </p:spPr>
+        <p:style>
+          <a:lnRef idx="2">
+            <a:schemeClr val="dk1"/>
+          </a:lnRef>
+          <a:fillRef idx="1">
+            <a:schemeClr val="lt1"/>
+          </a:fillRef>
+          <a:effectRef idx="0">
+            <a:schemeClr val="dk1"/>
+          </a:effectRef>
+          <a:fontRef idx="minor">
+            <a:schemeClr val="dk1"/>
+          </a:fontRef>
+        </p:style>
+        <p:txBody>
+          <a:bodyPr rtlCol="0" anchor="ctr"/>
+          <a:lstStyle/>
+          <a:p>
+            <a:pPr algn="ctr"/>
+            <a:r>
+              <a:rPr lang="en-US" sz="4800" b="1" dirty="0">
+                <a:latin typeface="Bahnschrift" panose="020B0502040204020203" pitchFamily="34" charset="0"/>
+              </a:rPr>
+              <a:t>11</a:t>
+            </a:r>
+            <a:endParaRPr lang="ru-RU" sz="4800" b="1" dirty="0">
+              <a:latin typeface="Bahnschrift" panose="020B0502040204020203" pitchFamily="34" charset="0"/>
+            </a:endParaRPr>
+          </a:p>
+        </p:txBody>
+      </p:sp>
     </p:spTree>
     <p:extLst>
       <p:ext uri="{BB962C8B-B14F-4D97-AF65-F5344CB8AC3E}">
@@ -7885,13 +4708,13 @@
   <p:clrMapOvr>
     <a:masterClrMapping/>
   </p:clrMapOvr>
-  <mc:AlternateContent xmlns:mc="http://schemas.openxmlformats.org/markup-compatibility/2006">
-    <mc:Choice xmlns:p159="http://schemas.microsoft.com/office/powerpoint/2015/09/main" Requires="p159">
+  <mc:AlternateContent xmlns:mc="http://schemas.openxmlformats.org/markup-compatibility/2006" xmlns:p159="http://schemas.microsoft.com/office/powerpoint/2015/09/main">
+    <mc:Choice Requires="p159">
       <p:transition xmlns:p14="http://schemas.microsoft.com/office/powerpoint/2010/main" spd="slow" p14:dur="2000">
         <p159:morph option="byObject"/>
       </p:transition>
     </mc:Choice>
-    <mc:Fallback>
+    <mc:Fallback xmlns="">
       <p:transition spd="slow">
         <p:fade/>
       </p:transition>
@@ -7900,7 +4723,7 @@
 </p:sld>
 </file>
 
-<file path=ppt/slides/slide9.xml><?xml version="1.0" encoding="utf-8"?>
+<file path=ppt/slides/slide12.xml><?xml version="1.0" encoding="utf-8"?>
 <p:sld xmlns:a="http://schemas.openxmlformats.org/drawingml/2006/main" xmlns:r="http://schemas.openxmlformats.org/officeDocument/2006/relationships" xmlns:p="http://schemas.openxmlformats.org/presentationml/2006/main">
   <p:cSld>
     <p:spTree>
@@ -8343,14 +5166,2772 @@
           </a:p>
         </p:txBody>
       </p:sp>
-      <mc:AlternateContent xmlns:mc="http://schemas.openxmlformats.org/markup-compatibility/2006">
-        <mc:Choice xmlns:p14="http://schemas.microsoft.com/office/powerpoint/2010/main" Requires="p14">
-          <p:contentPart p14:bwMode="auto" r:id="rId2">
+      <p:sp>
+        <p:nvSpPr>
+          <p:cNvPr id="3" name="Овал 2">
+            <a:extLst>
+              <a:ext uri="{FF2B5EF4-FFF2-40B4-BE49-F238E27FC236}">
+                <a16:creationId xmlns:a16="http://schemas.microsoft.com/office/drawing/2014/main" id="{62EF6610-8560-DFDE-F6D3-CCE7A25BD2B9}"/>
+              </a:ext>
+            </a:extLst>
+          </p:cNvPr>
+          <p:cNvSpPr/>
+          <p:nvPr/>
+        </p:nvSpPr>
+        <p:spPr>
+          <a:xfrm>
+            <a:off x="224504" y="5619470"/>
+            <a:ext cx="1113072" cy="986332"/>
+          </a:xfrm>
+          <a:prstGeom prst="ellipse">
+            <a:avLst/>
+          </a:prstGeom>
+        </p:spPr>
+        <p:style>
+          <a:lnRef idx="2">
+            <a:schemeClr val="dk1"/>
+          </a:lnRef>
+          <a:fillRef idx="1">
+            <a:schemeClr val="lt1"/>
+          </a:fillRef>
+          <a:effectRef idx="0">
+            <a:schemeClr val="dk1"/>
+          </a:effectRef>
+          <a:fontRef idx="minor">
+            <a:schemeClr val="dk1"/>
+          </a:fontRef>
+        </p:style>
+        <p:txBody>
+          <a:bodyPr rtlCol="0" anchor="ctr"/>
+          <a:lstStyle/>
+          <a:p>
+            <a:pPr algn="ctr"/>
+            <a:r>
+              <a:rPr lang="en-US" sz="4800" b="1" dirty="0">
+                <a:latin typeface="Bahnschrift" panose="020B0502040204020203" pitchFamily="34" charset="0"/>
+              </a:rPr>
+              <a:t>12</a:t>
+            </a:r>
+            <a:endParaRPr lang="ru-RU" sz="4800" b="1" dirty="0">
+              <a:latin typeface="Bahnschrift" panose="020B0502040204020203" pitchFamily="34" charset="0"/>
+            </a:endParaRPr>
+          </a:p>
+        </p:txBody>
+      </p:sp>
+    </p:spTree>
+    <p:extLst>
+      <p:ext uri="{BB962C8B-B14F-4D97-AF65-F5344CB8AC3E}">
+        <p14:creationId xmlns:p14="http://schemas.microsoft.com/office/powerpoint/2010/main" val="1229051695"/>
+      </p:ext>
+    </p:extLst>
+  </p:cSld>
+  <p:clrMapOvr>
+    <a:masterClrMapping/>
+  </p:clrMapOvr>
+  <p:transition spd="slow">
+    <p:wipe/>
+  </p:transition>
+</p:sld>
+</file>
+
+<file path=ppt/slides/slide2.xml><?xml version="1.0" encoding="utf-8"?>
+<p:sld xmlns:a="http://schemas.openxmlformats.org/drawingml/2006/main" xmlns:r="http://schemas.openxmlformats.org/officeDocument/2006/relationships" xmlns:p="http://schemas.openxmlformats.org/presentationml/2006/main">
+  <p:cSld>
+    <p:spTree>
+      <p:nvGrpSpPr>
+        <p:cNvPr id="1" name="">
+          <a:extLst>
+            <a:ext uri="{FF2B5EF4-FFF2-40B4-BE49-F238E27FC236}">
+              <a16:creationId xmlns:a16="http://schemas.microsoft.com/office/drawing/2014/main" id="{8A34C5A8-97F1-18D5-1F14-F402E8241E6D}"/>
+            </a:ext>
+          </a:extLst>
+        </p:cNvPr>
+        <p:cNvGrpSpPr/>
+        <p:nvPr/>
+      </p:nvGrpSpPr>
+      <p:grpSpPr>
+        <a:xfrm>
+          <a:off x="0" y="0"/>
+          <a:ext cx="0" cy="0"/>
+          <a:chOff x="0" y="0"/>
+          <a:chExt cx="0" cy="0"/>
+        </a:xfrm>
+      </p:grpSpPr>
+      <p:sp>
+        <p:nvSpPr>
+          <p:cNvPr id="6" name="Прямоугольник 5">
+            <a:extLst>
+              <a:ext uri="{FF2B5EF4-FFF2-40B4-BE49-F238E27FC236}">
+                <a16:creationId xmlns:a16="http://schemas.microsoft.com/office/drawing/2014/main" id="{D454F66D-7F57-0B1B-CFCC-B87B41336081}"/>
+              </a:ext>
+            </a:extLst>
+          </p:cNvPr>
+          <p:cNvSpPr/>
+          <p:nvPr/>
+        </p:nvSpPr>
+        <p:spPr>
+          <a:xfrm>
+            <a:off x="-2235200" y="0"/>
+            <a:ext cx="14427200" cy="6858000"/>
+          </a:xfrm>
+          <a:prstGeom prst="rect">
+            <a:avLst/>
+          </a:prstGeom>
+          <a:solidFill>
+            <a:srgbClr val="CCECFF"/>
+          </a:solidFill>
+        </p:spPr>
+        <p:style>
+          <a:lnRef idx="2">
+            <a:schemeClr val="accent1">
+              <a:shade val="15000"/>
+            </a:schemeClr>
+          </a:lnRef>
+          <a:fillRef idx="1">
+            <a:schemeClr val="accent1"/>
+          </a:fillRef>
+          <a:effectRef idx="0">
+            <a:schemeClr val="accent1"/>
+          </a:effectRef>
+          <a:fontRef idx="minor">
+            <a:schemeClr val="lt1"/>
+          </a:fontRef>
+        </p:style>
+        <p:txBody>
+          <a:bodyPr rtlCol="0" anchor="ctr"/>
+          <a:lstStyle/>
+          <a:p>
+            <a:pPr algn="ctr"/>
+            <a:endParaRPr lang="ru-RU"/>
+          </a:p>
+        </p:txBody>
+      </p:sp>
+      <p:sp>
+        <p:nvSpPr>
+          <p:cNvPr id="7" name="Прямоугольник 6">
+            <a:extLst>
+              <a:ext uri="{FF2B5EF4-FFF2-40B4-BE49-F238E27FC236}">
+                <a16:creationId xmlns:a16="http://schemas.microsoft.com/office/drawing/2014/main" id="{75D73E66-63C1-542E-F801-F2009E035158}"/>
+              </a:ext>
+            </a:extLst>
+          </p:cNvPr>
+          <p:cNvSpPr/>
+          <p:nvPr/>
+        </p:nvSpPr>
+        <p:spPr>
+          <a:xfrm>
+            <a:off x="-3451101" y="0"/>
+            <a:ext cx="6555179" cy="6858000"/>
+          </a:xfrm>
+          <a:prstGeom prst="rect">
+            <a:avLst/>
+          </a:prstGeom>
+          <a:solidFill>
+            <a:srgbClr val="99CCFF"/>
+          </a:solidFill>
+        </p:spPr>
+        <p:style>
+          <a:lnRef idx="2">
+            <a:schemeClr val="accent1">
+              <a:shade val="15000"/>
+            </a:schemeClr>
+          </a:lnRef>
+          <a:fillRef idx="1">
+            <a:schemeClr val="accent1"/>
+          </a:fillRef>
+          <a:effectRef idx="0">
+            <a:schemeClr val="accent1"/>
+          </a:effectRef>
+          <a:fontRef idx="minor">
+            <a:schemeClr val="lt1"/>
+          </a:fontRef>
+        </p:style>
+        <p:txBody>
+          <a:bodyPr rtlCol="0" anchor="ctr"/>
+          <a:lstStyle/>
+          <a:p>
+            <a:pPr algn="ctr"/>
+            <a:endParaRPr lang="ru-RU"/>
+          </a:p>
+        </p:txBody>
+      </p:sp>
+      <p:sp>
+        <p:nvSpPr>
+          <p:cNvPr id="8" name="Прямоугольник 7">
+            <a:extLst>
+              <a:ext uri="{FF2B5EF4-FFF2-40B4-BE49-F238E27FC236}">
+                <a16:creationId xmlns:a16="http://schemas.microsoft.com/office/drawing/2014/main" id="{3BF0C138-1E0C-E1D4-B99D-7F9414DB6A68}"/>
+              </a:ext>
+            </a:extLst>
+          </p:cNvPr>
+          <p:cNvSpPr/>
+          <p:nvPr/>
+        </p:nvSpPr>
+        <p:spPr>
+          <a:xfrm>
+            <a:off x="-4207824" y="0"/>
+            <a:ext cx="6555179" cy="6858000"/>
+          </a:xfrm>
+          <a:prstGeom prst="rect">
+            <a:avLst/>
+          </a:prstGeom>
+          <a:solidFill>
+            <a:srgbClr val="66CCFF"/>
+          </a:solidFill>
+        </p:spPr>
+        <p:style>
+          <a:lnRef idx="2">
+            <a:schemeClr val="accent1">
+              <a:shade val="15000"/>
+            </a:schemeClr>
+          </a:lnRef>
+          <a:fillRef idx="1">
+            <a:schemeClr val="accent1"/>
+          </a:fillRef>
+          <a:effectRef idx="0">
+            <a:schemeClr val="accent1"/>
+          </a:effectRef>
+          <a:fontRef idx="minor">
+            <a:schemeClr val="lt1"/>
+          </a:fontRef>
+        </p:style>
+        <p:txBody>
+          <a:bodyPr rtlCol="0" anchor="ctr"/>
+          <a:lstStyle/>
+          <a:p>
+            <a:pPr algn="ctr"/>
+            <a:endParaRPr lang="ru-RU"/>
+          </a:p>
+        </p:txBody>
+      </p:sp>
+      <p:sp>
+        <p:nvSpPr>
+          <p:cNvPr id="9" name="Прямоугольник 8">
+            <a:extLst>
+              <a:ext uri="{FF2B5EF4-FFF2-40B4-BE49-F238E27FC236}">
+                <a16:creationId xmlns:a16="http://schemas.microsoft.com/office/drawing/2014/main" id="{5E4C3042-F0A3-C4A4-8AFE-83E8EC323B4A}"/>
+              </a:ext>
+            </a:extLst>
+          </p:cNvPr>
+          <p:cNvSpPr/>
+          <p:nvPr/>
+        </p:nvSpPr>
+        <p:spPr>
+          <a:xfrm>
+            <a:off x="-4964547" y="0"/>
+            <a:ext cx="6555179" cy="6858000"/>
+          </a:xfrm>
+          <a:prstGeom prst="rect">
+            <a:avLst/>
+          </a:prstGeom>
+          <a:solidFill>
+            <a:srgbClr val="3399FF"/>
+          </a:solidFill>
+        </p:spPr>
+        <p:style>
+          <a:lnRef idx="2">
+            <a:schemeClr val="accent1">
+              <a:shade val="15000"/>
+            </a:schemeClr>
+          </a:lnRef>
+          <a:fillRef idx="1">
+            <a:schemeClr val="accent1"/>
+          </a:fillRef>
+          <a:effectRef idx="0">
+            <a:schemeClr val="accent1"/>
+          </a:effectRef>
+          <a:fontRef idx="minor">
+            <a:schemeClr val="lt1"/>
+          </a:fontRef>
+        </p:style>
+        <p:txBody>
+          <a:bodyPr rtlCol="0" anchor="ctr"/>
+          <a:lstStyle/>
+          <a:p>
+            <a:pPr algn="ctr"/>
+            <a:endParaRPr lang="ru-RU"/>
+          </a:p>
+        </p:txBody>
+      </p:sp>
+      <p:sp>
+        <p:nvSpPr>
+          <p:cNvPr id="10" name="Прямоугольник 9">
+            <a:extLst>
+              <a:ext uri="{FF2B5EF4-FFF2-40B4-BE49-F238E27FC236}">
+                <a16:creationId xmlns:a16="http://schemas.microsoft.com/office/drawing/2014/main" id="{F173E3B5-A55E-9559-30BC-9578724FECF6}"/>
+              </a:ext>
+            </a:extLst>
+          </p:cNvPr>
+          <p:cNvSpPr/>
+          <p:nvPr/>
+        </p:nvSpPr>
+        <p:spPr>
+          <a:xfrm>
+            <a:off x="-5742378" y="0"/>
+            <a:ext cx="6555179" cy="6858000"/>
+          </a:xfrm>
+          <a:prstGeom prst="rect">
+            <a:avLst/>
+          </a:prstGeom>
+          <a:solidFill>
+            <a:srgbClr val="0066FF"/>
+          </a:solidFill>
+        </p:spPr>
+        <p:style>
+          <a:lnRef idx="2">
+            <a:schemeClr val="accent1">
+              <a:shade val="15000"/>
+            </a:schemeClr>
+          </a:lnRef>
+          <a:fillRef idx="1">
+            <a:schemeClr val="accent1"/>
+          </a:fillRef>
+          <a:effectRef idx="0">
+            <a:schemeClr val="accent1"/>
+          </a:effectRef>
+          <a:fontRef idx="minor">
+            <a:schemeClr val="lt1"/>
+          </a:fontRef>
+        </p:style>
+        <p:txBody>
+          <a:bodyPr rtlCol="0" anchor="ctr"/>
+          <a:lstStyle/>
+          <a:p>
+            <a:pPr algn="ctr"/>
+            <a:endParaRPr lang="ru-RU"/>
+          </a:p>
+        </p:txBody>
+      </p:sp>
+      <p:sp>
+        <p:nvSpPr>
+          <p:cNvPr id="2" name="TextBox 1">
+            <a:extLst>
+              <a:ext uri="{FF2B5EF4-FFF2-40B4-BE49-F238E27FC236}">
+                <a16:creationId xmlns:a16="http://schemas.microsoft.com/office/drawing/2014/main" id="{83E3DC71-B70E-3A9E-C1BA-190F16742BF5}"/>
+              </a:ext>
+            </a:extLst>
+          </p:cNvPr>
+          <p:cNvSpPr txBox="1"/>
+          <p:nvPr/>
+        </p:nvSpPr>
+        <p:spPr>
+          <a:xfrm>
+            <a:off x="3314700" y="1090811"/>
+            <a:ext cx="8877300" cy="5539978"/>
+          </a:xfrm>
+          <a:prstGeom prst="rect">
+            <a:avLst/>
+          </a:prstGeom>
+          <a:noFill/>
+        </p:spPr>
+        <p:txBody>
+          <a:bodyPr wrap="square" rtlCol="0">
+            <a:spAutoFit/>
+          </a:bodyPr>
+          <a:lstStyle/>
+          <a:p>
+            <a:r>
+              <a:rPr lang="ru-RU" sz="2400" b="1" dirty="0">
+                <a:latin typeface="Bahnschrift" panose="020B0502040204020203" pitchFamily="34" charset="0"/>
+              </a:rPr>
+              <a:t>О проекте:</a:t>
+            </a:r>
+            <a:br>
+              <a:rPr lang="ru-RU" sz="2400" dirty="0">
+                <a:latin typeface="Bahnschrift" panose="020B0502040204020203" pitchFamily="34" charset="0"/>
+              </a:rPr>
+            </a:br>
+            <a:r>
+              <a:rPr lang="ru-RU" sz="2400" dirty="0">
+                <a:latin typeface="Bahnschrift" panose="020B0502040204020203" pitchFamily="34" charset="0"/>
+              </a:rPr>
+              <a:t>BloGGing CenteR — это веб-платформа для создания и ведения блогов.</a:t>
+            </a:r>
+          </a:p>
+          <a:p>
+            <a:r>
+              <a:rPr lang="ru-RU" sz="2400" b="1" dirty="0">
+                <a:latin typeface="Bahnschrift" panose="020B0502040204020203" pitchFamily="34" charset="0"/>
+              </a:rPr>
+              <a:t>Целевая аудитория:</a:t>
+            </a:r>
+            <a:endParaRPr lang="ru-RU" sz="2400" dirty="0">
+              <a:latin typeface="Bahnschrift" panose="020B0502040204020203" pitchFamily="34" charset="0"/>
+            </a:endParaRPr>
+          </a:p>
+          <a:p>
+            <a:r>
+              <a:rPr lang="ru-RU" sz="2400" b="1" dirty="0">
+                <a:latin typeface="Bahnschrift" panose="020B0502040204020203" pitchFamily="34" charset="0"/>
+              </a:rPr>
+              <a:t>- Авторы</a:t>
+            </a:r>
+            <a:r>
+              <a:rPr lang="ru-RU" sz="2400" dirty="0">
+                <a:latin typeface="Bahnschrift" panose="020B0502040204020203" pitchFamily="34" charset="0"/>
+              </a:rPr>
+              <a:t> — создают блоги и публикуют статьи;</a:t>
+            </a:r>
+          </a:p>
+          <a:p>
+            <a:r>
+              <a:rPr lang="ru-RU" sz="2400" b="1" dirty="0">
+                <a:latin typeface="Bahnschrift" panose="020B0502040204020203" pitchFamily="34" charset="0"/>
+              </a:rPr>
+              <a:t>- Читатели</a:t>
+            </a:r>
+            <a:r>
+              <a:rPr lang="ru-RU" sz="2400" dirty="0">
+                <a:latin typeface="Bahnschrift" panose="020B0502040204020203" pitchFamily="34" charset="0"/>
+              </a:rPr>
+              <a:t> — читают статьи, комментируют, подписываются;</a:t>
+            </a:r>
+          </a:p>
+          <a:p>
+            <a:r>
+              <a:rPr lang="ru-RU" sz="2400" b="1" dirty="0">
+                <a:latin typeface="Bahnschrift" panose="020B0502040204020203" pitchFamily="34" charset="0"/>
+              </a:rPr>
+              <a:t>- Администратор</a:t>
+            </a:r>
+            <a:r>
+              <a:rPr lang="ru-RU" sz="2400" dirty="0">
+                <a:latin typeface="Bahnschrift" panose="020B0502040204020203" pitchFamily="34" charset="0"/>
+              </a:rPr>
+              <a:t> — управляет пользователями и модерирует контент;</a:t>
+            </a:r>
+          </a:p>
+          <a:p>
+            <a:r>
+              <a:rPr lang="ru-RU" sz="2400" b="1" dirty="0">
+                <a:latin typeface="Bahnschrift" panose="020B0502040204020203" pitchFamily="34" charset="0"/>
+              </a:rPr>
+              <a:t>Основной функционал MVP:</a:t>
+            </a:r>
+            <a:endParaRPr lang="ru-RU" sz="2400" dirty="0">
+              <a:latin typeface="Bahnschrift" panose="020B0502040204020203" pitchFamily="34" charset="0"/>
+            </a:endParaRPr>
+          </a:p>
+          <a:p>
+            <a:pPr marL="342900" indent="-342900">
+              <a:buFont typeface="Arial" panose="020B0604020202020204" pitchFamily="34" charset="0"/>
+              <a:buChar char="•"/>
+            </a:pPr>
+            <a:r>
+              <a:rPr lang="ru-RU" sz="2400" dirty="0">
+                <a:latin typeface="Bahnschrift" panose="020B0502040204020203" pitchFamily="34" charset="0"/>
+              </a:rPr>
+              <a:t>Регистрация и аутентификация;</a:t>
+            </a:r>
+          </a:p>
+          <a:p>
+            <a:pPr marL="342900" indent="-342900">
+              <a:buFont typeface="Arial" panose="020B0604020202020204" pitchFamily="34" charset="0"/>
+              <a:buChar char="•"/>
+            </a:pPr>
+            <a:r>
+              <a:rPr lang="ru-RU" sz="2400" dirty="0">
+                <a:latin typeface="Bahnschrift" panose="020B0502040204020203" pitchFamily="34" charset="0"/>
+              </a:rPr>
+              <a:t>Управление блогом (создание, редактирование);</a:t>
+            </a:r>
+          </a:p>
+          <a:p>
+            <a:pPr marL="342900" indent="-342900">
+              <a:buFont typeface="Arial" panose="020B0604020202020204" pitchFamily="34" charset="0"/>
+              <a:buChar char="•"/>
+            </a:pPr>
+            <a:r>
+              <a:rPr lang="ru-RU" sz="2400" dirty="0">
+                <a:latin typeface="Bahnschrift" panose="020B0502040204020203" pitchFamily="34" charset="0"/>
+              </a:rPr>
+              <a:t>Публикация статей (CRUD);</a:t>
+            </a:r>
+          </a:p>
+          <a:p>
+            <a:pPr marL="342900" indent="-342900">
+              <a:buFont typeface="Arial" panose="020B0604020202020204" pitchFamily="34" charset="0"/>
+              <a:buChar char="•"/>
+            </a:pPr>
+            <a:r>
+              <a:rPr lang="ru-RU" sz="2400" dirty="0">
+                <a:latin typeface="Bahnschrift" panose="020B0502040204020203" pitchFamily="34" charset="0"/>
+              </a:rPr>
+              <a:t>Система комментариев;</a:t>
+            </a:r>
+          </a:p>
+          <a:p>
+            <a:pPr marL="342900" indent="-342900">
+              <a:buFont typeface="Arial" panose="020B0604020202020204" pitchFamily="34" charset="0"/>
+              <a:buChar char="•"/>
+            </a:pPr>
+            <a:r>
+              <a:rPr lang="ru-RU" sz="2400" dirty="0">
+                <a:latin typeface="Bahnschrift" panose="020B0502040204020203" pitchFamily="34" charset="0"/>
+              </a:rPr>
+              <a:t>Админ-панель (блокировка пользователей);</a:t>
+            </a:r>
+          </a:p>
+          <a:p>
+            <a:endParaRPr lang="ru-RU" dirty="0"/>
+          </a:p>
+        </p:txBody>
+      </p:sp>
+      <p:sp>
+        <p:nvSpPr>
+          <p:cNvPr id="3" name="TextBox 2">
+            <a:extLst>
+              <a:ext uri="{FF2B5EF4-FFF2-40B4-BE49-F238E27FC236}">
+                <a16:creationId xmlns:a16="http://schemas.microsoft.com/office/drawing/2014/main" id="{C248BF56-17DF-AD15-E2C4-45EE91A09F82}"/>
+              </a:ext>
+            </a:extLst>
+          </p:cNvPr>
+          <p:cNvSpPr txBox="1"/>
+          <p:nvPr/>
+        </p:nvSpPr>
+        <p:spPr>
+          <a:xfrm>
+            <a:off x="4711700" y="278825"/>
+            <a:ext cx="6555179" cy="584775"/>
+          </a:xfrm>
+          <a:prstGeom prst="rect">
+            <a:avLst/>
+          </a:prstGeom>
+          <a:noFill/>
+        </p:spPr>
+        <p:txBody>
+          <a:bodyPr wrap="square" rtlCol="0">
+            <a:spAutoFit/>
+          </a:bodyPr>
+          <a:lstStyle/>
+          <a:p>
+            <a:r>
+              <a:rPr lang="ru-RU" sz="3200" b="1" dirty="0">
+                <a:latin typeface="Bahnschrift" panose="020B0502040204020203" pitchFamily="34" charset="0"/>
+              </a:rPr>
+              <a:t>Краткое описание приложения</a:t>
+            </a:r>
+          </a:p>
+        </p:txBody>
+      </p:sp>
+      <p:sp>
+        <p:nvSpPr>
+          <p:cNvPr id="5" name="Овал 4">
+            <a:extLst>
+              <a:ext uri="{FF2B5EF4-FFF2-40B4-BE49-F238E27FC236}">
+                <a16:creationId xmlns:a16="http://schemas.microsoft.com/office/drawing/2014/main" id="{A5B5C59C-C74F-6EE4-2FC8-9DF63D022D68}"/>
+              </a:ext>
+            </a:extLst>
+          </p:cNvPr>
+          <p:cNvSpPr/>
+          <p:nvPr/>
+        </p:nvSpPr>
+        <p:spPr>
+          <a:xfrm>
+            <a:off x="11088915" y="5873537"/>
+            <a:ext cx="928914" cy="870857"/>
+          </a:xfrm>
+          <a:prstGeom prst="ellipse">
+            <a:avLst/>
+          </a:prstGeom>
+        </p:spPr>
+        <p:style>
+          <a:lnRef idx="2">
+            <a:schemeClr val="dk1"/>
+          </a:lnRef>
+          <a:fillRef idx="1">
+            <a:schemeClr val="lt1"/>
+          </a:fillRef>
+          <a:effectRef idx="0">
+            <a:schemeClr val="dk1"/>
+          </a:effectRef>
+          <a:fontRef idx="minor">
+            <a:schemeClr val="dk1"/>
+          </a:fontRef>
+        </p:style>
+        <p:txBody>
+          <a:bodyPr rtlCol="0" anchor="ctr"/>
+          <a:lstStyle/>
+          <a:p>
+            <a:pPr algn="ctr"/>
+            <a:r>
+              <a:rPr lang="en-US" sz="4800" b="1" dirty="0">
+                <a:latin typeface="Bahnschrift" panose="020B0502040204020203" pitchFamily="34" charset="0"/>
+              </a:rPr>
+              <a:t>2</a:t>
+            </a:r>
+            <a:endParaRPr lang="ru-RU" sz="4800" b="1" dirty="0">
+              <a:latin typeface="Bahnschrift" panose="020B0502040204020203" pitchFamily="34" charset="0"/>
+            </a:endParaRPr>
+          </a:p>
+        </p:txBody>
+      </p:sp>
+    </p:spTree>
+    <p:extLst>
+      <p:ext uri="{BB962C8B-B14F-4D97-AF65-F5344CB8AC3E}">
+        <p14:creationId xmlns:p14="http://schemas.microsoft.com/office/powerpoint/2010/main" val="1435874274"/>
+      </p:ext>
+    </p:extLst>
+  </p:cSld>
+  <p:clrMapOvr>
+    <a:masterClrMapping/>
+  </p:clrMapOvr>
+  <mc:AlternateContent xmlns:mc="http://schemas.openxmlformats.org/markup-compatibility/2006" xmlns:p159="http://schemas.microsoft.com/office/powerpoint/2015/09/main">
+    <mc:Choice Requires="p159">
+      <p:transition xmlns:p14="http://schemas.microsoft.com/office/powerpoint/2010/main" spd="slow" p14:dur="2000">
+        <p159:morph option="byObject"/>
+      </p:transition>
+    </mc:Choice>
+    <mc:Fallback xmlns="">
+      <p:transition spd="slow">
+        <p:fade/>
+      </p:transition>
+    </mc:Fallback>
+  </mc:AlternateContent>
+</p:sld>
+</file>
+
+<file path=ppt/slides/slide3.xml><?xml version="1.0" encoding="utf-8"?>
+<p:sld xmlns:a="http://schemas.openxmlformats.org/drawingml/2006/main" xmlns:r="http://schemas.openxmlformats.org/officeDocument/2006/relationships" xmlns:p="http://schemas.openxmlformats.org/presentationml/2006/main">
+  <p:cSld>
+    <p:spTree>
+      <p:nvGrpSpPr>
+        <p:cNvPr id="1" name="">
+          <a:extLst>
+            <a:ext uri="{FF2B5EF4-FFF2-40B4-BE49-F238E27FC236}">
+              <a16:creationId xmlns:a16="http://schemas.microsoft.com/office/drawing/2014/main" id="{CFFC0B81-6736-A949-2E10-F678BE459511}"/>
+            </a:ext>
+          </a:extLst>
+        </p:cNvPr>
+        <p:cNvGrpSpPr/>
+        <p:nvPr/>
+      </p:nvGrpSpPr>
+      <p:grpSpPr>
+        <a:xfrm>
+          <a:off x="0" y="0"/>
+          <a:ext cx="0" cy="0"/>
+          <a:chOff x="0" y="0"/>
+          <a:chExt cx="0" cy="0"/>
+        </a:xfrm>
+      </p:grpSpPr>
+      <p:sp>
+        <p:nvSpPr>
+          <p:cNvPr id="6" name="Прямоугольник 5">
+            <a:extLst>
+              <a:ext uri="{FF2B5EF4-FFF2-40B4-BE49-F238E27FC236}">
+                <a16:creationId xmlns:a16="http://schemas.microsoft.com/office/drawing/2014/main" id="{5DCB34BD-BC34-6A75-EF38-CC2DFF263FFE}"/>
+              </a:ext>
+            </a:extLst>
+          </p:cNvPr>
+          <p:cNvSpPr/>
+          <p:nvPr/>
+        </p:nvSpPr>
+        <p:spPr>
+          <a:xfrm>
+            <a:off x="-2235200" y="0"/>
+            <a:ext cx="14427200" cy="6858000"/>
+          </a:xfrm>
+          <a:prstGeom prst="rect">
+            <a:avLst/>
+          </a:prstGeom>
+          <a:solidFill>
+            <a:srgbClr val="CCECFF"/>
+          </a:solidFill>
+        </p:spPr>
+        <p:style>
+          <a:lnRef idx="2">
+            <a:schemeClr val="accent1">
+              <a:shade val="15000"/>
+            </a:schemeClr>
+          </a:lnRef>
+          <a:fillRef idx="1">
+            <a:schemeClr val="accent1"/>
+          </a:fillRef>
+          <a:effectRef idx="0">
+            <a:schemeClr val="accent1"/>
+          </a:effectRef>
+          <a:fontRef idx="minor">
+            <a:schemeClr val="lt1"/>
+          </a:fontRef>
+        </p:style>
+        <p:txBody>
+          <a:bodyPr rtlCol="0" anchor="ctr"/>
+          <a:lstStyle/>
+          <a:p>
+            <a:pPr algn="ctr"/>
+            <a:endParaRPr lang="ru-RU"/>
+          </a:p>
+        </p:txBody>
+      </p:sp>
+      <p:sp>
+        <p:nvSpPr>
+          <p:cNvPr id="7" name="Прямоугольник 6">
+            <a:extLst>
+              <a:ext uri="{FF2B5EF4-FFF2-40B4-BE49-F238E27FC236}">
+                <a16:creationId xmlns:a16="http://schemas.microsoft.com/office/drawing/2014/main" id="{E6997E66-1E4E-B767-7449-A7E78BEF9680}"/>
+              </a:ext>
+            </a:extLst>
+          </p:cNvPr>
+          <p:cNvSpPr/>
+          <p:nvPr/>
+        </p:nvSpPr>
+        <p:spPr>
+          <a:xfrm>
+            <a:off x="-3451101" y="0"/>
+            <a:ext cx="15643101" cy="6858000"/>
+          </a:xfrm>
+          <a:prstGeom prst="rect">
+            <a:avLst/>
+          </a:prstGeom>
+          <a:solidFill>
+            <a:srgbClr val="99CCFF"/>
+          </a:solidFill>
+        </p:spPr>
+        <p:style>
+          <a:lnRef idx="2">
+            <a:schemeClr val="accent1">
+              <a:shade val="15000"/>
+            </a:schemeClr>
+          </a:lnRef>
+          <a:fillRef idx="1">
+            <a:schemeClr val="accent1"/>
+          </a:fillRef>
+          <a:effectRef idx="0">
+            <a:schemeClr val="accent1"/>
+          </a:effectRef>
+          <a:fontRef idx="minor">
+            <a:schemeClr val="lt1"/>
+          </a:fontRef>
+        </p:style>
+        <p:txBody>
+          <a:bodyPr rtlCol="0" anchor="ctr"/>
+          <a:lstStyle/>
+          <a:p>
+            <a:pPr algn="ctr"/>
+            <a:endParaRPr lang="ru-RU"/>
+          </a:p>
+        </p:txBody>
+      </p:sp>
+      <p:sp>
+        <p:nvSpPr>
+          <p:cNvPr id="8" name="Прямоугольник 7">
+            <a:extLst>
+              <a:ext uri="{FF2B5EF4-FFF2-40B4-BE49-F238E27FC236}">
+                <a16:creationId xmlns:a16="http://schemas.microsoft.com/office/drawing/2014/main" id="{1D2AE98D-0520-8E4B-3B03-DBDA05E7C116}"/>
+              </a:ext>
+            </a:extLst>
+          </p:cNvPr>
+          <p:cNvSpPr/>
+          <p:nvPr/>
+        </p:nvSpPr>
+        <p:spPr>
+          <a:xfrm>
+            <a:off x="-4207824" y="0"/>
+            <a:ext cx="6555179" cy="6858000"/>
+          </a:xfrm>
+          <a:prstGeom prst="rect">
+            <a:avLst/>
+          </a:prstGeom>
+          <a:solidFill>
+            <a:srgbClr val="66CCFF"/>
+          </a:solidFill>
+        </p:spPr>
+        <p:style>
+          <a:lnRef idx="2">
+            <a:schemeClr val="accent1">
+              <a:shade val="15000"/>
+            </a:schemeClr>
+          </a:lnRef>
+          <a:fillRef idx="1">
+            <a:schemeClr val="accent1"/>
+          </a:fillRef>
+          <a:effectRef idx="0">
+            <a:schemeClr val="accent1"/>
+          </a:effectRef>
+          <a:fontRef idx="minor">
+            <a:schemeClr val="lt1"/>
+          </a:fontRef>
+        </p:style>
+        <p:txBody>
+          <a:bodyPr rtlCol="0" anchor="ctr"/>
+          <a:lstStyle/>
+          <a:p>
+            <a:pPr algn="ctr"/>
+            <a:endParaRPr lang="ru-RU"/>
+          </a:p>
+        </p:txBody>
+      </p:sp>
+      <p:sp>
+        <p:nvSpPr>
+          <p:cNvPr id="9" name="Прямоугольник 8">
+            <a:extLst>
+              <a:ext uri="{FF2B5EF4-FFF2-40B4-BE49-F238E27FC236}">
+                <a16:creationId xmlns:a16="http://schemas.microsoft.com/office/drawing/2014/main" id="{0D5EBBFF-47EC-034A-D80E-5E242E67E393}"/>
+              </a:ext>
+            </a:extLst>
+          </p:cNvPr>
+          <p:cNvSpPr/>
+          <p:nvPr/>
+        </p:nvSpPr>
+        <p:spPr>
+          <a:xfrm>
+            <a:off x="-4964547" y="0"/>
+            <a:ext cx="6555179" cy="6858000"/>
+          </a:xfrm>
+          <a:prstGeom prst="rect">
+            <a:avLst/>
+          </a:prstGeom>
+          <a:solidFill>
+            <a:srgbClr val="3399FF"/>
+          </a:solidFill>
+        </p:spPr>
+        <p:style>
+          <a:lnRef idx="2">
+            <a:schemeClr val="accent1">
+              <a:shade val="15000"/>
+            </a:schemeClr>
+          </a:lnRef>
+          <a:fillRef idx="1">
+            <a:schemeClr val="accent1"/>
+          </a:fillRef>
+          <a:effectRef idx="0">
+            <a:schemeClr val="accent1"/>
+          </a:effectRef>
+          <a:fontRef idx="minor">
+            <a:schemeClr val="lt1"/>
+          </a:fontRef>
+        </p:style>
+        <p:txBody>
+          <a:bodyPr rtlCol="0" anchor="ctr"/>
+          <a:lstStyle/>
+          <a:p>
+            <a:pPr algn="ctr"/>
+            <a:endParaRPr lang="ru-RU"/>
+          </a:p>
+        </p:txBody>
+      </p:sp>
+      <p:sp>
+        <p:nvSpPr>
+          <p:cNvPr id="10" name="Прямоугольник 9">
+            <a:extLst>
+              <a:ext uri="{FF2B5EF4-FFF2-40B4-BE49-F238E27FC236}">
+                <a16:creationId xmlns:a16="http://schemas.microsoft.com/office/drawing/2014/main" id="{3198E00B-9438-2C6D-2B77-7C1891683286}"/>
+              </a:ext>
+            </a:extLst>
+          </p:cNvPr>
+          <p:cNvSpPr/>
+          <p:nvPr/>
+        </p:nvSpPr>
+        <p:spPr>
+          <a:xfrm>
+            <a:off x="-5742378" y="0"/>
+            <a:ext cx="6555179" cy="6858000"/>
+          </a:xfrm>
+          <a:prstGeom prst="rect">
+            <a:avLst/>
+          </a:prstGeom>
+          <a:solidFill>
+            <a:srgbClr val="0066FF"/>
+          </a:solidFill>
+        </p:spPr>
+        <p:style>
+          <a:lnRef idx="2">
+            <a:schemeClr val="accent1">
+              <a:shade val="15000"/>
+            </a:schemeClr>
+          </a:lnRef>
+          <a:fillRef idx="1">
+            <a:schemeClr val="accent1"/>
+          </a:fillRef>
+          <a:effectRef idx="0">
+            <a:schemeClr val="accent1"/>
+          </a:effectRef>
+          <a:fontRef idx="minor">
+            <a:schemeClr val="lt1"/>
+          </a:fontRef>
+        </p:style>
+        <p:txBody>
+          <a:bodyPr rtlCol="0" anchor="ctr"/>
+          <a:lstStyle/>
+          <a:p>
+            <a:pPr algn="ctr"/>
+            <a:endParaRPr lang="ru-RU"/>
+          </a:p>
+        </p:txBody>
+      </p:sp>
+      <p:sp>
+        <p:nvSpPr>
+          <p:cNvPr id="3" name="TextBox 2">
+            <a:extLst>
+              <a:ext uri="{FF2B5EF4-FFF2-40B4-BE49-F238E27FC236}">
+                <a16:creationId xmlns:a16="http://schemas.microsoft.com/office/drawing/2014/main" id="{09CA7E7C-FEFE-AEC9-9D65-AFA5C099AF3E}"/>
+              </a:ext>
+            </a:extLst>
+          </p:cNvPr>
+          <p:cNvSpPr txBox="1"/>
+          <p:nvPr/>
+        </p:nvSpPr>
+        <p:spPr>
+          <a:xfrm>
+            <a:off x="4370449" y="266125"/>
+            <a:ext cx="6555179" cy="584775"/>
+          </a:xfrm>
+          <a:prstGeom prst="rect">
+            <a:avLst/>
+          </a:prstGeom>
+          <a:noFill/>
+        </p:spPr>
+        <p:txBody>
+          <a:bodyPr wrap="square" rtlCol="0">
+            <a:spAutoFit/>
+          </a:bodyPr>
+          <a:lstStyle/>
+          <a:p>
+            <a:r>
+              <a:rPr lang="ru-RU" sz="3200" b="1" dirty="0">
+                <a:latin typeface="Bahnschrift" panose="020B0502040204020203" pitchFamily="34" charset="0"/>
+              </a:rPr>
+              <a:t>Структура файлов проекта</a:t>
+            </a:r>
+          </a:p>
+        </p:txBody>
+      </p:sp>
+      <p:pic>
+        <p:nvPicPr>
+          <p:cNvPr id="5" name="Рисунок 4">
+            <a:extLst>
+              <a:ext uri="{FF2B5EF4-FFF2-40B4-BE49-F238E27FC236}">
+                <a16:creationId xmlns:a16="http://schemas.microsoft.com/office/drawing/2014/main" id="{F579D325-3212-E4AF-676C-93FDE32769A1}"/>
+              </a:ext>
+            </a:extLst>
+          </p:cNvPr>
+          <p:cNvPicPr>
+            <a:picLocks noChangeAspect="1"/>
+          </p:cNvPicPr>
+          <p:nvPr/>
+        </p:nvPicPr>
+        <p:blipFill>
+          <a:blip r:embed="rId2"/>
+          <a:stretch>
+            <a:fillRect/>
+          </a:stretch>
+        </p:blipFill>
+        <p:spPr>
+          <a:xfrm>
+            <a:off x="3423556" y="990025"/>
+            <a:ext cx="7352228" cy="5490920"/>
+          </a:xfrm>
+          <a:prstGeom prst="rect">
+            <a:avLst/>
+          </a:prstGeom>
+        </p:spPr>
+      </p:pic>
+      <p:sp>
+        <p:nvSpPr>
+          <p:cNvPr id="2" name="Овал 1">
+            <a:extLst>
+              <a:ext uri="{FF2B5EF4-FFF2-40B4-BE49-F238E27FC236}">
+                <a16:creationId xmlns:a16="http://schemas.microsoft.com/office/drawing/2014/main" id="{91A6A492-0560-3B62-CB81-551711450C67}"/>
+              </a:ext>
+            </a:extLst>
+          </p:cNvPr>
+          <p:cNvSpPr/>
+          <p:nvPr/>
+        </p:nvSpPr>
+        <p:spPr>
+          <a:xfrm>
+            <a:off x="11062771" y="5863771"/>
+            <a:ext cx="928914" cy="870857"/>
+          </a:xfrm>
+          <a:prstGeom prst="ellipse">
+            <a:avLst/>
+          </a:prstGeom>
+        </p:spPr>
+        <p:style>
+          <a:lnRef idx="2">
+            <a:schemeClr val="dk1"/>
+          </a:lnRef>
+          <a:fillRef idx="1">
+            <a:schemeClr val="lt1"/>
+          </a:fillRef>
+          <a:effectRef idx="0">
+            <a:schemeClr val="dk1"/>
+          </a:effectRef>
+          <a:fontRef idx="minor">
+            <a:schemeClr val="dk1"/>
+          </a:fontRef>
+        </p:style>
+        <p:txBody>
+          <a:bodyPr rtlCol="0" anchor="ctr"/>
+          <a:lstStyle/>
+          <a:p>
+            <a:pPr algn="ctr"/>
+            <a:r>
+              <a:rPr lang="en-US" sz="4800" b="1" dirty="0">
+                <a:latin typeface="Bahnschrift" panose="020B0502040204020203" pitchFamily="34" charset="0"/>
+              </a:rPr>
+              <a:t>3</a:t>
+            </a:r>
+            <a:endParaRPr lang="ru-RU" sz="4800" b="1" dirty="0">
+              <a:latin typeface="Bahnschrift" panose="020B0502040204020203" pitchFamily="34" charset="0"/>
+            </a:endParaRPr>
+          </a:p>
+        </p:txBody>
+      </p:sp>
+    </p:spTree>
+    <p:extLst>
+      <p:ext uri="{BB962C8B-B14F-4D97-AF65-F5344CB8AC3E}">
+        <p14:creationId xmlns:p14="http://schemas.microsoft.com/office/powerpoint/2010/main" val="545565142"/>
+      </p:ext>
+    </p:extLst>
+  </p:cSld>
+  <p:clrMapOvr>
+    <a:masterClrMapping/>
+  </p:clrMapOvr>
+  <mc:AlternateContent xmlns:mc="http://schemas.openxmlformats.org/markup-compatibility/2006" xmlns:p159="http://schemas.microsoft.com/office/powerpoint/2015/09/main">
+    <mc:Choice Requires="p159">
+      <p:transition xmlns:p14="http://schemas.microsoft.com/office/powerpoint/2010/main" spd="slow" p14:dur="2000">
+        <p159:morph option="byObject"/>
+      </p:transition>
+    </mc:Choice>
+    <mc:Fallback xmlns="">
+      <p:transition spd="slow">
+        <p:fade/>
+      </p:transition>
+    </mc:Fallback>
+  </mc:AlternateContent>
+</p:sld>
+</file>
+
+<file path=ppt/slides/slide4.xml><?xml version="1.0" encoding="utf-8"?>
+<p:sld xmlns:a="http://schemas.openxmlformats.org/drawingml/2006/main" xmlns:r="http://schemas.openxmlformats.org/officeDocument/2006/relationships" xmlns:p="http://schemas.openxmlformats.org/presentationml/2006/main">
+  <p:cSld>
+    <p:spTree>
+      <p:nvGrpSpPr>
+        <p:cNvPr id="1" name="">
+          <a:extLst>
+            <a:ext uri="{FF2B5EF4-FFF2-40B4-BE49-F238E27FC236}">
+              <a16:creationId xmlns:a16="http://schemas.microsoft.com/office/drawing/2014/main" id="{7EFE9F0E-EFB5-4DD4-9CB6-52B812B4CEBA}"/>
+            </a:ext>
+          </a:extLst>
+        </p:cNvPr>
+        <p:cNvGrpSpPr/>
+        <p:nvPr/>
+      </p:nvGrpSpPr>
+      <p:grpSpPr>
+        <a:xfrm>
+          <a:off x="0" y="0"/>
+          <a:ext cx="0" cy="0"/>
+          <a:chOff x="0" y="0"/>
+          <a:chExt cx="0" cy="0"/>
+        </a:xfrm>
+      </p:grpSpPr>
+      <p:sp>
+        <p:nvSpPr>
+          <p:cNvPr id="6" name="Прямоугольник 5">
+            <a:extLst>
+              <a:ext uri="{FF2B5EF4-FFF2-40B4-BE49-F238E27FC236}">
+                <a16:creationId xmlns:a16="http://schemas.microsoft.com/office/drawing/2014/main" id="{B31EB5B9-241C-081A-058A-05A5505FD21C}"/>
+              </a:ext>
+            </a:extLst>
+          </p:cNvPr>
+          <p:cNvSpPr/>
+          <p:nvPr/>
+        </p:nvSpPr>
+        <p:spPr>
+          <a:xfrm>
+            <a:off x="-2235200" y="0"/>
+            <a:ext cx="14427200" cy="6858000"/>
+          </a:xfrm>
+          <a:prstGeom prst="rect">
+            <a:avLst/>
+          </a:prstGeom>
+          <a:solidFill>
+            <a:srgbClr val="CCECFF"/>
+          </a:solidFill>
+        </p:spPr>
+        <p:style>
+          <a:lnRef idx="2">
+            <a:schemeClr val="accent1">
+              <a:shade val="15000"/>
+            </a:schemeClr>
+          </a:lnRef>
+          <a:fillRef idx="1">
+            <a:schemeClr val="accent1"/>
+          </a:fillRef>
+          <a:effectRef idx="0">
+            <a:schemeClr val="accent1"/>
+          </a:effectRef>
+          <a:fontRef idx="minor">
+            <a:schemeClr val="lt1"/>
+          </a:fontRef>
+        </p:style>
+        <p:txBody>
+          <a:bodyPr rtlCol="0" anchor="ctr"/>
+          <a:lstStyle/>
+          <a:p>
+            <a:pPr algn="ctr"/>
+            <a:endParaRPr lang="ru-RU"/>
+          </a:p>
+        </p:txBody>
+      </p:sp>
+      <p:sp>
+        <p:nvSpPr>
+          <p:cNvPr id="7" name="Прямоугольник 6">
+            <a:extLst>
+              <a:ext uri="{FF2B5EF4-FFF2-40B4-BE49-F238E27FC236}">
+                <a16:creationId xmlns:a16="http://schemas.microsoft.com/office/drawing/2014/main" id="{61ABA91F-7A76-FB3F-274B-4FB26E30B948}"/>
+              </a:ext>
+            </a:extLst>
+          </p:cNvPr>
+          <p:cNvSpPr/>
+          <p:nvPr/>
+        </p:nvSpPr>
+        <p:spPr>
+          <a:xfrm>
+            <a:off x="-3451101" y="0"/>
+            <a:ext cx="15643101" cy="6858000"/>
+          </a:xfrm>
+          <a:prstGeom prst="rect">
+            <a:avLst/>
+          </a:prstGeom>
+          <a:solidFill>
+            <a:srgbClr val="99CCFF"/>
+          </a:solidFill>
+        </p:spPr>
+        <p:style>
+          <a:lnRef idx="2">
+            <a:schemeClr val="accent1">
+              <a:shade val="15000"/>
+            </a:schemeClr>
+          </a:lnRef>
+          <a:fillRef idx="1">
+            <a:schemeClr val="accent1"/>
+          </a:fillRef>
+          <a:effectRef idx="0">
+            <a:schemeClr val="accent1"/>
+          </a:effectRef>
+          <a:fontRef idx="minor">
+            <a:schemeClr val="lt1"/>
+          </a:fontRef>
+        </p:style>
+        <p:txBody>
+          <a:bodyPr rtlCol="0" anchor="ctr"/>
+          <a:lstStyle/>
+          <a:p>
+            <a:pPr algn="ctr"/>
+            <a:endParaRPr lang="ru-RU"/>
+          </a:p>
+        </p:txBody>
+      </p:sp>
+      <p:sp>
+        <p:nvSpPr>
+          <p:cNvPr id="8" name="Прямоугольник 7">
+            <a:extLst>
+              <a:ext uri="{FF2B5EF4-FFF2-40B4-BE49-F238E27FC236}">
+                <a16:creationId xmlns:a16="http://schemas.microsoft.com/office/drawing/2014/main" id="{C57E39F8-7C65-1C6E-CBB6-67E1ACC20725}"/>
+              </a:ext>
+            </a:extLst>
+          </p:cNvPr>
+          <p:cNvSpPr/>
+          <p:nvPr/>
+        </p:nvSpPr>
+        <p:spPr>
+          <a:xfrm>
+            <a:off x="-4207824" y="0"/>
+            <a:ext cx="6555179" cy="6858000"/>
+          </a:xfrm>
+          <a:prstGeom prst="rect">
+            <a:avLst/>
+          </a:prstGeom>
+          <a:solidFill>
+            <a:srgbClr val="66CCFF"/>
+          </a:solidFill>
+        </p:spPr>
+        <p:style>
+          <a:lnRef idx="2">
+            <a:schemeClr val="accent1">
+              <a:shade val="15000"/>
+            </a:schemeClr>
+          </a:lnRef>
+          <a:fillRef idx="1">
+            <a:schemeClr val="accent1"/>
+          </a:fillRef>
+          <a:effectRef idx="0">
+            <a:schemeClr val="accent1"/>
+          </a:effectRef>
+          <a:fontRef idx="minor">
+            <a:schemeClr val="lt1"/>
+          </a:fontRef>
+        </p:style>
+        <p:txBody>
+          <a:bodyPr rtlCol="0" anchor="ctr"/>
+          <a:lstStyle/>
+          <a:p>
+            <a:pPr algn="ctr"/>
+            <a:endParaRPr lang="ru-RU"/>
+          </a:p>
+        </p:txBody>
+      </p:sp>
+      <p:sp>
+        <p:nvSpPr>
+          <p:cNvPr id="9" name="Прямоугольник 8">
+            <a:extLst>
+              <a:ext uri="{FF2B5EF4-FFF2-40B4-BE49-F238E27FC236}">
+                <a16:creationId xmlns:a16="http://schemas.microsoft.com/office/drawing/2014/main" id="{92E163D5-80DE-7AFF-BAA7-61EA9E998776}"/>
+              </a:ext>
+            </a:extLst>
+          </p:cNvPr>
+          <p:cNvSpPr/>
+          <p:nvPr/>
+        </p:nvSpPr>
+        <p:spPr>
+          <a:xfrm>
+            <a:off x="-4964547" y="0"/>
+            <a:ext cx="6555179" cy="6858000"/>
+          </a:xfrm>
+          <a:prstGeom prst="rect">
+            <a:avLst/>
+          </a:prstGeom>
+          <a:solidFill>
+            <a:srgbClr val="3399FF"/>
+          </a:solidFill>
+        </p:spPr>
+        <p:style>
+          <a:lnRef idx="2">
+            <a:schemeClr val="accent1">
+              <a:shade val="15000"/>
+            </a:schemeClr>
+          </a:lnRef>
+          <a:fillRef idx="1">
+            <a:schemeClr val="accent1"/>
+          </a:fillRef>
+          <a:effectRef idx="0">
+            <a:schemeClr val="accent1"/>
+          </a:effectRef>
+          <a:fontRef idx="minor">
+            <a:schemeClr val="lt1"/>
+          </a:fontRef>
+        </p:style>
+        <p:txBody>
+          <a:bodyPr rtlCol="0" anchor="ctr"/>
+          <a:lstStyle/>
+          <a:p>
+            <a:pPr algn="ctr"/>
+            <a:endParaRPr lang="ru-RU"/>
+          </a:p>
+        </p:txBody>
+      </p:sp>
+      <p:sp>
+        <p:nvSpPr>
+          <p:cNvPr id="10" name="Прямоугольник 9">
+            <a:extLst>
+              <a:ext uri="{FF2B5EF4-FFF2-40B4-BE49-F238E27FC236}">
+                <a16:creationId xmlns:a16="http://schemas.microsoft.com/office/drawing/2014/main" id="{60C2EDA4-C0E7-18DC-FFF6-1F97994CEAC6}"/>
+              </a:ext>
+            </a:extLst>
+          </p:cNvPr>
+          <p:cNvSpPr/>
+          <p:nvPr/>
+        </p:nvSpPr>
+        <p:spPr>
+          <a:xfrm>
+            <a:off x="-5742378" y="0"/>
+            <a:ext cx="6555179" cy="6858000"/>
+          </a:xfrm>
+          <a:prstGeom prst="rect">
+            <a:avLst/>
+          </a:prstGeom>
+          <a:solidFill>
+            <a:srgbClr val="0066FF"/>
+          </a:solidFill>
+        </p:spPr>
+        <p:style>
+          <a:lnRef idx="2">
+            <a:schemeClr val="accent1">
+              <a:shade val="15000"/>
+            </a:schemeClr>
+          </a:lnRef>
+          <a:fillRef idx="1">
+            <a:schemeClr val="accent1"/>
+          </a:fillRef>
+          <a:effectRef idx="0">
+            <a:schemeClr val="accent1"/>
+          </a:effectRef>
+          <a:fontRef idx="minor">
+            <a:schemeClr val="lt1"/>
+          </a:fontRef>
+        </p:style>
+        <p:txBody>
+          <a:bodyPr rtlCol="0" anchor="ctr"/>
+          <a:lstStyle/>
+          <a:p>
+            <a:pPr algn="ctr"/>
+            <a:endParaRPr lang="ru-RU"/>
+          </a:p>
+        </p:txBody>
+      </p:sp>
+      <p:sp>
+        <p:nvSpPr>
+          <p:cNvPr id="3" name="TextBox 2">
+            <a:extLst>
+              <a:ext uri="{FF2B5EF4-FFF2-40B4-BE49-F238E27FC236}">
+                <a16:creationId xmlns:a16="http://schemas.microsoft.com/office/drawing/2014/main" id="{6ACF6116-9523-33B1-BAE8-392399DD76CA}"/>
+              </a:ext>
+            </a:extLst>
+          </p:cNvPr>
+          <p:cNvSpPr txBox="1"/>
+          <p:nvPr/>
+        </p:nvSpPr>
+        <p:spPr>
+          <a:xfrm>
+            <a:off x="3543104" y="258252"/>
+            <a:ext cx="7749010" cy="584775"/>
+          </a:xfrm>
+          <a:prstGeom prst="rect">
+            <a:avLst/>
+          </a:prstGeom>
+          <a:noFill/>
+        </p:spPr>
+        <p:txBody>
+          <a:bodyPr wrap="square" rtlCol="0">
+            <a:spAutoFit/>
+          </a:bodyPr>
+          <a:lstStyle/>
+          <a:p>
+            <a:pPr latinLnBrk="1"/>
+            <a:r>
+              <a:rPr lang="ru-RU" sz="3200" b="1" dirty="0">
+                <a:latin typeface="Bahnschrift" panose="020B0502040204020203" pitchFamily="34" charset="0"/>
+              </a:rPr>
+              <a:t>Единая точка входа  </a:t>
+            </a:r>
+            <a:r>
+              <a:rPr lang="en-US" sz="3200" b="1" dirty="0">
+                <a:latin typeface="Bahnschrift" panose="020B0502040204020203" pitchFamily="34" charset="0"/>
+              </a:rPr>
+              <a:t>(project/index.php)</a:t>
+            </a:r>
+            <a:endParaRPr lang="ru-RU" sz="3200" b="1" dirty="0">
+              <a:latin typeface="Bahnschrift" panose="020B0502040204020203" pitchFamily="34" charset="0"/>
+            </a:endParaRPr>
+          </a:p>
+        </p:txBody>
+      </p:sp>
+      <p:pic>
+        <p:nvPicPr>
+          <p:cNvPr id="5" name="Рисунок 4">
+            <a:extLst>
+              <a:ext uri="{FF2B5EF4-FFF2-40B4-BE49-F238E27FC236}">
+                <a16:creationId xmlns:a16="http://schemas.microsoft.com/office/drawing/2014/main" id="{690B5DC6-8134-DDA5-CC02-6141AE45A6E5}"/>
+              </a:ext>
+            </a:extLst>
+          </p:cNvPr>
+          <p:cNvPicPr>
+            <a:picLocks noChangeAspect="1"/>
+          </p:cNvPicPr>
+          <p:nvPr/>
+        </p:nvPicPr>
+        <p:blipFill>
+          <a:blip r:embed="rId2"/>
+          <a:stretch>
+            <a:fillRect/>
+          </a:stretch>
+        </p:blipFill>
+        <p:spPr>
+          <a:xfrm>
+            <a:off x="14320156" y="1018140"/>
+            <a:ext cx="7352228" cy="5490920"/>
+          </a:xfrm>
+          <a:prstGeom prst="rect">
+            <a:avLst/>
+          </a:prstGeom>
+        </p:spPr>
+      </p:pic>
+      <p:pic>
+        <p:nvPicPr>
+          <p:cNvPr id="4" name="Рисунок 3">
+            <a:extLst>
+              <a:ext uri="{FF2B5EF4-FFF2-40B4-BE49-F238E27FC236}">
+                <a16:creationId xmlns:a16="http://schemas.microsoft.com/office/drawing/2014/main" id="{BEA5E01E-B8BF-49A6-A7D9-B4E0F2396867}"/>
+              </a:ext>
+            </a:extLst>
+          </p:cNvPr>
+          <p:cNvPicPr>
+            <a:picLocks noChangeAspect="1"/>
+          </p:cNvPicPr>
+          <p:nvPr/>
+        </p:nvPicPr>
+        <p:blipFill>
+          <a:blip r:embed="rId3"/>
+          <a:stretch>
+            <a:fillRect/>
+          </a:stretch>
+        </p:blipFill>
+        <p:spPr>
+          <a:xfrm>
+            <a:off x="3543104" y="1117025"/>
+            <a:ext cx="7578433" cy="5174590"/>
+          </a:xfrm>
+          <a:prstGeom prst="rect">
+            <a:avLst/>
+          </a:prstGeom>
+        </p:spPr>
+      </p:pic>
+      <p:sp>
+        <p:nvSpPr>
+          <p:cNvPr id="12" name="Овал 11">
+            <a:extLst>
+              <a:ext uri="{FF2B5EF4-FFF2-40B4-BE49-F238E27FC236}">
+                <a16:creationId xmlns:a16="http://schemas.microsoft.com/office/drawing/2014/main" id="{09C33A8B-3787-79ED-AB96-C1A7F9ED0C29}"/>
+              </a:ext>
+            </a:extLst>
+          </p:cNvPr>
+          <p:cNvSpPr/>
+          <p:nvPr/>
+        </p:nvSpPr>
+        <p:spPr>
+          <a:xfrm>
+            <a:off x="11192311" y="5856186"/>
+            <a:ext cx="928914" cy="870857"/>
+          </a:xfrm>
+          <a:prstGeom prst="ellipse">
+            <a:avLst/>
+          </a:prstGeom>
+        </p:spPr>
+        <p:style>
+          <a:lnRef idx="2">
+            <a:schemeClr val="dk1"/>
+          </a:lnRef>
+          <a:fillRef idx="1">
+            <a:schemeClr val="lt1"/>
+          </a:fillRef>
+          <a:effectRef idx="0">
+            <a:schemeClr val="dk1"/>
+          </a:effectRef>
+          <a:fontRef idx="minor">
+            <a:schemeClr val="dk1"/>
+          </a:fontRef>
+        </p:style>
+        <p:txBody>
+          <a:bodyPr rtlCol="0" anchor="ctr"/>
+          <a:lstStyle/>
+          <a:p>
+            <a:pPr algn="ctr"/>
+            <a:r>
+              <a:rPr lang="en-US" sz="4800" b="1" dirty="0">
+                <a:latin typeface="Bahnschrift" panose="020B0502040204020203" pitchFamily="34" charset="0"/>
+              </a:rPr>
+              <a:t>4</a:t>
+            </a:r>
+            <a:endParaRPr lang="ru-RU" sz="4800" b="1" dirty="0">
+              <a:latin typeface="Bahnschrift" panose="020B0502040204020203" pitchFamily="34" charset="0"/>
+            </a:endParaRPr>
+          </a:p>
+        </p:txBody>
+      </p:sp>
+    </p:spTree>
+    <p:extLst>
+      <p:ext uri="{BB962C8B-B14F-4D97-AF65-F5344CB8AC3E}">
+        <p14:creationId xmlns:p14="http://schemas.microsoft.com/office/powerpoint/2010/main" val="4209542374"/>
+      </p:ext>
+    </p:extLst>
+  </p:cSld>
+  <p:clrMapOvr>
+    <a:masterClrMapping/>
+  </p:clrMapOvr>
+  <mc:AlternateContent xmlns:mc="http://schemas.openxmlformats.org/markup-compatibility/2006">
+    <mc:Choice xmlns:p159="http://schemas.microsoft.com/office/powerpoint/2015/09/main" Requires="p159">
+      <p:transition xmlns:p14="http://schemas.microsoft.com/office/powerpoint/2010/main" spd="slow" p14:dur="2000">
+        <p159:morph option="byObject"/>
+      </p:transition>
+    </mc:Choice>
+    <mc:Fallback>
+      <p:transition spd="slow">
+        <p:fade/>
+      </p:transition>
+    </mc:Fallback>
+  </mc:AlternateContent>
+</p:sld>
+</file>
+
+<file path=ppt/slides/slide5.xml><?xml version="1.0" encoding="utf-8"?>
+<p:sld xmlns:a="http://schemas.openxmlformats.org/drawingml/2006/main" xmlns:r="http://schemas.openxmlformats.org/officeDocument/2006/relationships" xmlns:p="http://schemas.openxmlformats.org/presentationml/2006/main">
+  <p:cSld>
+    <p:spTree>
+      <p:nvGrpSpPr>
+        <p:cNvPr id="1" name="">
+          <a:extLst>
+            <a:ext uri="{FF2B5EF4-FFF2-40B4-BE49-F238E27FC236}">
+              <a16:creationId xmlns:a16="http://schemas.microsoft.com/office/drawing/2014/main" id="{2A5E1470-5A81-6AC0-63D7-7A5FC3B1D49B}"/>
+            </a:ext>
+          </a:extLst>
+        </p:cNvPr>
+        <p:cNvGrpSpPr/>
+        <p:nvPr/>
+      </p:nvGrpSpPr>
+      <p:grpSpPr>
+        <a:xfrm>
+          <a:off x="0" y="0"/>
+          <a:ext cx="0" cy="0"/>
+          <a:chOff x="0" y="0"/>
+          <a:chExt cx="0" cy="0"/>
+        </a:xfrm>
+      </p:grpSpPr>
+      <p:sp>
+        <p:nvSpPr>
+          <p:cNvPr id="6" name="Прямоугольник 5">
+            <a:extLst>
+              <a:ext uri="{FF2B5EF4-FFF2-40B4-BE49-F238E27FC236}">
+                <a16:creationId xmlns:a16="http://schemas.microsoft.com/office/drawing/2014/main" id="{39567C32-1F96-E8A6-2037-81B09CC85EC6}"/>
+              </a:ext>
+            </a:extLst>
+          </p:cNvPr>
+          <p:cNvSpPr/>
+          <p:nvPr/>
+        </p:nvSpPr>
+        <p:spPr>
+          <a:xfrm>
+            <a:off x="-2235200" y="0"/>
+            <a:ext cx="14427200" cy="6858000"/>
+          </a:xfrm>
+          <a:prstGeom prst="rect">
+            <a:avLst/>
+          </a:prstGeom>
+          <a:solidFill>
+            <a:srgbClr val="CCECFF"/>
+          </a:solidFill>
+        </p:spPr>
+        <p:style>
+          <a:lnRef idx="2">
+            <a:schemeClr val="accent1">
+              <a:shade val="15000"/>
+            </a:schemeClr>
+          </a:lnRef>
+          <a:fillRef idx="1">
+            <a:schemeClr val="accent1"/>
+          </a:fillRef>
+          <a:effectRef idx="0">
+            <a:schemeClr val="accent1"/>
+          </a:effectRef>
+          <a:fontRef idx="minor">
+            <a:schemeClr val="lt1"/>
+          </a:fontRef>
+        </p:style>
+        <p:txBody>
+          <a:bodyPr rtlCol="0" anchor="ctr"/>
+          <a:lstStyle/>
+          <a:p>
+            <a:pPr algn="ctr"/>
+            <a:endParaRPr lang="ru-RU"/>
+          </a:p>
+        </p:txBody>
+      </p:sp>
+      <p:sp>
+        <p:nvSpPr>
+          <p:cNvPr id="7" name="Прямоугольник 6">
+            <a:extLst>
+              <a:ext uri="{FF2B5EF4-FFF2-40B4-BE49-F238E27FC236}">
+                <a16:creationId xmlns:a16="http://schemas.microsoft.com/office/drawing/2014/main" id="{9AA697BD-874A-6F26-E916-FF26CF4EEDBA}"/>
+              </a:ext>
+            </a:extLst>
+          </p:cNvPr>
+          <p:cNvSpPr/>
+          <p:nvPr/>
+        </p:nvSpPr>
+        <p:spPr>
+          <a:xfrm>
+            <a:off x="-3451101" y="0"/>
+            <a:ext cx="15643101" cy="6858000"/>
+          </a:xfrm>
+          <a:prstGeom prst="rect">
+            <a:avLst/>
+          </a:prstGeom>
+          <a:solidFill>
+            <a:srgbClr val="99CCFF"/>
+          </a:solidFill>
+        </p:spPr>
+        <p:style>
+          <a:lnRef idx="2">
+            <a:schemeClr val="accent1">
+              <a:shade val="15000"/>
+            </a:schemeClr>
+          </a:lnRef>
+          <a:fillRef idx="1">
+            <a:schemeClr val="accent1"/>
+          </a:fillRef>
+          <a:effectRef idx="0">
+            <a:schemeClr val="accent1"/>
+          </a:effectRef>
+          <a:fontRef idx="minor">
+            <a:schemeClr val="lt1"/>
+          </a:fontRef>
+        </p:style>
+        <p:txBody>
+          <a:bodyPr rtlCol="0" anchor="ctr"/>
+          <a:lstStyle/>
+          <a:p>
+            <a:pPr algn="ctr"/>
+            <a:endParaRPr lang="ru-RU"/>
+          </a:p>
+        </p:txBody>
+      </p:sp>
+      <p:sp>
+        <p:nvSpPr>
+          <p:cNvPr id="8" name="Прямоугольник 7">
+            <a:extLst>
+              <a:ext uri="{FF2B5EF4-FFF2-40B4-BE49-F238E27FC236}">
+                <a16:creationId xmlns:a16="http://schemas.microsoft.com/office/drawing/2014/main" id="{084E39CA-ACFD-49DD-6620-DEB235E20352}"/>
+              </a:ext>
+            </a:extLst>
+          </p:cNvPr>
+          <p:cNvSpPr/>
+          <p:nvPr/>
+        </p:nvSpPr>
+        <p:spPr>
+          <a:xfrm>
+            <a:off x="-4207824" y="0"/>
+            <a:ext cx="6555179" cy="6858000"/>
+          </a:xfrm>
+          <a:prstGeom prst="rect">
+            <a:avLst/>
+          </a:prstGeom>
+          <a:solidFill>
+            <a:srgbClr val="66CCFF"/>
+          </a:solidFill>
+        </p:spPr>
+        <p:style>
+          <a:lnRef idx="2">
+            <a:schemeClr val="accent1">
+              <a:shade val="15000"/>
+            </a:schemeClr>
+          </a:lnRef>
+          <a:fillRef idx="1">
+            <a:schemeClr val="accent1"/>
+          </a:fillRef>
+          <a:effectRef idx="0">
+            <a:schemeClr val="accent1"/>
+          </a:effectRef>
+          <a:fontRef idx="minor">
+            <a:schemeClr val="lt1"/>
+          </a:fontRef>
+        </p:style>
+        <p:txBody>
+          <a:bodyPr rtlCol="0" anchor="ctr"/>
+          <a:lstStyle/>
+          <a:p>
+            <a:pPr algn="ctr"/>
+            <a:endParaRPr lang="ru-RU"/>
+          </a:p>
+        </p:txBody>
+      </p:sp>
+      <p:sp>
+        <p:nvSpPr>
+          <p:cNvPr id="9" name="Прямоугольник 8">
+            <a:extLst>
+              <a:ext uri="{FF2B5EF4-FFF2-40B4-BE49-F238E27FC236}">
+                <a16:creationId xmlns:a16="http://schemas.microsoft.com/office/drawing/2014/main" id="{855E039E-6965-BD91-AEEC-9F4FDDD22C29}"/>
+              </a:ext>
+            </a:extLst>
+          </p:cNvPr>
+          <p:cNvSpPr/>
+          <p:nvPr/>
+        </p:nvSpPr>
+        <p:spPr>
+          <a:xfrm>
+            <a:off x="-4964547" y="0"/>
+            <a:ext cx="6555179" cy="6858000"/>
+          </a:xfrm>
+          <a:prstGeom prst="rect">
+            <a:avLst/>
+          </a:prstGeom>
+          <a:solidFill>
+            <a:srgbClr val="3399FF"/>
+          </a:solidFill>
+        </p:spPr>
+        <p:style>
+          <a:lnRef idx="2">
+            <a:schemeClr val="accent1">
+              <a:shade val="15000"/>
+            </a:schemeClr>
+          </a:lnRef>
+          <a:fillRef idx="1">
+            <a:schemeClr val="accent1"/>
+          </a:fillRef>
+          <a:effectRef idx="0">
+            <a:schemeClr val="accent1"/>
+          </a:effectRef>
+          <a:fontRef idx="minor">
+            <a:schemeClr val="lt1"/>
+          </a:fontRef>
+        </p:style>
+        <p:txBody>
+          <a:bodyPr rtlCol="0" anchor="ctr"/>
+          <a:lstStyle/>
+          <a:p>
+            <a:pPr algn="ctr"/>
+            <a:endParaRPr lang="ru-RU"/>
+          </a:p>
+        </p:txBody>
+      </p:sp>
+      <p:sp>
+        <p:nvSpPr>
+          <p:cNvPr id="10" name="Прямоугольник 9">
+            <a:extLst>
+              <a:ext uri="{FF2B5EF4-FFF2-40B4-BE49-F238E27FC236}">
+                <a16:creationId xmlns:a16="http://schemas.microsoft.com/office/drawing/2014/main" id="{CB0B0780-0C22-8178-F3ED-D955437D7D28}"/>
+              </a:ext>
+            </a:extLst>
+          </p:cNvPr>
+          <p:cNvSpPr/>
+          <p:nvPr/>
+        </p:nvSpPr>
+        <p:spPr>
+          <a:xfrm>
+            <a:off x="-5742378" y="0"/>
+            <a:ext cx="6555179" cy="6858000"/>
+          </a:xfrm>
+          <a:prstGeom prst="rect">
+            <a:avLst/>
+          </a:prstGeom>
+          <a:solidFill>
+            <a:srgbClr val="0066FF"/>
+          </a:solidFill>
+        </p:spPr>
+        <p:style>
+          <a:lnRef idx="2">
+            <a:schemeClr val="accent1">
+              <a:shade val="15000"/>
+            </a:schemeClr>
+          </a:lnRef>
+          <a:fillRef idx="1">
+            <a:schemeClr val="accent1"/>
+          </a:fillRef>
+          <a:effectRef idx="0">
+            <a:schemeClr val="accent1"/>
+          </a:effectRef>
+          <a:fontRef idx="minor">
+            <a:schemeClr val="lt1"/>
+          </a:fontRef>
+        </p:style>
+        <p:txBody>
+          <a:bodyPr rtlCol="0" anchor="ctr"/>
+          <a:lstStyle/>
+          <a:p>
+            <a:pPr algn="ctr"/>
+            <a:endParaRPr lang="ru-RU"/>
+          </a:p>
+        </p:txBody>
+      </p:sp>
+      <p:sp>
+        <p:nvSpPr>
+          <p:cNvPr id="3" name="TextBox 2">
+            <a:extLst>
+              <a:ext uri="{FF2B5EF4-FFF2-40B4-BE49-F238E27FC236}">
+                <a16:creationId xmlns:a16="http://schemas.microsoft.com/office/drawing/2014/main" id="{3E5C8705-7BA0-93D5-3913-486C1E435E16}"/>
+              </a:ext>
+            </a:extLst>
+          </p:cNvPr>
+          <p:cNvSpPr txBox="1"/>
+          <p:nvPr/>
+        </p:nvSpPr>
+        <p:spPr>
+          <a:xfrm>
+            <a:off x="3094989" y="419634"/>
+            <a:ext cx="8748668" cy="584775"/>
+          </a:xfrm>
+          <a:prstGeom prst="rect">
+            <a:avLst/>
+          </a:prstGeom>
+          <a:noFill/>
+        </p:spPr>
+        <p:txBody>
+          <a:bodyPr wrap="square" rtlCol="0">
+            <a:spAutoFit/>
+          </a:bodyPr>
+          <a:lstStyle/>
+          <a:p>
+            <a:pPr latinLnBrk="1"/>
+            <a:r>
+              <a:rPr lang="ru-RU" sz="3200" b="1" dirty="0">
+                <a:latin typeface="Bahnschrift" panose="020B0502040204020203" pitchFamily="34" charset="0"/>
+              </a:rPr>
+              <a:t>Защита от </a:t>
+            </a:r>
+            <a:r>
+              <a:rPr lang="en-US" sz="3200" b="1" dirty="0">
+                <a:latin typeface="Bahnschrift" panose="020B0502040204020203" pitchFamily="34" charset="0"/>
+              </a:rPr>
+              <a:t>SQL-</a:t>
+            </a:r>
+            <a:r>
+              <a:rPr lang="ru-RU" sz="3200" b="1" dirty="0">
+                <a:latin typeface="Bahnschrift" panose="020B0502040204020203" pitchFamily="34" charset="0"/>
+              </a:rPr>
+              <a:t>инъекции </a:t>
+            </a:r>
+            <a:r>
+              <a:rPr lang="en-US" sz="3200" b="1" dirty="0">
+                <a:latin typeface="Bahnschrift" panose="020B0502040204020203" pitchFamily="34" charset="0"/>
+              </a:rPr>
+              <a:t>(models/users.php)</a:t>
+            </a:r>
+            <a:endParaRPr lang="ru-RU" sz="3200" b="1" dirty="0">
+              <a:latin typeface="Bahnschrift" panose="020B0502040204020203" pitchFamily="34" charset="0"/>
+            </a:endParaRPr>
+          </a:p>
+        </p:txBody>
+      </p:sp>
+      <p:pic>
+        <p:nvPicPr>
+          <p:cNvPr id="4" name="Рисунок 3">
+            <a:extLst>
+              <a:ext uri="{FF2B5EF4-FFF2-40B4-BE49-F238E27FC236}">
+                <a16:creationId xmlns:a16="http://schemas.microsoft.com/office/drawing/2014/main" id="{F407EB43-2F15-34C4-A6A5-CAC515509D2E}"/>
+              </a:ext>
+            </a:extLst>
+          </p:cNvPr>
+          <p:cNvPicPr>
+            <a:picLocks noChangeAspect="1"/>
+          </p:cNvPicPr>
+          <p:nvPr/>
+        </p:nvPicPr>
+        <p:blipFill>
+          <a:blip r:embed="rId2"/>
+          <a:stretch>
+            <a:fillRect/>
+          </a:stretch>
+        </p:blipFill>
+        <p:spPr>
+          <a:xfrm>
+            <a:off x="3628392" y="7590396"/>
+            <a:ext cx="7578433" cy="5174590"/>
+          </a:xfrm>
+          <a:prstGeom prst="rect">
+            <a:avLst/>
+          </a:prstGeom>
+        </p:spPr>
+      </p:pic>
+      <p:pic>
+        <p:nvPicPr>
+          <p:cNvPr id="11" name="Рисунок 10">
+            <a:extLst>
+              <a:ext uri="{FF2B5EF4-FFF2-40B4-BE49-F238E27FC236}">
+                <a16:creationId xmlns:a16="http://schemas.microsoft.com/office/drawing/2014/main" id="{CFA15040-000C-5D28-62F8-9354C8A16264}"/>
+              </a:ext>
+            </a:extLst>
+          </p:cNvPr>
+          <p:cNvPicPr>
+            <a:picLocks noChangeAspect="1"/>
+          </p:cNvPicPr>
+          <p:nvPr/>
+        </p:nvPicPr>
+        <p:blipFill>
+          <a:blip r:embed="rId3"/>
+          <a:stretch>
+            <a:fillRect/>
+          </a:stretch>
+        </p:blipFill>
+        <p:spPr>
+          <a:xfrm>
+            <a:off x="3310875" y="1424043"/>
+            <a:ext cx="7475037" cy="3603828"/>
+          </a:xfrm>
+          <a:prstGeom prst="rect">
+            <a:avLst/>
+          </a:prstGeom>
+        </p:spPr>
+      </p:pic>
+      <p:sp>
+        <p:nvSpPr>
+          <p:cNvPr id="12" name="Овал 11">
+            <a:extLst>
+              <a:ext uri="{FF2B5EF4-FFF2-40B4-BE49-F238E27FC236}">
+                <a16:creationId xmlns:a16="http://schemas.microsoft.com/office/drawing/2014/main" id="{9C602F50-CABE-4817-F78F-2556EB460FD2}"/>
+              </a:ext>
+            </a:extLst>
+          </p:cNvPr>
+          <p:cNvSpPr/>
+          <p:nvPr/>
+        </p:nvSpPr>
+        <p:spPr>
+          <a:xfrm>
+            <a:off x="11059887" y="5761532"/>
+            <a:ext cx="928914" cy="870857"/>
+          </a:xfrm>
+          <a:prstGeom prst="ellipse">
+            <a:avLst/>
+          </a:prstGeom>
+        </p:spPr>
+        <p:style>
+          <a:lnRef idx="2">
+            <a:schemeClr val="dk1"/>
+          </a:lnRef>
+          <a:fillRef idx="1">
+            <a:schemeClr val="lt1"/>
+          </a:fillRef>
+          <a:effectRef idx="0">
+            <a:schemeClr val="dk1"/>
+          </a:effectRef>
+          <a:fontRef idx="minor">
+            <a:schemeClr val="dk1"/>
+          </a:fontRef>
+        </p:style>
+        <p:txBody>
+          <a:bodyPr rtlCol="0" anchor="ctr"/>
+          <a:lstStyle/>
+          <a:p>
+            <a:pPr algn="ctr"/>
+            <a:r>
+              <a:rPr lang="en-US" sz="4800" b="1" dirty="0">
+                <a:latin typeface="Bahnschrift" panose="020B0502040204020203" pitchFamily="34" charset="0"/>
+              </a:rPr>
+              <a:t>5</a:t>
+            </a:r>
+            <a:endParaRPr lang="ru-RU" sz="4800" b="1" dirty="0">
+              <a:latin typeface="Bahnschrift" panose="020B0502040204020203" pitchFamily="34" charset="0"/>
+            </a:endParaRPr>
+          </a:p>
+        </p:txBody>
+      </p:sp>
+    </p:spTree>
+    <p:extLst>
+      <p:ext uri="{BB962C8B-B14F-4D97-AF65-F5344CB8AC3E}">
+        <p14:creationId xmlns:p14="http://schemas.microsoft.com/office/powerpoint/2010/main" val="3902362546"/>
+      </p:ext>
+    </p:extLst>
+  </p:cSld>
+  <p:clrMapOvr>
+    <a:masterClrMapping/>
+  </p:clrMapOvr>
+  <mc:AlternateContent xmlns:mc="http://schemas.openxmlformats.org/markup-compatibility/2006">
+    <mc:Choice xmlns:p159="http://schemas.microsoft.com/office/powerpoint/2015/09/main" Requires="p159">
+      <p:transition xmlns:p14="http://schemas.microsoft.com/office/powerpoint/2010/main" spd="slow" p14:dur="2000">
+        <p159:morph option="byObject"/>
+      </p:transition>
+    </mc:Choice>
+    <mc:Fallback>
+      <p:transition spd="slow">
+        <p:fade/>
+      </p:transition>
+    </mc:Fallback>
+  </mc:AlternateContent>
+</p:sld>
+</file>
+
+<file path=ppt/slides/slide6.xml><?xml version="1.0" encoding="utf-8"?>
+<p:sld xmlns:a="http://schemas.openxmlformats.org/drawingml/2006/main" xmlns:r="http://schemas.openxmlformats.org/officeDocument/2006/relationships" xmlns:p="http://schemas.openxmlformats.org/presentationml/2006/main">
+  <p:cSld>
+    <p:spTree>
+      <p:nvGrpSpPr>
+        <p:cNvPr id="1" name="">
+          <a:extLst>
+            <a:ext uri="{FF2B5EF4-FFF2-40B4-BE49-F238E27FC236}">
+              <a16:creationId xmlns:a16="http://schemas.microsoft.com/office/drawing/2014/main" id="{03330D0F-F8AF-81CE-DEF0-284790FFDE6A}"/>
+            </a:ext>
+          </a:extLst>
+        </p:cNvPr>
+        <p:cNvGrpSpPr/>
+        <p:nvPr/>
+      </p:nvGrpSpPr>
+      <p:grpSpPr>
+        <a:xfrm>
+          <a:off x="0" y="0"/>
+          <a:ext cx="0" cy="0"/>
+          <a:chOff x="0" y="0"/>
+          <a:chExt cx="0" cy="0"/>
+        </a:xfrm>
+      </p:grpSpPr>
+      <p:sp>
+        <p:nvSpPr>
+          <p:cNvPr id="6" name="Прямоугольник 5">
+            <a:extLst>
+              <a:ext uri="{FF2B5EF4-FFF2-40B4-BE49-F238E27FC236}">
+                <a16:creationId xmlns:a16="http://schemas.microsoft.com/office/drawing/2014/main" id="{F966E79D-51CD-04F5-A364-82316EB199D9}"/>
+              </a:ext>
+            </a:extLst>
+          </p:cNvPr>
+          <p:cNvSpPr/>
+          <p:nvPr/>
+        </p:nvSpPr>
+        <p:spPr>
+          <a:xfrm>
+            <a:off x="-2235200" y="0"/>
+            <a:ext cx="14427200" cy="6858000"/>
+          </a:xfrm>
+          <a:prstGeom prst="rect">
+            <a:avLst/>
+          </a:prstGeom>
+          <a:solidFill>
+            <a:srgbClr val="CCECFF"/>
+          </a:solidFill>
+        </p:spPr>
+        <p:style>
+          <a:lnRef idx="2">
+            <a:schemeClr val="accent1">
+              <a:shade val="15000"/>
+            </a:schemeClr>
+          </a:lnRef>
+          <a:fillRef idx="1">
+            <a:schemeClr val="accent1"/>
+          </a:fillRef>
+          <a:effectRef idx="0">
+            <a:schemeClr val="accent1"/>
+          </a:effectRef>
+          <a:fontRef idx="minor">
+            <a:schemeClr val="lt1"/>
+          </a:fontRef>
+        </p:style>
+        <p:txBody>
+          <a:bodyPr rtlCol="0" anchor="ctr"/>
+          <a:lstStyle/>
+          <a:p>
+            <a:pPr algn="ctr"/>
+            <a:endParaRPr lang="ru-RU"/>
+          </a:p>
+        </p:txBody>
+      </p:sp>
+      <p:sp>
+        <p:nvSpPr>
+          <p:cNvPr id="7" name="Прямоугольник 6">
+            <a:extLst>
+              <a:ext uri="{FF2B5EF4-FFF2-40B4-BE49-F238E27FC236}">
+                <a16:creationId xmlns:a16="http://schemas.microsoft.com/office/drawing/2014/main" id="{7740CDD0-FD89-DB40-0E58-0B2B7E96E051}"/>
+              </a:ext>
+            </a:extLst>
+          </p:cNvPr>
+          <p:cNvSpPr/>
+          <p:nvPr/>
+        </p:nvSpPr>
+        <p:spPr>
+          <a:xfrm>
+            <a:off x="-3451101" y="0"/>
+            <a:ext cx="15643101" cy="6858000"/>
+          </a:xfrm>
+          <a:prstGeom prst="rect">
+            <a:avLst/>
+          </a:prstGeom>
+          <a:solidFill>
+            <a:srgbClr val="99CCFF"/>
+          </a:solidFill>
+        </p:spPr>
+        <p:style>
+          <a:lnRef idx="2">
+            <a:schemeClr val="accent1">
+              <a:shade val="15000"/>
+            </a:schemeClr>
+          </a:lnRef>
+          <a:fillRef idx="1">
+            <a:schemeClr val="accent1"/>
+          </a:fillRef>
+          <a:effectRef idx="0">
+            <a:schemeClr val="accent1"/>
+          </a:effectRef>
+          <a:fontRef idx="minor">
+            <a:schemeClr val="lt1"/>
+          </a:fontRef>
+        </p:style>
+        <p:txBody>
+          <a:bodyPr rtlCol="0" anchor="ctr"/>
+          <a:lstStyle/>
+          <a:p>
+            <a:pPr algn="ctr"/>
+            <a:endParaRPr lang="ru-RU"/>
+          </a:p>
+        </p:txBody>
+      </p:sp>
+      <p:sp>
+        <p:nvSpPr>
+          <p:cNvPr id="8" name="Прямоугольник 7">
+            <a:extLst>
+              <a:ext uri="{FF2B5EF4-FFF2-40B4-BE49-F238E27FC236}">
+                <a16:creationId xmlns:a16="http://schemas.microsoft.com/office/drawing/2014/main" id="{D17E0868-C2B0-6559-189B-FD7C9EFE4751}"/>
+              </a:ext>
+            </a:extLst>
+          </p:cNvPr>
+          <p:cNvSpPr/>
+          <p:nvPr/>
+        </p:nvSpPr>
+        <p:spPr>
+          <a:xfrm>
+            <a:off x="-4207824" y="0"/>
+            <a:ext cx="6555179" cy="6858000"/>
+          </a:xfrm>
+          <a:prstGeom prst="rect">
+            <a:avLst/>
+          </a:prstGeom>
+          <a:solidFill>
+            <a:srgbClr val="66CCFF"/>
+          </a:solidFill>
+        </p:spPr>
+        <p:style>
+          <a:lnRef idx="2">
+            <a:schemeClr val="accent1">
+              <a:shade val="15000"/>
+            </a:schemeClr>
+          </a:lnRef>
+          <a:fillRef idx="1">
+            <a:schemeClr val="accent1"/>
+          </a:fillRef>
+          <a:effectRef idx="0">
+            <a:schemeClr val="accent1"/>
+          </a:effectRef>
+          <a:fontRef idx="minor">
+            <a:schemeClr val="lt1"/>
+          </a:fontRef>
+        </p:style>
+        <p:txBody>
+          <a:bodyPr rtlCol="0" anchor="ctr"/>
+          <a:lstStyle/>
+          <a:p>
+            <a:pPr algn="ctr"/>
+            <a:endParaRPr lang="ru-RU"/>
+          </a:p>
+        </p:txBody>
+      </p:sp>
+      <p:sp>
+        <p:nvSpPr>
+          <p:cNvPr id="9" name="Прямоугольник 8">
+            <a:extLst>
+              <a:ext uri="{FF2B5EF4-FFF2-40B4-BE49-F238E27FC236}">
+                <a16:creationId xmlns:a16="http://schemas.microsoft.com/office/drawing/2014/main" id="{6AD60D85-25D6-1089-710B-4CED266C3EDA}"/>
+              </a:ext>
+            </a:extLst>
+          </p:cNvPr>
+          <p:cNvSpPr/>
+          <p:nvPr/>
+        </p:nvSpPr>
+        <p:spPr>
+          <a:xfrm>
+            <a:off x="-4964547" y="0"/>
+            <a:ext cx="6555179" cy="6858000"/>
+          </a:xfrm>
+          <a:prstGeom prst="rect">
+            <a:avLst/>
+          </a:prstGeom>
+          <a:solidFill>
+            <a:srgbClr val="3399FF"/>
+          </a:solidFill>
+        </p:spPr>
+        <p:style>
+          <a:lnRef idx="2">
+            <a:schemeClr val="accent1">
+              <a:shade val="15000"/>
+            </a:schemeClr>
+          </a:lnRef>
+          <a:fillRef idx="1">
+            <a:schemeClr val="accent1"/>
+          </a:fillRef>
+          <a:effectRef idx="0">
+            <a:schemeClr val="accent1"/>
+          </a:effectRef>
+          <a:fontRef idx="minor">
+            <a:schemeClr val="lt1"/>
+          </a:fontRef>
+        </p:style>
+        <p:txBody>
+          <a:bodyPr rtlCol="0" anchor="ctr"/>
+          <a:lstStyle/>
+          <a:p>
+            <a:pPr algn="ctr"/>
+            <a:endParaRPr lang="ru-RU"/>
+          </a:p>
+        </p:txBody>
+      </p:sp>
+      <p:sp>
+        <p:nvSpPr>
+          <p:cNvPr id="10" name="Прямоугольник 9">
+            <a:extLst>
+              <a:ext uri="{FF2B5EF4-FFF2-40B4-BE49-F238E27FC236}">
+                <a16:creationId xmlns:a16="http://schemas.microsoft.com/office/drawing/2014/main" id="{8656A249-4DF5-9C05-F658-597D4EEA5B5B}"/>
+              </a:ext>
+            </a:extLst>
+          </p:cNvPr>
+          <p:cNvSpPr/>
+          <p:nvPr/>
+        </p:nvSpPr>
+        <p:spPr>
+          <a:xfrm>
+            <a:off x="-5742378" y="0"/>
+            <a:ext cx="6555179" cy="6858000"/>
+          </a:xfrm>
+          <a:prstGeom prst="rect">
+            <a:avLst/>
+          </a:prstGeom>
+          <a:solidFill>
+            <a:srgbClr val="0066FF"/>
+          </a:solidFill>
+        </p:spPr>
+        <p:style>
+          <a:lnRef idx="2">
+            <a:schemeClr val="accent1">
+              <a:shade val="15000"/>
+            </a:schemeClr>
+          </a:lnRef>
+          <a:fillRef idx="1">
+            <a:schemeClr val="accent1"/>
+          </a:fillRef>
+          <a:effectRef idx="0">
+            <a:schemeClr val="accent1"/>
+          </a:effectRef>
+          <a:fontRef idx="minor">
+            <a:schemeClr val="lt1"/>
+          </a:fontRef>
+        </p:style>
+        <p:txBody>
+          <a:bodyPr rtlCol="0" anchor="ctr"/>
+          <a:lstStyle/>
+          <a:p>
+            <a:pPr algn="ctr"/>
+            <a:endParaRPr lang="ru-RU"/>
+          </a:p>
+        </p:txBody>
+      </p:sp>
+      <p:sp>
+        <p:nvSpPr>
+          <p:cNvPr id="3" name="TextBox 2">
+            <a:extLst>
+              <a:ext uri="{FF2B5EF4-FFF2-40B4-BE49-F238E27FC236}">
+                <a16:creationId xmlns:a16="http://schemas.microsoft.com/office/drawing/2014/main" id="{953FE957-F993-2AEE-F847-C189843711B1}"/>
+              </a:ext>
+            </a:extLst>
+          </p:cNvPr>
+          <p:cNvSpPr txBox="1"/>
+          <p:nvPr/>
+        </p:nvSpPr>
+        <p:spPr>
+          <a:xfrm>
+            <a:off x="4200822" y="368004"/>
+            <a:ext cx="6555179" cy="584775"/>
+          </a:xfrm>
+          <a:prstGeom prst="rect">
+            <a:avLst/>
+          </a:prstGeom>
+          <a:noFill/>
+        </p:spPr>
+        <p:txBody>
+          <a:bodyPr wrap="square" rtlCol="0">
+            <a:spAutoFit/>
+          </a:bodyPr>
+          <a:lstStyle/>
+          <a:p>
+            <a:pPr latinLnBrk="1"/>
+            <a:r>
+              <a:rPr lang="en-US" sz="3200" b="1" dirty="0">
+                <a:latin typeface="Bahnschrift" panose="020B0502040204020203" pitchFamily="34" charset="0"/>
+              </a:rPr>
+              <a:t>XSS </a:t>
+            </a:r>
+            <a:r>
+              <a:rPr lang="ru-RU" sz="3200" b="1" dirty="0">
+                <a:latin typeface="Bahnschrift" panose="020B0502040204020203" pitchFamily="34" charset="0"/>
+              </a:rPr>
+              <a:t>защита </a:t>
+            </a:r>
+            <a:r>
+              <a:rPr lang="en-US" sz="3200" b="1" dirty="0">
+                <a:latin typeface="Bahnschrift" panose="020B0502040204020203" pitchFamily="34" charset="0"/>
+              </a:rPr>
+              <a:t>(views/post/</a:t>
+            </a:r>
+            <a:r>
+              <a:rPr lang="en-US" sz="3200" b="1" dirty="0" err="1">
+                <a:latin typeface="Bahnschrift" panose="020B0502040204020203" pitchFamily="34" charset="0"/>
+              </a:rPr>
+              <a:t>view.php</a:t>
+            </a:r>
+            <a:r>
+              <a:rPr lang="en-US" sz="3200" b="1" dirty="0">
+                <a:latin typeface="Bahnschrift" panose="020B0502040204020203" pitchFamily="34" charset="0"/>
+              </a:rPr>
+              <a:t>)</a:t>
+            </a:r>
+            <a:endParaRPr lang="ru-RU" sz="3200" b="1" dirty="0">
+              <a:latin typeface="Bahnschrift" panose="020B0502040204020203" pitchFamily="34" charset="0"/>
+            </a:endParaRPr>
+          </a:p>
+        </p:txBody>
+      </p:sp>
+      <p:pic>
+        <p:nvPicPr>
+          <p:cNvPr id="11" name="Рисунок 10">
+            <a:extLst>
+              <a:ext uri="{FF2B5EF4-FFF2-40B4-BE49-F238E27FC236}">
+                <a16:creationId xmlns:a16="http://schemas.microsoft.com/office/drawing/2014/main" id="{948D9A3B-5B10-F1CD-13EE-2468DF103B85}"/>
+              </a:ext>
+            </a:extLst>
+          </p:cNvPr>
+          <p:cNvPicPr>
+            <a:picLocks noChangeAspect="1"/>
+          </p:cNvPicPr>
+          <p:nvPr/>
+        </p:nvPicPr>
+        <p:blipFill>
+          <a:blip r:embed="rId2"/>
+          <a:stretch>
+            <a:fillRect/>
+          </a:stretch>
+        </p:blipFill>
+        <p:spPr>
+          <a:xfrm>
+            <a:off x="-10658524" y="1482100"/>
+            <a:ext cx="7475037" cy="3603828"/>
+          </a:xfrm>
+          <a:prstGeom prst="rect">
+            <a:avLst/>
+          </a:prstGeom>
+        </p:spPr>
+      </p:pic>
+      <p:pic>
+        <p:nvPicPr>
+          <p:cNvPr id="5" name="Рисунок 4">
+            <a:extLst>
+              <a:ext uri="{FF2B5EF4-FFF2-40B4-BE49-F238E27FC236}">
+                <a16:creationId xmlns:a16="http://schemas.microsoft.com/office/drawing/2014/main" id="{999C0C38-D3A4-0F59-2F9F-22268FA10332}"/>
+              </a:ext>
+            </a:extLst>
+          </p:cNvPr>
+          <p:cNvPicPr>
+            <a:picLocks noChangeAspect="1"/>
+          </p:cNvPicPr>
+          <p:nvPr/>
+        </p:nvPicPr>
+        <p:blipFill>
+          <a:blip r:embed="rId3"/>
+          <a:stretch>
+            <a:fillRect/>
+          </a:stretch>
+        </p:blipFill>
+        <p:spPr>
+          <a:xfrm>
+            <a:off x="3104076" y="1216823"/>
+            <a:ext cx="8748669" cy="4980785"/>
+          </a:xfrm>
+          <a:prstGeom prst="rect">
+            <a:avLst/>
+          </a:prstGeom>
+        </p:spPr>
+      </p:pic>
+      <p:sp>
+        <p:nvSpPr>
+          <p:cNvPr id="12" name="Овал 11">
+            <a:extLst>
+              <a:ext uri="{FF2B5EF4-FFF2-40B4-BE49-F238E27FC236}">
+                <a16:creationId xmlns:a16="http://schemas.microsoft.com/office/drawing/2014/main" id="{4473540D-465F-E064-80CF-9A039FB5442C}"/>
+              </a:ext>
+            </a:extLst>
+          </p:cNvPr>
+          <p:cNvSpPr/>
+          <p:nvPr/>
+        </p:nvSpPr>
+        <p:spPr>
+          <a:xfrm>
+            <a:off x="11059887" y="5761532"/>
+            <a:ext cx="928914" cy="870857"/>
+          </a:xfrm>
+          <a:prstGeom prst="ellipse">
+            <a:avLst/>
+          </a:prstGeom>
+        </p:spPr>
+        <p:style>
+          <a:lnRef idx="2">
+            <a:schemeClr val="dk1"/>
+          </a:lnRef>
+          <a:fillRef idx="1">
+            <a:schemeClr val="lt1"/>
+          </a:fillRef>
+          <a:effectRef idx="0">
+            <a:schemeClr val="dk1"/>
+          </a:effectRef>
+          <a:fontRef idx="minor">
+            <a:schemeClr val="dk1"/>
+          </a:fontRef>
+        </p:style>
+        <p:txBody>
+          <a:bodyPr rtlCol="0" anchor="ctr"/>
+          <a:lstStyle/>
+          <a:p>
+            <a:pPr algn="ctr"/>
+            <a:r>
+              <a:rPr lang="en-US" sz="4800" b="1" dirty="0">
+                <a:latin typeface="Bahnschrift" panose="020B0502040204020203" pitchFamily="34" charset="0"/>
+              </a:rPr>
+              <a:t>6</a:t>
+            </a:r>
+            <a:endParaRPr lang="ru-RU" sz="4800" b="1" dirty="0">
+              <a:latin typeface="Bahnschrift" panose="020B0502040204020203" pitchFamily="34" charset="0"/>
+            </a:endParaRPr>
+          </a:p>
+        </p:txBody>
+      </p:sp>
+    </p:spTree>
+    <p:extLst>
+      <p:ext uri="{BB962C8B-B14F-4D97-AF65-F5344CB8AC3E}">
+        <p14:creationId xmlns:p14="http://schemas.microsoft.com/office/powerpoint/2010/main" val="1305150442"/>
+      </p:ext>
+    </p:extLst>
+  </p:cSld>
+  <p:clrMapOvr>
+    <a:masterClrMapping/>
+  </p:clrMapOvr>
+  <mc:AlternateContent xmlns:mc="http://schemas.openxmlformats.org/markup-compatibility/2006">
+    <mc:Choice xmlns:p159="http://schemas.microsoft.com/office/powerpoint/2015/09/main" Requires="p159">
+      <p:transition xmlns:p14="http://schemas.microsoft.com/office/powerpoint/2010/main" spd="slow" p14:dur="2000">
+        <p159:morph option="byObject"/>
+      </p:transition>
+    </mc:Choice>
+    <mc:Fallback>
+      <p:transition spd="slow">
+        <p:fade/>
+      </p:transition>
+    </mc:Fallback>
+  </mc:AlternateContent>
+</p:sld>
+</file>
+
+<file path=ppt/slides/slide7.xml><?xml version="1.0" encoding="utf-8"?>
+<p:sld xmlns:a="http://schemas.openxmlformats.org/drawingml/2006/main" xmlns:r="http://schemas.openxmlformats.org/officeDocument/2006/relationships" xmlns:p="http://schemas.openxmlformats.org/presentationml/2006/main">
+  <p:cSld>
+    <p:spTree>
+      <p:nvGrpSpPr>
+        <p:cNvPr id="1" name="">
+          <a:extLst>
+            <a:ext uri="{FF2B5EF4-FFF2-40B4-BE49-F238E27FC236}">
+              <a16:creationId xmlns:a16="http://schemas.microsoft.com/office/drawing/2014/main" id="{56BDAA26-44A0-5D97-ABB6-5462D26726AE}"/>
+            </a:ext>
+          </a:extLst>
+        </p:cNvPr>
+        <p:cNvGrpSpPr/>
+        <p:nvPr/>
+      </p:nvGrpSpPr>
+      <p:grpSpPr>
+        <a:xfrm>
+          <a:off x="0" y="0"/>
+          <a:ext cx="0" cy="0"/>
+          <a:chOff x="0" y="0"/>
+          <a:chExt cx="0" cy="0"/>
+        </a:xfrm>
+      </p:grpSpPr>
+      <p:sp>
+        <p:nvSpPr>
+          <p:cNvPr id="6" name="Прямоугольник 5">
+            <a:extLst>
+              <a:ext uri="{FF2B5EF4-FFF2-40B4-BE49-F238E27FC236}">
+                <a16:creationId xmlns:a16="http://schemas.microsoft.com/office/drawing/2014/main" id="{B704D3AD-39D4-9FDA-399A-B5693D0F492F}"/>
+              </a:ext>
+            </a:extLst>
+          </p:cNvPr>
+          <p:cNvSpPr/>
+          <p:nvPr/>
+        </p:nvSpPr>
+        <p:spPr>
+          <a:xfrm>
+            <a:off x="-2235200" y="0"/>
+            <a:ext cx="14427200" cy="6858000"/>
+          </a:xfrm>
+          <a:prstGeom prst="rect">
+            <a:avLst/>
+          </a:prstGeom>
+          <a:solidFill>
+            <a:srgbClr val="CCECFF"/>
+          </a:solidFill>
+        </p:spPr>
+        <p:style>
+          <a:lnRef idx="2">
+            <a:schemeClr val="accent1">
+              <a:shade val="15000"/>
+            </a:schemeClr>
+          </a:lnRef>
+          <a:fillRef idx="1">
+            <a:schemeClr val="accent1"/>
+          </a:fillRef>
+          <a:effectRef idx="0">
+            <a:schemeClr val="accent1"/>
+          </a:effectRef>
+          <a:fontRef idx="minor">
+            <a:schemeClr val="lt1"/>
+          </a:fontRef>
+        </p:style>
+        <p:txBody>
+          <a:bodyPr rtlCol="0" anchor="ctr"/>
+          <a:lstStyle/>
+          <a:p>
+            <a:pPr algn="ctr"/>
+            <a:endParaRPr lang="ru-RU"/>
+          </a:p>
+        </p:txBody>
+      </p:sp>
+      <p:sp>
+        <p:nvSpPr>
+          <p:cNvPr id="7" name="Прямоугольник 6">
+            <a:extLst>
+              <a:ext uri="{FF2B5EF4-FFF2-40B4-BE49-F238E27FC236}">
+                <a16:creationId xmlns:a16="http://schemas.microsoft.com/office/drawing/2014/main" id="{24946CB1-AE4C-3C6D-2486-CB6EBC4C0BA2}"/>
+              </a:ext>
+            </a:extLst>
+          </p:cNvPr>
+          <p:cNvSpPr/>
+          <p:nvPr/>
+        </p:nvSpPr>
+        <p:spPr>
+          <a:xfrm>
+            <a:off x="-3451101" y="0"/>
+            <a:ext cx="15643101" cy="6858000"/>
+          </a:xfrm>
+          <a:prstGeom prst="rect">
+            <a:avLst/>
+          </a:prstGeom>
+          <a:solidFill>
+            <a:srgbClr val="99CCFF"/>
+          </a:solidFill>
+        </p:spPr>
+        <p:style>
+          <a:lnRef idx="2">
+            <a:schemeClr val="accent1">
+              <a:shade val="15000"/>
+            </a:schemeClr>
+          </a:lnRef>
+          <a:fillRef idx="1">
+            <a:schemeClr val="accent1"/>
+          </a:fillRef>
+          <a:effectRef idx="0">
+            <a:schemeClr val="accent1"/>
+          </a:effectRef>
+          <a:fontRef idx="minor">
+            <a:schemeClr val="lt1"/>
+          </a:fontRef>
+        </p:style>
+        <p:txBody>
+          <a:bodyPr rtlCol="0" anchor="ctr"/>
+          <a:lstStyle/>
+          <a:p>
+            <a:pPr algn="ctr"/>
+            <a:endParaRPr lang="ru-RU"/>
+          </a:p>
+        </p:txBody>
+      </p:sp>
+      <p:sp>
+        <p:nvSpPr>
+          <p:cNvPr id="8" name="Прямоугольник 7">
+            <a:extLst>
+              <a:ext uri="{FF2B5EF4-FFF2-40B4-BE49-F238E27FC236}">
+                <a16:creationId xmlns:a16="http://schemas.microsoft.com/office/drawing/2014/main" id="{53227780-729C-2789-1540-D7B919BB43A7}"/>
+              </a:ext>
+            </a:extLst>
+          </p:cNvPr>
+          <p:cNvSpPr/>
+          <p:nvPr/>
+        </p:nvSpPr>
+        <p:spPr>
+          <a:xfrm>
+            <a:off x="-4207824" y="0"/>
+            <a:ext cx="16399824" cy="6858000"/>
+          </a:xfrm>
+          <a:prstGeom prst="rect">
+            <a:avLst/>
+          </a:prstGeom>
+          <a:solidFill>
+            <a:srgbClr val="66CCFF"/>
+          </a:solidFill>
+        </p:spPr>
+        <p:style>
+          <a:lnRef idx="2">
+            <a:schemeClr val="accent1">
+              <a:shade val="15000"/>
+            </a:schemeClr>
+          </a:lnRef>
+          <a:fillRef idx="1">
+            <a:schemeClr val="accent1"/>
+          </a:fillRef>
+          <a:effectRef idx="0">
+            <a:schemeClr val="accent1"/>
+          </a:effectRef>
+          <a:fontRef idx="minor">
+            <a:schemeClr val="lt1"/>
+          </a:fontRef>
+        </p:style>
+        <p:txBody>
+          <a:bodyPr rtlCol="0" anchor="ctr"/>
+          <a:lstStyle/>
+          <a:p>
+            <a:pPr algn="ctr"/>
+            <a:endParaRPr lang="ru-RU"/>
+          </a:p>
+        </p:txBody>
+      </p:sp>
+      <p:sp>
+        <p:nvSpPr>
+          <p:cNvPr id="9" name="Прямоугольник 8">
+            <a:extLst>
+              <a:ext uri="{FF2B5EF4-FFF2-40B4-BE49-F238E27FC236}">
+                <a16:creationId xmlns:a16="http://schemas.microsoft.com/office/drawing/2014/main" id="{6F3AEAD3-23B5-4ACF-44B8-173B940E277B}"/>
+              </a:ext>
+            </a:extLst>
+          </p:cNvPr>
+          <p:cNvSpPr/>
+          <p:nvPr/>
+        </p:nvSpPr>
+        <p:spPr>
+          <a:xfrm>
+            <a:off x="-4964547" y="0"/>
+            <a:ext cx="6555179" cy="6858000"/>
+          </a:xfrm>
+          <a:prstGeom prst="rect">
+            <a:avLst/>
+          </a:prstGeom>
+          <a:solidFill>
+            <a:srgbClr val="3399FF"/>
+          </a:solidFill>
+        </p:spPr>
+        <p:style>
+          <a:lnRef idx="2">
+            <a:schemeClr val="accent1">
+              <a:shade val="15000"/>
+            </a:schemeClr>
+          </a:lnRef>
+          <a:fillRef idx="1">
+            <a:schemeClr val="accent1"/>
+          </a:fillRef>
+          <a:effectRef idx="0">
+            <a:schemeClr val="accent1"/>
+          </a:effectRef>
+          <a:fontRef idx="minor">
+            <a:schemeClr val="lt1"/>
+          </a:fontRef>
+        </p:style>
+        <p:txBody>
+          <a:bodyPr rtlCol="0" anchor="ctr"/>
+          <a:lstStyle/>
+          <a:p>
+            <a:pPr algn="ctr"/>
+            <a:endParaRPr lang="ru-RU"/>
+          </a:p>
+        </p:txBody>
+      </p:sp>
+      <p:sp>
+        <p:nvSpPr>
+          <p:cNvPr id="10" name="Прямоугольник 9">
+            <a:extLst>
+              <a:ext uri="{FF2B5EF4-FFF2-40B4-BE49-F238E27FC236}">
+                <a16:creationId xmlns:a16="http://schemas.microsoft.com/office/drawing/2014/main" id="{BEC2EB16-E79C-1F34-E759-FEC15D091845}"/>
+              </a:ext>
+            </a:extLst>
+          </p:cNvPr>
+          <p:cNvSpPr/>
+          <p:nvPr/>
+        </p:nvSpPr>
+        <p:spPr>
+          <a:xfrm>
+            <a:off x="-5742378" y="0"/>
+            <a:ext cx="6555179" cy="6858000"/>
+          </a:xfrm>
+          <a:prstGeom prst="rect">
+            <a:avLst/>
+          </a:prstGeom>
+          <a:solidFill>
+            <a:srgbClr val="0066FF"/>
+          </a:solidFill>
+        </p:spPr>
+        <p:style>
+          <a:lnRef idx="2">
+            <a:schemeClr val="accent1">
+              <a:shade val="15000"/>
+            </a:schemeClr>
+          </a:lnRef>
+          <a:fillRef idx="1">
+            <a:schemeClr val="accent1"/>
+          </a:fillRef>
+          <a:effectRef idx="0">
+            <a:schemeClr val="accent1"/>
+          </a:effectRef>
+          <a:fontRef idx="minor">
+            <a:schemeClr val="lt1"/>
+          </a:fontRef>
+        </p:style>
+        <p:txBody>
+          <a:bodyPr rtlCol="0" anchor="ctr"/>
+          <a:lstStyle/>
+          <a:p>
+            <a:pPr algn="ctr"/>
+            <a:endParaRPr lang="ru-RU"/>
+          </a:p>
+        </p:txBody>
+      </p:sp>
+      <p:sp>
+        <p:nvSpPr>
+          <p:cNvPr id="3" name="TextBox 2">
+            <a:extLst>
+              <a:ext uri="{FF2B5EF4-FFF2-40B4-BE49-F238E27FC236}">
+                <a16:creationId xmlns:a16="http://schemas.microsoft.com/office/drawing/2014/main" id="{4779E386-DC90-725E-C637-2248058C9F74}"/>
+              </a:ext>
+            </a:extLst>
+          </p:cNvPr>
+          <p:cNvSpPr txBox="1"/>
+          <p:nvPr/>
+        </p:nvSpPr>
+        <p:spPr>
+          <a:xfrm>
+            <a:off x="4370449" y="266125"/>
+            <a:ext cx="6555179" cy="584775"/>
+          </a:xfrm>
+          <a:prstGeom prst="rect">
+            <a:avLst/>
+          </a:prstGeom>
+          <a:noFill/>
+        </p:spPr>
+        <p:txBody>
+          <a:bodyPr wrap="square" rtlCol="0">
+            <a:spAutoFit/>
+          </a:bodyPr>
+          <a:lstStyle/>
+          <a:p>
+            <a:r>
+              <a:rPr lang="ru-RU" sz="3200" b="1" dirty="0">
+                <a:latin typeface="Bahnschrift" panose="020B0502040204020203" pitchFamily="34" charset="0"/>
+              </a:rPr>
+              <a:t>Скриншоты веб-страниц</a:t>
+            </a:r>
+          </a:p>
+        </p:txBody>
+      </p:sp>
+      <p:pic>
+        <p:nvPicPr>
+          <p:cNvPr id="5" name="Рисунок 4">
+            <a:extLst>
+              <a:ext uri="{FF2B5EF4-FFF2-40B4-BE49-F238E27FC236}">
+                <a16:creationId xmlns:a16="http://schemas.microsoft.com/office/drawing/2014/main" id="{E3DD98B8-D6D2-0AFF-4FDE-0397A4C4FB7D}"/>
+              </a:ext>
+            </a:extLst>
+          </p:cNvPr>
+          <p:cNvPicPr>
+            <a:picLocks noChangeAspect="1"/>
+          </p:cNvPicPr>
+          <p:nvPr/>
+        </p:nvPicPr>
+        <p:blipFill>
+          <a:blip r:embed="rId2"/>
+          <a:stretch>
+            <a:fillRect/>
+          </a:stretch>
+        </p:blipFill>
+        <p:spPr>
+          <a:xfrm>
+            <a:off x="15711925" y="683540"/>
+            <a:ext cx="7352228" cy="5490920"/>
+          </a:xfrm>
+          <a:prstGeom prst="rect">
+            <a:avLst/>
+          </a:prstGeom>
+        </p:spPr>
+      </p:pic>
+      <mc:AlternateContent xmlns:mc="http://schemas.openxmlformats.org/markup-compatibility/2006" xmlns:p14="http://schemas.microsoft.com/office/powerpoint/2010/main">
+        <mc:Choice Requires="p14">
+          <p:contentPart p14:bwMode="auto" r:id="rId3">
             <p14:nvContentPartPr>
-              <p14:cNvPr id="5" name="Рукописный ввод 4">
+              <p14:cNvPr id="2" name="Рукописный ввод 1">
                 <a:extLst>
                   <a:ext uri="{FF2B5EF4-FFF2-40B4-BE49-F238E27FC236}">
-                    <a16:creationId xmlns:a16="http://schemas.microsoft.com/office/drawing/2014/main" id="{DAF3E5C8-4FE0-4125-D9A4-B429193C6D44}"/>
+                    <a16:creationId xmlns:a16="http://schemas.microsoft.com/office/drawing/2014/main" id="{6751E251-86F7-7B56-321F-76F8CBA8E5C7}"/>
                   </a:ext>
                 </a:extLst>
               </p14:cNvPr>
@@ -8358,18 +7939,631 @@
               <p14:nvPr/>
             </p14:nvContentPartPr>
             <p14:xfrm>
-              <a:off x="11683780" y="6042700"/>
-              <a:ext cx="255960" cy="599400"/>
+              <a:off x="5867280" y="3961980"/>
+              <a:ext cx="360" cy="360"/>
             </p14:xfrm>
           </p:contentPart>
         </mc:Choice>
-        <mc:Fallback>
+        <mc:Fallback xmlns="">
           <p:pic>
             <p:nvPicPr>
-              <p:cNvPr id="5" name="Рукописный ввод 4">
+              <p:cNvPr id="2" name="Рукописный ввод 1">
                 <a:extLst>
                   <a:ext uri="{FF2B5EF4-FFF2-40B4-BE49-F238E27FC236}">
-                    <a16:creationId xmlns:a16="http://schemas.microsoft.com/office/drawing/2014/main" id="{DAF3E5C8-4FE0-4125-D9A4-B429193C6D44}"/>
+                    <a16:creationId xmlns:a16="http://schemas.microsoft.com/office/drawing/2014/main" id="{6751E251-86F7-7B56-321F-76F8CBA8E5C7}"/>
+                  </a:ext>
+                </a:extLst>
+              </p:cNvPr>
+              <p:cNvPicPr/>
+              <p:nvPr/>
+            </p:nvPicPr>
+            <p:blipFill>
+              <a:blip r:embed="rId4"/>
+              <a:stretch>
+                <a:fillRect/>
+              </a:stretch>
+            </p:blipFill>
+            <p:spPr>
+              <a:xfrm>
+                <a:off x="5861160" y="3955860"/>
+                <a:ext cx="12600" cy="12600"/>
+              </a:xfrm>
+              <a:prstGeom prst="rect">
+                <a:avLst/>
+              </a:prstGeom>
+            </p:spPr>
+          </p:pic>
+        </mc:Fallback>
+      </mc:AlternateContent>
+      <p:pic>
+        <p:nvPicPr>
+          <p:cNvPr id="12" name="Рисунок 11">
+            <a:extLst>
+              <a:ext uri="{FF2B5EF4-FFF2-40B4-BE49-F238E27FC236}">
+                <a16:creationId xmlns:a16="http://schemas.microsoft.com/office/drawing/2014/main" id="{FA21DBF4-7BA1-BFA9-637C-274C43628F37}"/>
+              </a:ext>
+            </a:extLst>
+          </p:cNvPr>
+          <p:cNvPicPr>
+            <a:picLocks noChangeAspect="1"/>
+          </p:cNvPicPr>
+          <p:nvPr/>
+        </p:nvPicPr>
+        <p:blipFill>
+          <a:blip r:embed="rId5"/>
+          <a:stretch>
+            <a:fillRect/>
+          </a:stretch>
+        </p:blipFill>
+        <p:spPr>
+          <a:xfrm>
+            <a:off x="11902386" y="-2090305"/>
+            <a:ext cx="3809539" cy="2031346"/>
+          </a:xfrm>
+          <a:prstGeom prst="rect">
+            <a:avLst/>
+          </a:prstGeom>
+        </p:spPr>
+      </p:pic>
+      <p:pic>
+        <p:nvPicPr>
+          <p:cNvPr id="14" name="Рисунок 13">
+            <a:extLst>
+              <a:ext uri="{FF2B5EF4-FFF2-40B4-BE49-F238E27FC236}">
+                <a16:creationId xmlns:a16="http://schemas.microsoft.com/office/drawing/2014/main" id="{5CAB06E2-E2E4-F56A-F697-B0CD6DBA771F}"/>
+              </a:ext>
+            </a:extLst>
+          </p:cNvPr>
+          <p:cNvPicPr>
+            <a:picLocks noChangeAspect="1"/>
+          </p:cNvPicPr>
+          <p:nvPr/>
+        </p:nvPicPr>
+        <p:blipFill>
+          <a:blip r:embed="rId6"/>
+          <a:stretch>
+            <a:fillRect/>
+          </a:stretch>
+        </p:blipFill>
+        <p:spPr>
+          <a:xfrm>
+            <a:off x="2568546" y="1066320"/>
+            <a:ext cx="5835011" cy="1781214"/>
+          </a:xfrm>
+          <a:prstGeom prst="rect">
+            <a:avLst/>
+          </a:prstGeom>
+        </p:spPr>
+      </p:pic>
+      <p:pic>
+        <p:nvPicPr>
+          <p:cNvPr id="16" name="Рисунок 15">
+            <a:extLst>
+              <a:ext uri="{FF2B5EF4-FFF2-40B4-BE49-F238E27FC236}">
+                <a16:creationId xmlns:a16="http://schemas.microsoft.com/office/drawing/2014/main" id="{2D29408F-1E2A-22C6-5260-D36DFD6E0D34}"/>
+              </a:ext>
+            </a:extLst>
+          </p:cNvPr>
+          <p:cNvPicPr>
+            <a:picLocks noChangeAspect="1"/>
+          </p:cNvPicPr>
+          <p:nvPr/>
+        </p:nvPicPr>
+        <p:blipFill>
+          <a:blip r:embed="rId7"/>
+          <a:stretch>
+            <a:fillRect/>
+          </a:stretch>
+        </p:blipFill>
+        <p:spPr>
+          <a:xfrm>
+            <a:off x="5486051" y="2939369"/>
+            <a:ext cx="5835011" cy="1898267"/>
+          </a:xfrm>
+          <a:prstGeom prst="rect">
+            <a:avLst/>
+          </a:prstGeom>
+        </p:spPr>
+      </p:pic>
+      <p:pic>
+        <p:nvPicPr>
+          <p:cNvPr id="18" name="Рисунок 17">
+            <a:extLst>
+              <a:ext uri="{FF2B5EF4-FFF2-40B4-BE49-F238E27FC236}">
+                <a16:creationId xmlns:a16="http://schemas.microsoft.com/office/drawing/2014/main" id="{743F5657-1A6F-F22E-8229-4D1E6262CFD1}"/>
+              </a:ext>
+            </a:extLst>
+          </p:cNvPr>
+          <p:cNvPicPr>
+            <a:picLocks noChangeAspect="1"/>
+          </p:cNvPicPr>
+          <p:nvPr/>
+        </p:nvPicPr>
+        <p:blipFill>
+          <a:blip r:embed="rId8"/>
+          <a:stretch>
+            <a:fillRect/>
+          </a:stretch>
+        </p:blipFill>
+        <p:spPr>
+          <a:xfrm>
+            <a:off x="-140444" y="-2421971"/>
+            <a:ext cx="3715016" cy="1608362"/>
+          </a:xfrm>
+          <a:prstGeom prst="rect">
+            <a:avLst/>
+          </a:prstGeom>
+        </p:spPr>
+      </p:pic>
+      <p:pic>
+        <p:nvPicPr>
+          <p:cNvPr id="20" name="Рисунок 19">
+            <a:extLst>
+              <a:ext uri="{FF2B5EF4-FFF2-40B4-BE49-F238E27FC236}">
+                <a16:creationId xmlns:a16="http://schemas.microsoft.com/office/drawing/2014/main" id="{7A0428BD-E447-B5F8-1109-D65ECA8749DC}"/>
+              </a:ext>
+            </a:extLst>
+          </p:cNvPr>
+          <p:cNvPicPr>
+            <a:picLocks noChangeAspect="1"/>
+          </p:cNvPicPr>
+          <p:nvPr/>
+        </p:nvPicPr>
+        <p:blipFill>
+          <a:blip r:embed="rId9"/>
+          <a:stretch>
+            <a:fillRect/>
+          </a:stretch>
+        </p:blipFill>
+        <p:spPr>
+          <a:xfrm>
+            <a:off x="2568546" y="4936003"/>
+            <a:ext cx="5338623" cy="1705715"/>
+          </a:xfrm>
+          <a:prstGeom prst="rect">
+            <a:avLst/>
+          </a:prstGeom>
+        </p:spPr>
+      </p:pic>
+      <p:pic>
+        <p:nvPicPr>
+          <p:cNvPr id="22" name="Рисунок 21">
+            <a:extLst>
+              <a:ext uri="{FF2B5EF4-FFF2-40B4-BE49-F238E27FC236}">
+                <a16:creationId xmlns:a16="http://schemas.microsoft.com/office/drawing/2014/main" id="{983672E9-5284-4CB8-765B-B524D5A90FA0}"/>
+              </a:ext>
+            </a:extLst>
+          </p:cNvPr>
+          <p:cNvPicPr>
+            <a:picLocks noChangeAspect="1"/>
+          </p:cNvPicPr>
+          <p:nvPr/>
+        </p:nvPicPr>
+        <p:blipFill>
+          <a:blip r:embed="rId10"/>
+          <a:stretch>
+            <a:fillRect/>
+          </a:stretch>
+        </p:blipFill>
+        <p:spPr>
+          <a:xfrm>
+            <a:off x="3884170" y="-2723628"/>
+            <a:ext cx="5657374" cy="2209203"/>
+          </a:xfrm>
+          <a:prstGeom prst="rect">
+            <a:avLst/>
+          </a:prstGeom>
+        </p:spPr>
+      </p:pic>
+      <p:sp>
+        <p:nvSpPr>
+          <p:cNvPr id="4" name="Овал 3">
+            <a:extLst>
+              <a:ext uri="{FF2B5EF4-FFF2-40B4-BE49-F238E27FC236}">
+                <a16:creationId xmlns:a16="http://schemas.microsoft.com/office/drawing/2014/main" id="{079065B1-0701-576F-BA70-134F820C9AD8}"/>
+              </a:ext>
+            </a:extLst>
+          </p:cNvPr>
+          <p:cNvSpPr/>
+          <p:nvPr/>
+        </p:nvSpPr>
+        <p:spPr>
+          <a:xfrm>
+            <a:off x="11059887" y="5761532"/>
+            <a:ext cx="928914" cy="870857"/>
+          </a:xfrm>
+          <a:prstGeom prst="ellipse">
+            <a:avLst/>
+          </a:prstGeom>
+        </p:spPr>
+        <p:style>
+          <a:lnRef idx="2">
+            <a:schemeClr val="dk1"/>
+          </a:lnRef>
+          <a:fillRef idx="1">
+            <a:schemeClr val="lt1"/>
+          </a:fillRef>
+          <a:effectRef idx="0">
+            <a:schemeClr val="dk1"/>
+          </a:effectRef>
+          <a:fontRef idx="minor">
+            <a:schemeClr val="dk1"/>
+          </a:fontRef>
+        </p:style>
+        <p:txBody>
+          <a:bodyPr rtlCol="0" anchor="ctr"/>
+          <a:lstStyle/>
+          <a:p>
+            <a:pPr algn="ctr"/>
+            <a:r>
+              <a:rPr lang="en-US" sz="4800" b="1" dirty="0">
+                <a:latin typeface="Bahnschrift" panose="020B0502040204020203" pitchFamily="34" charset="0"/>
+              </a:rPr>
+              <a:t>7</a:t>
+            </a:r>
+            <a:endParaRPr lang="ru-RU" sz="4800" b="1" dirty="0">
+              <a:latin typeface="Bahnschrift" panose="020B0502040204020203" pitchFamily="34" charset="0"/>
+            </a:endParaRPr>
+          </a:p>
+        </p:txBody>
+      </p:sp>
+    </p:spTree>
+    <p:extLst>
+      <p:ext uri="{BB962C8B-B14F-4D97-AF65-F5344CB8AC3E}">
+        <p14:creationId xmlns:p14="http://schemas.microsoft.com/office/powerpoint/2010/main" val="800678927"/>
+      </p:ext>
+    </p:extLst>
+  </p:cSld>
+  <p:clrMapOvr>
+    <a:masterClrMapping/>
+  </p:clrMapOvr>
+  <mc:AlternateContent xmlns:mc="http://schemas.openxmlformats.org/markup-compatibility/2006" xmlns:p159="http://schemas.microsoft.com/office/powerpoint/2015/09/main">
+    <mc:Choice Requires="p159">
+      <p:transition xmlns:p14="http://schemas.microsoft.com/office/powerpoint/2010/main" spd="slow" p14:dur="2000">
+        <p159:morph option="byObject"/>
+      </p:transition>
+    </mc:Choice>
+    <mc:Fallback xmlns="">
+      <p:transition spd="slow">
+        <p:fade/>
+      </p:transition>
+    </mc:Fallback>
+  </mc:AlternateContent>
+</p:sld>
+</file>
+
+<file path=ppt/slides/slide8.xml><?xml version="1.0" encoding="utf-8"?>
+<p:sld xmlns:a="http://schemas.openxmlformats.org/drawingml/2006/main" xmlns:r="http://schemas.openxmlformats.org/officeDocument/2006/relationships" xmlns:p="http://schemas.openxmlformats.org/presentationml/2006/main">
+  <p:cSld>
+    <p:spTree>
+      <p:nvGrpSpPr>
+        <p:cNvPr id="1" name="">
+          <a:extLst>
+            <a:ext uri="{FF2B5EF4-FFF2-40B4-BE49-F238E27FC236}">
+              <a16:creationId xmlns:a16="http://schemas.microsoft.com/office/drawing/2014/main" id="{817C0A93-0BAA-A3C2-446B-2F2A2DE06EC0}"/>
+            </a:ext>
+          </a:extLst>
+        </p:cNvPr>
+        <p:cNvGrpSpPr/>
+        <p:nvPr/>
+      </p:nvGrpSpPr>
+      <p:grpSpPr>
+        <a:xfrm>
+          <a:off x="0" y="0"/>
+          <a:ext cx="0" cy="0"/>
+          <a:chOff x="0" y="0"/>
+          <a:chExt cx="0" cy="0"/>
+        </a:xfrm>
+      </p:grpSpPr>
+      <p:sp>
+        <p:nvSpPr>
+          <p:cNvPr id="6" name="Прямоугольник 5">
+            <a:extLst>
+              <a:ext uri="{FF2B5EF4-FFF2-40B4-BE49-F238E27FC236}">
+                <a16:creationId xmlns:a16="http://schemas.microsoft.com/office/drawing/2014/main" id="{C15D2AE5-FCCA-179C-00B8-83DF42EFAD9A}"/>
+              </a:ext>
+            </a:extLst>
+          </p:cNvPr>
+          <p:cNvSpPr/>
+          <p:nvPr/>
+        </p:nvSpPr>
+        <p:spPr>
+          <a:xfrm>
+            <a:off x="-2235200" y="0"/>
+            <a:ext cx="14427200" cy="6858000"/>
+          </a:xfrm>
+          <a:prstGeom prst="rect">
+            <a:avLst/>
+          </a:prstGeom>
+          <a:solidFill>
+            <a:srgbClr val="CCECFF"/>
+          </a:solidFill>
+        </p:spPr>
+        <p:style>
+          <a:lnRef idx="2">
+            <a:schemeClr val="accent1">
+              <a:shade val="15000"/>
+            </a:schemeClr>
+          </a:lnRef>
+          <a:fillRef idx="1">
+            <a:schemeClr val="accent1"/>
+          </a:fillRef>
+          <a:effectRef idx="0">
+            <a:schemeClr val="accent1"/>
+          </a:effectRef>
+          <a:fontRef idx="minor">
+            <a:schemeClr val="lt1"/>
+          </a:fontRef>
+        </p:style>
+        <p:txBody>
+          <a:bodyPr rtlCol="0" anchor="ctr"/>
+          <a:lstStyle/>
+          <a:p>
+            <a:pPr algn="ctr"/>
+            <a:endParaRPr lang="ru-RU"/>
+          </a:p>
+        </p:txBody>
+      </p:sp>
+      <p:sp>
+        <p:nvSpPr>
+          <p:cNvPr id="7" name="Прямоугольник 6">
+            <a:extLst>
+              <a:ext uri="{FF2B5EF4-FFF2-40B4-BE49-F238E27FC236}">
+                <a16:creationId xmlns:a16="http://schemas.microsoft.com/office/drawing/2014/main" id="{2AC9087C-9ABE-BE43-8BC2-B38A770C76E6}"/>
+              </a:ext>
+            </a:extLst>
+          </p:cNvPr>
+          <p:cNvSpPr/>
+          <p:nvPr/>
+        </p:nvSpPr>
+        <p:spPr>
+          <a:xfrm>
+            <a:off x="-3451101" y="0"/>
+            <a:ext cx="15643101" cy="6858000"/>
+          </a:xfrm>
+          <a:prstGeom prst="rect">
+            <a:avLst/>
+          </a:prstGeom>
+          <a:solidFill>
+            <a:srgbClr val="99CCFF"/>
+          </a:solidFill>
+        </p:spPr>
+        <p:style>
+          <a:lnRef idx="2">
+            <a:schemeClr val="accent1">
+              <a:shade val="15000"/>
+            </a:schemeClr>
+          </a:lnRef>
+          <a:fillRef idx="1">
+            <a:schemeClr val="accent1"/>
+          </a:fillRef>
+          <a:effectRef idx="0">
+            <a:schemeClr val="accent1"/>
+          </a:effectRef>
+          <a:fontRef idx="minor">
+            <a:schemeClr val="lt1"/>
+          </a:fontRef>
+        </p:style>
+        <p:txBody>
+          <a:bodyPr rtlCol="0" anchor="ctr"/>
+          <a:lstStyle/>
+          <a:p>
+            <a:pPr algn="ctr"/>
+            <a:endParaRPr lang="ru-RU"/>
+          </a:p>
+        </p:txBody>
+      </p:sp>
+      <p:sp>
+        <p:nvSpPr>
+          <p:cNvPr id="8" name="Прямоугольник 7">
+            <a:extLst>
+              <a:ext uri="{FF2B5EF4-FFF2-40B4-BE49-F238E27FC236}">
+                <a16:creationId xmlns:a16="http://schemas.microsoft.com/office/drawing/2014/main" id="{4C971EBF-3B8C-5DDA-5FF9-DAFDCC63B5CB}"/>
+              </a:ext>
+            </a:extLst>
+          </p:cNvPr>
+          <p:cNvSpPr/>
+          <p:nvPr/>
+        </p:nvSpPr>
+        <p:spPr>
+          <a:xfrm>
+            <a:off x="-4207824" y="0"/>
+            <a:ext cx="16399824" cy="6858000"/>
+          </a:xfrm>
+          <a:prstGeom prst="rect">
+            <a:avLst/>
+          </a:prstGeom>
+          <a:solidFill>
+            <a:srgbClr val="66CCFF"/>
+          </a:solidFill>
+        </p:spPr>
+        <p:style>
+          <a:lnRef idx="2">
+            <a:schemeClr val="accent1">
+              <a:shade val="15000"/>
+            </a:schemeClr>
+          </a:lnRef>
+          <a:fillRef idx="1">
+            <a:schemeClr val="accent1"/>
+          </a:fillRef>
+          <a:effectRef idx="0">
+            <a:schemeClr val="accent1"/>
+          </a:effectRef>
+          <a:fontRef idx="minor">
+            <a:schemeClr val="lt1"/>
+          </a:fontRef>
+        </p:style>
+        <p:txBody>
+          <a:bodyPr rtlCol="0" anchor="ctr"/>
+          <a:lstStyle/>
+          <a:p>
+            <a:pPr algn="ctr"/>
+            <a:endParaRPr lang="ru-RU"/>
+          </a:p>
+        </p:txBody>
+      </p:sp>
+      <p:sp>
+        <p:nvSpPr>
+          <p:cNvPr id="9" name="Прямоугольник 8">
+            <a:extLst>
+              <a:ext uri="{FF2B5EF4-FFF2-40B4-BE49-F238E27FC236}">
+                <a16:creationId xmlns:a16="http://schemas.microsoft.com/office/drawing/2014/main" id="{5A855681-C060-A96C-3C44-A3CB67FEC8DA}"/>
+              </a:ext>
+            </a:extLst>
+          </p:cNvPr>
+          <p:cNvSpPr/>
+          <p:nvPr/>
+        </p:nvSpPr>
+        <p:spPr>
+          <a:xfrm>
+            <a:off x="-4964547" y="0"/>
+            <a:ext cx="6555179" cy="6858000"/>
+          </a:xfrm>
+          <a:prstGeom prst="rect">
+            <a:avLst/>
+          </a:prstGeom>
+          <a:solidFill>
+            <a:srgbClr val="3399FF"/>
+          </a:solidFill>
+        </p:spPr>
+        <p:style>
+          <a:lnRef idx="2">
+            <a:schemeClr val="accent1">
+              <a:shade val="15000"/>
+            </a:schemeClr>
+          </a:lnRef>
+          <a:fillRef idx="1">
+            <a:schemeClr val="accent1"/>
+          </a:fillRef>
+          <a:effectRef idx="0">
+            <a:schemeClr val="accent1"/>
+          </a:effectRef>
+          <a:fontRef idx="minor">
+            <a:schemeClr val="lt1"/>
+          </a:fontRef>
+        </p:style>
+        <p:txBody>
+          <a:bodyPr rtlCol="0" anchor="ctr"/>
+          <a:lstStyle/>
+          <a:p>
+            <a:pPr algn="ctr"/>
+            <a:endParaRPr lang="ru-RU"/>
+          </a:p>
+        </p:txBody>
+      </p:sp>
+      <p:sp>
+        <p:nvSpPr>
+          <p:cNvPr id="10" name="Прямоугольник 9">
+            <a:extLst>
+              <a:ext uri="{FF2B5EF4-FFF2-40B4-BE49-F238E27FC236}">
+                <a16:creationId xmlns:a16="http://schemas.microsoft.com/office/drawing/2014/main" id="{C8482234-0718-400F-7E17-120687F586E8}"/>
+              </a:ext>
+            </a:extLst>
+          </p:cNvPr>
+          <p:cNvSpPr/>
+          <p:nvPr/>
+        </p:nvSpPr>
+        <p:spPr>
+          <a:xfrm>
+            <a:off x="-5742378" y="0"/>
+            <a:ext cx="6555179" cy="6858000"/>
+          </a:xfrm>
+          <a:prstGeom prst="rect">
+            <a:avLst/>
+          </a:prstGeom>
+          <a:solidFill>
+            <a:srgbClr val="0066FF"/>
+          </a:solidFill>
+        </p:spPr>
+        <p:style>
+          <a:lnRef idx="2">
+            <a:schemeClr val="accent1">
+              <a:shade val="15000"/>
+            </a:schemeClr>
+          </a:lnRef>
+          <a:fillRef idx="1">
+            <a:schemeClr val="accent1"/>
+          </a:fillRef>
+          <a:effectRef idx="0">
+            <a:schemeClr val="accent1"/>
+          </a:effectRef>
+          <a:fontRef idx="minor">
+            <a:schemeClr val="lt1"/>
+          </a:fontRef>
+        </p:style>
+        <p:txBody>
+          <a:bodyPr rtlCol="0" anchor="ctr"/>
+          <a:lstStyle/>
+          <a:p>
+            <a:pPr algn="ctr"/>
+            <a:endParaRPr lang="ru-RU"/>
+          </a:p>
+        </p:txBody>
+      </p:sp>
+      <p:sp>
+        <p:nvSpPr>
+          <p:cNvPr id="3" name="TextBox 2">
+            <a:extLst>
+              <a:ext uri="{FF2B5EF4-FFF2-40B4-BE49-F238E27FC236}">
+                <a16:creationId xmlns:a16="http://schemas.microsoft.com/office/drawing/2014/main" id="{8F5FC7C3-F587-20C3-E89A-CCB97B5FB8F0}"/>
+              </a:ext>
+            </a:extLst>
+          </p:cNvPr>
+          <p:cNvSpPr txBox="1"/>
+          <p:nvPr/>
+        </p:nvSpPr>
+        <p:spPr>
+          <a:xfrm>
+            <a:off x="4370449" y="266125"/>
+            <a:ext cx="6555179" cy="584775"/>
+          </a:xfrm>
+          <a:prstGeom prst="rect">
+            <a:avLst/>
+          </a:prstGeom>
+          <a:noFill/>
+        </p:spPr>
+        <p:txBody>
+          <a:bodyPr wrap="square" rtlCol="0">
+            <a:spAutoFit/>
+          </a:bodyPr>
+          <a:lstStyle/>
+          <a:p>
+            <a:r>
+              <a:rPr lang="ru-RU" sz="3200" b="1" dirty="0">
+                <a:latin typeface="Bahnschrift" panose="020B0502040204020203" pitchFamily="34" charset="0"/>
+              </a:rPr>
+              <a:t>Скриншоты веб-страниц</a:t>
+            </a:r>
+          </a:p>
+        </p:txBody>
+      </p:sp>
+      <mc:AlternateContent xmlns:mc="http://schemas.openxmlformats.org/markup-compatibility/2006" xmlns:p14="http://schemas.microsoft.com/office/powerpoint/2010/main">
+        <mc:Choice Requires="p14">
+          <p:contentPart p14:bwMode="auto" r:id="rId2">
+            <p14:nvContentPartPr>
+              <p14:cNvPr id="2" name="Рукописный ввод 1">
+                <a:extLst>
+                  <a:ext uri="{FF2B5EF4-FFF2-40B4-BE49-F238E27FC236}">
+                    <a16:creationId xmlns:a16="http://schemas.microsoft.com/office/drawing/2014/main" id="{49ADCA12-CD45-2446-994E-87482B599485}"/>
+                  </a:ext>
+                </a:extLst>
+              </p14:cNvPr>
+              <p14:cNvContentPartPr/>
+              <p14:nvPr/>
+            </p14:nvContentPartPr>
+            <p14:xfrm>
+              <a:off x="5867280" y="3961980"/>
+              <a:ext cx="360" cy="360"/>
+            </p14:xfrm>
+          </p:contentPart>
+        </mc:Choice>
+        <mc:Fallback xmlns="">
+          <p:pic>
+            <p:nvPicPr>
+              <p:cNvPr id="2" name="Рукописный ввод 1">
+                <a:extLst>
+                  <a:ext uri="{FF2B5EF4-FFF2-40B4-BE49-F238E27FC236}">
+                    <a16:creationId xmlns:a16="http://schemas.microsoft.com/office/drawing/2014/main" id="{49ADCA12-CD45-2446-994E-87482B599485}"/>
                   </a:ext>
                 </a:extLst>
               </p:cNvPr>
@@ -8384,8 +8578,8 @@
             </p:blipFill>
             <p:spPr>
               <a:xfrm>
-                <a:off x="11677660" y="6036580"/>
-                <a:ext cx="268200" cy="611640"/>
+                <a:off x="5861160" y="3955860"/>
+                <a:ext cx="12600" cy="12600"/>
               </a:xfrm>
               <a:prstGeom prst="rect">
                 <a:avLst/>
@@ -8394,19 +8588,813 @@
           </p:pic>
         </mc:Fallback>
       </mc:AlternateContent>
+      <p:pic>
+        <p:nvPicPr>
+          <p:cNvPr id="12" name="Рисунок 11">
+            <a:extLst>
+              <a:ext uri="{FF2B5EF4-FFF2-40B4-BE49-F238E27FC236}">
+                <a16:creationId xmlns:a16="http://schemas.microsoft.com/office/drawing/2014/main" id="{BA5A0B49-5354-9A23-38B3-B42AED9CC70B}"/>
+              </a:ext>
+            </a:extLst>
+          </p:cNvPr>
+          <p:cNvPicPr>
+            <a:picLocks noChangeAspect="1"/>
+          </p:cNvPicPr>
+          <p:nvPr/>
+        </p:nvPicPr>
+        <p:blipFill>
+          <a:blip r:embed="rId4"/>
+          <a:stretch>
+            <a:fillRect/>
+          </a:stretch>
+        </p:blipFill>
+        <p:spPr>
+          <a:xfrm>
+            <a:off x="3848330" y="865034"/>
+            <a:ext cx="5807265" cy="3096586"/>
+          </a:xfrm>
+          <a:prstGeom prst="rect">
+            <a:avLst/>
+          </a:prstGeom>
+        </p:spPr>
+      </p:pic>
+      <p:pic>
+        <p:nvPicPr>
+          <p:cNvPr id="14" name="Рисунок 13">
+            <a:extLst>
+              <a:ext uri="{FF2B5EF4-FFF2-40B4-BE49-F238E27FC236}">
+                <a16:creationId xmlns:a16="http://schemas.microsoft.com/office/drawing/2014/main" id="{91489ABD-1888-E3EE-2AD7-03BDC5D5B708}"/>
+              </a:ext>
+            </a:extLst>
+          </p:cNvPr>
+          <p:cNvPicPr>
+            <a:picLocks noChangeAspect="1"/>
+          </p:cNvPicPr>
+          <p:nvPr/>
+        </p:nvPicPr>
+        <p:blipFill>
+          <a:blip r:embed="rId5"/>
+          <a:stretch>
+            <a:fillRect/>
+          </a:stretch>
+        </p:blipFill>
+        <p:spPr>
+          <a:xfrm>
+            <a:off x="-12355220" y="979027"/>
+            <a:ext cx="5835011" cy="1781214"/>
+          </a:xfrm>
+          <a:prstGeom prst="rect">
+            <a:avLst/>
+          </a:prstGeom>
+        </p:spPr>
+      </p:pic>
+      <p:pic>
+        <p:nvPicPr>
+          <p:cNvPr id="16" name="Рисунок 15">
+            <a:extLst>
+              <a:ext uri="{FF2B5EF4-FFF2-40B4-BE49-F238E27FC236}">
+                <a16:creationId xmlns:a16="http://schemas.microsoft.com/office/drawing/2014/main" id="{500F2207-2A84-5896-C3A2-B189D61D4053}"/>
+              </a:ext>
+            </a:extLst>
+          </p:cNvPr>
+          <p:cNvPicPr>
+            <a:picLocks noChangeAspect="1"/>
+          </p:cNvPicPr>
+          <p:nvPr/>
+        </p:nvPicPr>
+        <p:blipFill>
+          <a:blip r:embed="rId6"/>
+          <a:stretch>
+            <a:fillRect/>
+          </a:stretch>
+        </p:blipFill>
+        <p:spPr>
+          <a:xfrm>
+            <a:off x="15049151" y="3037736"/>
+            <a:ext cx="5835011" cy="1898267"/>
+          </a:xfrm>
+          <a:prstGeom prst="rect">
+            <a:avLst/>
+          </a:prstGeom>
+        </p:spPr>
+      </p:pic>
+      <p:pic>
+        <p:nvPicPr>
+          <p:cNvPr id="18" name="Рисунок 17">
+            <a:extLst>
+              <a:ext uri="{FF2B5EF4-FFF2-40B4-BE49-F238E27FC236}">
+                <a16:creationId xmlns:a16="http://schemas.microsoft.com/office/drawing/2014/main" id="{89353B5C-003F-76F7-DCC0-FC127AEC6266}"/>
+              </a:ext>
+            </a:extLst>
+          </p:cNvPr>
+          <p:cNvPicPr>
+            <a:picLocks noChangeAspect="1"/>
+          </p:cNvPicPr>
+          <p:nvPr/>
+        </p:nvPicPr>
+        <p:blipFill>
+          <a:blip r:embed="rId7"/>
+          <a:stretch>
+            <a:fillRect/>
+          </a:stretch>
+        </p:blipFill>
+        <p:spPr>
+          <a:xfrm>
+            <a:off x="2347355" y="4100477"/>
+            <a:ext cx="4010268" cy="2193669"/>
+          </a:xfrm>
+          <a:prstGeom prst="rect">
+            <a:avLst/>
+          </a:prstGeom>
+        </p:spPr>
+      </p:pic>
+      <p:pic>
+        <p:nvPicPr>
+          <p:cNvPr id="20" name="Рисунок 19">
+            <a:extLst>
+              <a:ext uri="{FF2B5EF4-FFF2-40B4-BE49-F238E27FC236}">
+                <a16:creationId xmlns:a16="http://schemas.microsoft.com/office/drawing/2014/main" id="{1E145C0A-89EB-A4BA-F4EF-3F9456BA1686}"/>
+              </a:ext>
+            </a:extLst>
+          </p:cNvPr>
+          <p:cNvPicPr>
+            <a:picLocks noChangeAspect="1"/>
+          </p:cNvPicPr>
+          <p:nvPr/>
+        </p:nvPicPr>
+        <p:blipFill>
+          <a:blip r:embed="rId8"/>
+          <a:stretch>
+            <a:fillRect/>
+          </a:stretch>
+        </p:blipFill>
+        <p:spPr>
+          <a:xfrm>
+            <a:off x="-12066986" y="4936003"/>
+            <a:ext cx="5338623" cy="1705715"/>
+          </a:xfrm>
+          <a:prstGeom prst="rect">
+            <a:avLst/>
+          </a:prstGeom>
+        </p:spPr>
+      </p:pic>
+      <p:pic>
+        <p:nvPicPr>
+          <p:cNvPr id="22" name="Рисунок 21">
+            <a:extLst>
+              <a:ext uri="{FF2B5EF4-FFF2-40B4-BE49-F238E27FC236}">
+                <a16:creationId xmlns:a16="http://schemas.microsoft.com/office/drawing/2014/main" id="{133D5C28-A7D5-56BC-9967-644F74B0A495}"/>
+              </a:ext>
+            </a:extLst>
+          </p:cNvPr>
+          <p:cNvPicPr>
+            <a:picLocks noChangeAspect="1"/>
+          </p:cNvPicPr>
+          <p:nvPr/>
+        </p:nvPicPr>
+        <p:blipFill>
+          <a:blip r:embed="rId9"/>
+          <a:stretch>
+            <a:fillRect/>
+          </a:stretch>
+        </p:blipFill>
+        <p:spPr>
+          <a:xfrm>
+            <a:off x="7114345" y="4091608"/>
+            <a:ext cx="4455673" cy="2202537"/>
+          </a:xfrm>
+          <a:prstGeom prst="rect">
+            <a:avLst/>
+          </a:prstGeom>
+        </p:spPr>
+      </p:pic>
+      <p:sp>
+        <p:nvSpPr>
+          <p:cNvPr id="5" name="Овал 4">
+            <a:extLst>
+              <a:ext uri="{FF2B5EF4-FFF2-40B4-BE49-F238E27FC236}">
+                <a16:creationId xmlns:a16="http://schemas.microsoft.com/office/drawing/2014/main" id="{F3EC9713-812F-17B5-B998-3DF3F7FA6315}"/>
+              </a:ext>
+            </a:extLst>
+          </p:cNvPr>
+          <p:cNvSpPr/>
+          <p:nvPr/>
+        </p:nvSpPr>
+        <p:spPr>
+          <a:xfrm>
+            <a:off x="11059887" y="5761532"/>
+            <a:ext cx="928914" cy="870857"/>
+          </a:xfrm>
+          <a:prstGeom prst="ellipse">
+            <a:avLst/>
+          </a:prstGeom>
+        </p:spPr>
+        <p:style>
+          <a:lnRef idx="2">
+            <a:schemeClr val="dk1"/>
+          </a:lnRef>
+          <a:fillRef idx="1">
+            <a:schemeClr val="lt1"/>
+          </a:fillRef>
+          <a:effectRef idx="0">
+            <a:schemeClr val="dk1"/>
+          </a:effectRef>
+          <a:fontRef idx="minor">
+            <a:schemeClr val="dk1"/>
+          </a:fontRef>
+        </p:style>
+        <p:txBody>
+          <a:bodyPr rtlCol="0" anchor="ctr"/>
+          <a:lstStyle/>
+          <a:p>
+            <a:pPr algn="ctr"/>
+            <a:r>
+              <a:rPr lang="en-US" sz="4800" b="1" dirty="0">
+                <a:latin typeface="Bahnschrift" panose="020B0502040204020203" pitchFamily="34" charset="0"/>
+              </a:rPr>
+              <a:t>8</a:t>
+            </a:r>
+            <a:endParaRPr lang="ru-RU" sz="4800" b="1" dirty="0">
+              <a:latin typeface="Bahnschrift" panose="020B0502040204020203" pitchFamily="34" charset="0"/>
+            </a:endParaRPr>
+          </a:p>
+        </p:txBody>
+      </p:sp>
     </p:spTree>
     <p:extLst>
       <p:ext uri="{BB962C8B-B14F-4D97-AF65-F5344CB8AC3E}">
-        <p14:creationId xmlns:p14="http://schemas.microsoft.com/office/powerpoint/2010/main" val="1229051695"/>
+        <p14:creationId xmlns:p14="http://schemas.microsoft.com/office/powerpoint/2010/main" val="1183806610"/>
       </p:ext>
     </p:extLst>
   </p:cSld>
   <p:clrMapOvr>
     <a:masterClrMapping/>
   </p:clrMapOvr>
-  <p:transition spd="slow">
-    <p:wipe/>
-  </p:transition>
+  <mc:AlternateContent xmlns:mc="http://schemas.openxmlformats.org/markup-compatibility/2006" xmlns:p159="http://schemas.microsoft.com/office/powerpoint/2015/09/main">
+    <mc:Choice Requires="p159">
+      <p:transition xmlns:p14="http://schemas.microsoft.com/office/powerpoint/2010/main" spd="slow" p14:dur="2000">
+        <p159:morph option="byObject"/>
+      </p:transition>
+    </mc:Choice>
+    <mc:Fallback xmlns="">
+      <p:transition spd="slow">
+        <p:fade/>
+      </p:transition>
+    </mc:Fallback>
+  </mc:AlternateContent>
+</p:sld>
+</file>
+
+<file path=ppt/slides/slide9.xml><?xml version="1.0" encoding="utf-8"?>
+<p:sld xmlns:a="http://schemas.openxmlformats.org/drawingml/2006/main" xmlns:r="http://schemas.openxmlformats.org/officeDocument/2006/relationships" xmlns:p="http://schemas.openxmlformats.org/presentationml/2006/main">
+  <p:cSld>
+    <p:spTree>
+      <p:nvGrpSpPr>
+        <p:cNvPr id="1" name="">
+          <a:extLst>
+            <a:ext uri="{FF2B5EF4-FFF2-40B4-BE49-F238E27FC236}">
+              <a16:creationId xmlns:a16="http://schemas.microsoft.com/office/drawing/2014/main" id="{193031E2-C683-AACF-5102-68BD31D4C07E}"/>
+            </a:ext>
+          </a:extLst>
+        </p:cNvPr>
+        <p:cNvGrpSpPr/>
+        <p:nvPr/>
+      </p:nvGrpSpPr>
+      <p:grpSpPr>
+        <a:xfrm>
+          <a:off x="0" y="0"/>
+          <a:ext cx="0" cy="0"/>
+          <a:chOff x="0" y="0"/>
+          <a:chExt cx="0" cy="0"/>
+        </a:xfrm>
+      </p:grpSpPr>
+      <p:sp>
+        <p:nvSpPr>
+          <p:cNvPr id="6" name="Прямоугольник 5">
+            <a:extLst>
+              <a:ext uri="{FF2B5EF4-FFF2-40B4-BE49-F238E27FC236}">
+                <a16:creationId xmlns:a16="http://schemas.microsoft.com/office/drawing/2014/main" id="{4003FF7B-5073-1D1B-C8DF-1A6BA25189DF}"/>
+              </a:ext>
+            </a:extLst>
+          </p:cNvPr>
+          <p:cNvSpPr/>
+          <p:nvPr/>
+        </p:nvSpPr>
+        <p:spPr>
+          <a:xfrm>
+            <a:off x="-2235200" y="0"/>
+            <a:ext cx="14427200" cy="6858000"/>
+          </a:xfrm>
+          <a:prstGeom prst="rect">
+            <a:avLst/>
+          </a:prstGeom>
+          <a:solidFill>
+            <a:srgbClr val="CCECFF"/>
+          </a:solidFill>
+        </p:spPr>
+        <p:style>
+          <a:lnRef idx="2">
+            <a:schemeClr val="accent1">
+              <a:shade val="15000"/>
+            </a:schemeClr>
+          </a:lnRef>
+          <a:fillRef idx="1">
+            <a:schemeClr val="accent1"/>
+          </a:fillRef>
+          <a:effectRef idx="0">
+            <a:schemeClr val="accent1"/>
+          </a:effectRef>
+          <a:fontRef idx="minor">
+            <a:schemeClr val="lt1"/>
+          </a:fontRef>
+        </p:style>
+        <p:txBody>
+          <a:bodyPr rtlCol="0" anchor="ctr"/>
+          <a:lstStyle/>
+          <a:p>
+            <a:pPr algn="ctr"/>
+            <a:endParaRPr lang="ru-RU"/>
+          </a:p>
+        </p:txBody>
+      </p:sp>
+      <p:sp>
+        <p:nvSpPr>
+          <p:cNvPr id="7" name="Прямоугольник 6">
+            <a:extLst>
+              <a:ext uri="{FF2B5EF4-FFF2-40B4-BE49-F238E27FC236}">
+                <a16:creationId xmlns:a16="http://schemas.microsoft.com/office/drawing/2014/main" id="{50C1DB9E-39D0-9C1A-C4D2-AC3CA2150853}"/>
+              </a:ext>
+            </a:extLst>
+          </p:cNvPr>
+          <p:cNvSpPr/>
+          <p:nvPr/>
+        </p:nvSpPr>
+        <p:spPr>
+          <a:xfrm>
+            <a:off x="-3451101" y="0"/>
+            <a:ext cx="15643101" cy="6858000"/>
+          </a:xfrm>
+          <a:prstGeom prst="rect">
+            <a:avLst/>
+          </a:prstGeom>
+          <a:solidFill>
+            <a:srgbClr val="99CCFF"/>
+          </a:solidFill>
+        </p:spPr>
+        <p:style>
+          <a:lnRef idx="2">
+            <a:schemeClr val="accent1">
+              <a:shade val="15000"/>
+            </a:schemeClr>
+          </a:lnRef>
+          <a:fillRef idx="1">
+            <a:schemeClr val="accent1"/>
+          </a:fillRef>
+          <a:effectRef idx="0">
+            <a:schemeClr val="accent1"/>
+          </a:effectRef>
+          <a:fontRef idx="minor">
+            <a:schemeClr val="lt1"/>
+          </a:fontRef>
+        </p:style>
+        <p:txBody>
+          <a:bodyPr rtlCol="0" anchor="ctr"/>
+          <a:lstStyle/>
+          <a:p>
+            <a:pPr algn="ctr"/>
+            <a:endParaRPr lang="ru-RU"/>
+          </a:p>
+        </p:txBody>
+      </p:sp>
+      <p:sp>
+        <p:nvSpPr>
+          <p:cNvPr id="8" name="Прямоугольник 7">
+            <a:extLst>
+              <a:ext uri="{FF2B5EF4-FFF2-40B4-BE49-F238E27FC236}">
+                <a16:creationId xmlns:a16="http://schemas.microsoft.com/office/drawing/2014/main" id="{3752E8E7-CAC2-E479-D364-32AD9128E508}"/>
+              </a:ext>
+            </a:extLst>
+          </p:cNvPr>
+          <p:cNvSpPr/>
+          <p:nvPr/>
+        </p:nvSpPr>
+        <p:spPr>
+          <a:xfrm>
+            <a:off x="-4207824" y="0"/>
+            <a:ext cx="16399824" cy="6858000"/>
+          </a:xfrm>
+          <a:prstGeom prst="rect">
+            <a:avLst/>
+          </a:prstGeom>
+          <a:solidFill>
+            <a:srgbClr val="66CCFF"/>
+          </a:solidFill>
+        </p:spPr>
+        <p:style>
+          <a:lnRef idx="2">
+            <a:schemeClr val="accent1">
+              <a:shade val="15000"/>
+            </a:schemeClr>
+          </a:lnRef>
+          <a:fillRef idx="1">
+            <a:schemeClr val="accent1"/>
+          </a:fillRef>
+          <a:effectRef idx="0">
+            <a:schemeClr val="accent1"/>
+          </a:effectRef>
+          <a:fontRef idx="minor">
+            <a:schemeClr val="lt1"/>
+          </a:fontRef>
+        </p:style>
+        <p:txBody>
+          <a:bodyPr rtlCol="0" anchor="ctr"/>
+          <a:lstStyle/>
+          <a:p>
+            <a:pPr algn="ctr"/>
+            <a:endParaRPr lang="ru-RU"/>
+          </a:p>
+        </p:txBody>
+      </p:sp>
+      <p:sp>
+        <p:nvSpPr>
+          <p:cNvPr id="9" name="Прямоугольник 8">
+            <a:extLst>
+              <a:ext uri="{FF2B5EF4-FFF2-40B4-BE49-F238E27FC236}">
+                <a16:creationId xmlns:a16="http://schemas.microsoft.com/office/drawing/2014/main" id="{7F4597F5-8BE7-C0F4-1511-D2E8DC04233B}"/>
+              </a:ext>
+            </a:extLst>
+          </p:cNvPr>
+          <p:cNvSpPr/>
+          <p:nvPr/>
+        </p:nvSpPr>
+        <p:spPr>
+          <a:xfrm>
+            <a:off x="-4964547" y="0"/>
+            <a:ext cx="17156547" cy="6858000"/>
+          </a:xfrm>
+          <a:prstGeom prst="rect">
+            <a:avLst/>
+          </a:prstGeom>
+          <a:solidFill>
+            <a:srgbClr val="3399FF"/>
+          </a:solidFill>
+        </p:spPr>
+        <p:style>
+          <a:lnRef idx="2">
+            <a:schemeClr val="accent1">
+              <a:shade val="15000"/>
+            </a:schemeClr>
+          </a:lnRef>
+          <a:fillRef idx="1">
+            <a:schemeClr val="accent1"/>
+          </a:fillRef>
+          <a:effectRef idx="0">
+            <a:schemeClr val="accent1"/>
+          </a:effectRef>
+          <a:fontRef idx="minor">
+            <a:schemeClr val="lt1"/>
+          </a:fontRef>
+        </p:style>
+        <p:txBody>
+          <a:bodyPr rtlCol="0" anchor="ctr"/>
+          <a:lstStyle/>
+          <a:p>
+            <a:pPr algn="ctr"/>
+            <a:endParaRPr lang="ru-RU"/>
+          </a:p>
+        </p:txBody>
+      </p:sp>
+      <p:sp>
+        <p:nvSpPr>
+          <p:cNvPr id="10" name="Прямоугольник 9">
+            <a:extLst>
+              <a:ext uri="{FF2B5EF4-FFF2-40B4-BE49-F238E27FC236}">
+                <a16:creationId xmlns:a16="http://schemas.microsoft.com/office/drawing/2014/main" id="{96F78269-526C-4D7A-B5DC-AF20C9237813}"/>
+              </a:ext>
+            </a:extLst>
+          </p:cNvPr>
+          <p:cNvSpPr/>
+          <p:nvPr/>
+        </p:nvSpPr>
+        <p:spPr>
+          <a:xfrm>
+            <a:off x="-5742378" y="0"/>
+            <a:ext cx="6555179" cy="6858000"/>
+          </a:xfrm>
+          <a:prstGeom prst="rect">
+            <a:avLst/>
+          </a:prstGeom>
+          <a:solidFill>
+            <a:srgbClr val="0066FF"/>
+          </a:solidFill>
+        </p:spPr>
+        <p:style>
+          <a:lnRef idx="2">
+            <a:schemeClr val="accent1">
+              <a:shade val="15000"/>
+            </a:schemeClr>
+          </a:lnRef>
+          <a:fillRef idx="1">
+            <a:schemeClr val="accent1"/>
+          </a:fillRef>
+          <a:effectRef idx="0">
+            <a:schemeClr val="accent1"/>
+          </a:effectRef>
+          <a:fontRef idx="minor">
+            <a:schemeClr val="lt1"/>
+          </a:fontRef>
+        </p:style>
+        <p:txBody>
+          <a:bodyPr rtlCol="0" anchor="ctr"/>
+          <a:lstStyle/>
+          <a:p>
+            <a:pPr algn="ctr"/>
+            <a:endParaRPr lang="ru-RU"/>
+          </a:p>
+        </p:txBody>
+      </p:sp>
+      <p:sp>
+        <p:nvSpPr>
+          <p:cNvPr id="3" name="TextBox 2">
+            <a:extLst>
+              <a:ext uri="{FF2B5EF4-FFF2-40B4-BE49-F238E27FC236}">
+                <a16:creationId xmlns:a16="http://schemas.microsoft.com/office/drawing/2014/main" id="{B5A0B1CE-B335-774D-B7E0-0431C6D0773C}"/>
+              </a:ext>
+            </a:extLst>
+          </p:cNvPr>
+          <p:cNvSpPr txBox="1"/>
+          <p:nvPr/>
+        </p:nvSpPr>
+        <p:spPr>
+          <a:xfrm>
+            <a:off x="3613726" y="189925"/>
+            <a:ext cx="6555179" cy="584775"/>
+          </a:xfrm>
+          <a:prstGeom prst="rect">
+            <a:avLst/>
+          </a:prstGeom>
+          <a:noFill/>
+        </p:spPr>
+        <p:txBody>
+          <a:bodyPr wrap="square" rtlCol="0">
+            <a:spAutoFit/>
+          </a:bodyPr>
+          <a:lstStyle/>
+          <a:p>
+            <a:r>
+              <a:rPr lang="ru-RU" sz="3200" b="1" dirty="0">
+                <a:latin typeface="Bahnschrift" panose="020B0502040204020203" pitchFamily="34" charset="0"/>
+              </a:rPr>
+              <a:t>Репозиторий проекта</a:t>
+            </a:r>
+          </a:p>
+        </p:txBody>
+      </p:sp>
+      <mc:AlternateContent xmlns:mc="http://schemas.openxmlformats.org/markup-compatibility/2006" xmlns:p14="http://schemas.microsoft.com/office/powerpoint/2010/main">
+        <mc:Choice Requires="p14">
+          <p:contentPart p14:bwMode="auto" r:id="rId2">
+            <p14:nvContentPartPr>
+              <p14:cNvPr id="2" name="Рукописный ввод 1">
+                <a:extLst>
+                  <a:ext uri="{FF2B5EF4-FFF2-40B4-BE49-F238E27FC236}">
+                    <a16:creationId xmlns:a16="http://schemas.microsoft.com/office/drawing/2014/main" id="{2179F4C4-96D2-E327-1BAF-18BB81A25409}"/>
+                  </a:ext>
+                </a:extLst>
+              </p14:cNvPr>
+              <p14:cNvContentPartPr/>
+              <p14:nvPr/>
+            </p14:nvContentPartPr>
+            <p14:xfrm>
+              <a:off x="5867280" y="3961980"/>
+              <a:ext cx="360" cy="360"/>
+            </p14:xfrm>
+          </p:contentPart>
+        </mc:Choice>
+        <mc:Fallback xmlns="">
+          <p:pic>
+            <p:nvPicPr>
+              <p:cNvPr id="2" name="Рукописный ввод 1">
+                <a:extLst>
+                  <a:ext uri="{FF2B5EF4-FFF2-40B4-BE49-F238E27FC236}">
+                    <a16:creationId xmlns:a16="http://schemas.microsoft.com/office/drawing/2014/main" id="{2179F4C4-96D2-E327-1BAF-18BB81A25409}"/>
+                  </a:ext>
+                </a:extLst>
+              </p:cNvPr>
+              <p:cNvPicPr/>
+              <p:nvPr/>
+            </p:nvPicPr>
+            <p:blipFill>
+              <a:blip r:embed="rId3"/>
+              <a:stretch>
+                <a:fillRect/>
+              </a:stretch>
+            </p:blipFill>
+            <p:spPr>
+              <a:xfrm>
+                <a:off x="5861160" y="3955860"/>
+                <a:ext cx="12600" cy="12600"/>
+              </a:xfrm>
+              <a:prstGeom prst="rect">
+                <a:avLst/>
+              </a:prstGeom>
+            </p:spPr>
+          </p:pic>
+        </mc:Fallback>
+      </mc:AlternateContent>
+      <p:pic>
+        <p:nvPicPr>
+          <p:cNvPr id="14" name="Рисунок 13">
+            <a:extLst>
+              <a:ext uri="{FF2B5EF4-FFF2-40B4-BE49-F238E27FC236}">
+                <a16:creationId xmlns:a16="http://schemas.microsoft.com/office/drawing/2014/main" id="{8C913B4A-CC3D-AC53-64B0-4C5894469336}"/>
+              </a:ext>
+            </a:extLst>
+          </p:cNvPr>
+          <p:cNvPicPr>
+            <a:picLocks noChangeAspect="1"/>
+          </p:cNvPicPr>
+          <p:nvPr/>
+        </p:nvPicPr>
+        <p:blipFill>
+          <a:blip r:embed="rId4"/>
+          <a:stretch>
+            <a:fillRect/>
+          </a:stretch>
+        </p:blipFill>
+        <p:spPr>
+          <a:xfrm>
+            <a:off x="-12355220" y="979027"/>
+            <a:ext cx="5835011" cy="1781214"/>
+          </a:xfrm>
+          <a:prstGeom prst="rect">
+            <a:avLst/>
+          </a:prstGeom>
+        </p:spPr>
+      </p:pic>
+      <p:pic>
+        <p:nvPicPr>
+          <p:cNvPr id="16" name="Рисунок 15">
+            <a:extLst>
+              <a:ext uri="{FF2B5EF4-FFF2-40B4-BE49-F238E27FC236}">
+                <a16:creationId xmlns:a16="http://schemas.microsoft.com/office/drawing/2014/main" id="{2F4C9A0F-9B12-25A6-4502-0276F932AF23}"/>
+              </a:ext>
+            </a:extLst>
+          </p:cNvPr>
+          <p:cNvPicPr>
+            <a:picLocks noChangeAspect="1"/>
+          </p:cNvPicPr>
+          <p:nvPr/>
+        </p:nvPicPr>
+        <p:blipFill>
+          <a:blip r:embed="rId5"/>
+          <a:stretch>
+            <a:fillRect/>
+          </a:stretch>
+        </p:blipFill>
+        <p:spPr>
+          <a:xfrm>
+            <a:off x="15049151" y="3037736"/>
+            <a:ext cx="5835011" cy="1898267"/>
+          </a:xfrm>
+          <a:prstGeom prst="rect">
+            <a:avLst/>
+          </a:prstGeom>
+        </p:spPr>
+      </p:pic>
+      <p:pic>
+        <p:nvPicPr>
+          <p:cNvPr id="20" name="Рисунок 19">
+            <a:extLst>
+              <a:ext uri="{FF2B5EF4-FFF2-40B4-BE49-F238E27FC236}">
+                <a16:creationId xmlns:a16="http://schemas.microsoft.com/office/drawing/2014/main" id="{2F360C33-F541-3651-775B-3C20B66036BF}"/>
+              </a:ext>
+            </a:extLst>
+          </p:cNvPr>
+          <p:cNvPicPr>
+            <a:picLocks noChangeAspect="1"/>
+          </p:cNvPicPr>
+          <p:nvPr/>
+        </p:nvPicPr>
+        <p:blipFill>
+          <a:blip r:embed="rId6"/>
+          <a:stretch>
+            <a:fillRect/>
+          </a:stretch>
+        </p:blipFill>
+        <p:spPr>
+          <a:xfrm>
+            <a:off x="-12066986" y="4936003"/>
+            <a:ext cx="5338623" cy="1705715"/>
+          </a:xfrm>
+          <a:prstGeom prst="rect">
+            <a:avLst/>
+          </a:prstGeom>
+        </p:spPr>
+      </p:pic>
+      <p:pic>
+        <p:nvPicPr>
+          <p:cNvPr id="15" name="Рисунок 14">
+            <a:extLst>
+              <a:ext uri="{FF2B5EF4-FFF2-40B4-BE49-F238E27FC236}">
+                <a16:creationId xmlns:a16="http://schemas.microsoft.com/office/drawing/2014/main" id="{0D6E794B-4B81-68CF-56CC-4A4B97C23225}"/>
+              </a:ext>
+            </a:extLst>
+          </p:cNvPr>
+          <p:cNvPicPr>
+            <a:picLocks noChangeAspect="1"/>
+          </p:cNvPicPr>
+          <p:nvPr/>
+        </p:nvPicPr>
+        <p:blipFill>
+          <a:blip r:embed="rId7"/>
+          <a:stretch>
+            <a:fillRect/>
+          </a:stretch>
+        </p:blipFill>
+        <p:spPr>
+          <a:xfrm>
+            <a:off x="2060964" y="964625"/>
+            <a:ext cx="8107941" cy="5399840"/>
+          </a:xfrm>
+          <a:prstGeom prst="rect">
+            <a:avLst/>
+          </a:prstGeom>
+        </p:spPr>
+      </p:pic>
+      <p:sp>
+        <p:nvSpPr>
+          <p:cNvPr id="4" name="Овал 3">
+            <a:extLst>
+              <a:ext uri="{FF2B5EF4-FFF2-40B4-BE49-F238E27FC236}">
+                <a16:creationId xmlns:a16="http://schemas.microsoft.com/office/drawing/2014/main" id="{B5B91A79-51C5-D4FE-E9C6-400BFE6CEB45}"/>
+              </a:ext>
+            </a:extLst>
+          </p:cNvPr>
+          <p:cNvSpPr/>
+          <p:nvPr/>
+        </p:nvSpPr>
+        <p:spPr>
+          <a:xfrm>
+            <a:off x="11059887" y="5761532"/>
+            <a:ext cx="928914" cy="870857"/>
+          </a:xfrm>
+          <a:prstGeom prst="ellipse">
+            <a:avLst/>
+          </a:prstGeom>
+        </p:spPr>
+        <p:style>
+          <a:lnRef idx="2">
+            <a:schemeClr val="dk1"/>
+          </a:lnRef>
+          <a:fillRef idx="1">
+            <a:schemeClr val="lt1"/>
+          </a:fillRef>
+          <a:effectRef idx="0">
+            <a:schemeClr val="dk1"/>
+          </a:effectRef>
+          <a:fontRef idx="minor">
+            <a:schemeClr val="dk1"/>
+          </a:fontRef>
+        </p:style>
+        <p:txBody>
+          <a:bodyPr rtlCol="0" anchor="ctr"/>
+          <a:lstStyle/>
+          <a:p>
+            <a:pPr algn="ctr"/>
+            <a:r>
+              <a:rPr lang="en-US" sz="4800" b="1" dirty="0">
+                <a:latin typeface="Bahnschrift" panose="020B0502040204020203" pitchFamily="34" charset="0"/>
+              </a:rPr>
+              <a:t>9</a:t>
+            </a:r>
+            <a:endParaRPr lang="ru-RU" sz="4800" b="1" dirty="0">
+              <a:latin typeface="Bahnschrift" panose="020B0502040204020203" pitchFamily="34" charset="0"/>
+            </a:endParaRPr>
+          </a:p>
+        </p:txBody>
+      </p:sp>
+    </p:spTree>
+    <p:extLst>
+      <p:ext uri="{BB962C8B-B14F-4D97-AF65-F5344CB8AC3E}">
+        <p14:creationId xmlns:p14="http://schemas.microsoft.com/office/powerpoint/2010/main" val="3924456240"/>
+      </p:ext>
+    </p:extLst>
+  </p:cSld>
+  <p:clrMapOvr>
+    <a:masterClrMapping/>
+  </p:clrMapOvr>
+  <mc:AlternateContent xmlns:mc="http://schemas.openxmlformats.org/markup-compatibility/2006" xmlns:p159="http://schemas.microsoft.com/office/powerpoint/2015/09/main">
+    <mc:Choice Requires="p159">
+      <p:transition xmlns:p14="http://schemas.microsoft.com/office/powerpoint/2010/main" spd="slow" p14:dur="2000">
+        <p159:morph option="byObject"/>
+      </p:transition>
+    </mc:Choice>
+    <mc:Fallback xmlns="">
+      <p:transition spd="slow">
+        <p:fade/>
+      </p:transition>
+    </mc:Fallback>
+  </mc:AlternateContent>
 </p:sld>
 </file>
 
